--- a/Lectures/03-casestudies.pptx
+++ b/Lectures/03-casestudies.pptx
@@ -261,7 +261,7 @@
       <p15:sldGuideLst xmlns:p15="http://schemas.microsoft.com/office/powerpoint/2012/main"/>
     </p:ext>
     <p:ext uri="http://customooxmlschemas.google.com/">
-      <go:slidesCustomData xmlns="" xmlns:mc="http://schemas.openxmlformats.org/markup-compatibility/2006" xmlns:mv="urn:schemas-microsoft-com:mac:vml" xmlns:c="http://schemas.openxmlformats.org/drawingml/2006/chart" xmlns:dgm="http://schemas.openxmlformats.org/drawingml/2006/diagram" xmlns:o="urn:schemas-microsoft-com:office:office" xmlns:v="urn:schemas-microsoft-com:vml" xmlns:pvml="urn:schemas-microsoft-com:office:powerpoint" xmlns:com="http://schemas.openxmlformats.org/drawingml/2006/compatibility" xmlns:p14="http://schemas.microsoft.com/office/powerpoint/2010/main" xmlns:p15="http://schemas.microsoft.com/office/powerpoint/2012/main" xmlns:go="http://customooxmlschemas.google.com/" r:id="rId30" roundtripDataSignature="AMtx7mjFyVUGRZWio+dc9dxzYsimUxNJbg=="/>
+      <go:slidesCustomData xmlns:go="http://customooxmlschemas.google.com/" xmlns:p15="http://schemas.microsoft.com/office/powerpoint/2012/main" xmlns:p14="http://schemas.microsoft.com/office/powerpoint/2010/main" xmlns:com="http://schemas.openxmlformats.org/drawingml/2006/compatibility" xmlns:pvml="urn:schemas-microsoft-com:office:powerpoint" xmlns:v="urn:schemas-microsoft-com:vml" xmlns:o="urn:schemas-microsoft-com:office:office" xmlns:dgm="http://schemas.openxmlformats.org/drawingml/2006/diagram" xmlns:c="http://schemas.openxmlformats.org/drawingml/2006/chart" xmlns:mv="urn:schemas-microsoft-com:mac:vml" xmlns:mc="http://schemas.openxmlformats.org/markup-compatibility/2006" xmlns="" r:id="rId30" roundtripDataSignature="AMtx7mjFyVUGRZWio+dc9dxzYsimUxNJbg=="/>
     </p:ext>
   </p:extLst>
 </p:presentation>
@@ -280,7 +280,7 @@
 </file>
 
 <file path=ppt/diagrams/colors1.xml><?xml version="1.0" encoding="utf-8"?>
-<dgm:colorsDef xmlns:dgm="http://schemas.openxmlformats.org/drawingml/2006/diagram" xmlns:a="http://schemas.openxmlformats.org/drawingml/2006/main" uniqueId="urn:microsoft.com/office/officeart/2005/8/colors/colorful1">
+<dgm:colorsDef xmlns:dgm="http://schemas.openxmlformats.org/drawingml/2006/diagram" xmlns:a="http://schemas.openxmlformats.org/drawingml/2006/main" uniqueId="urn:microsoft.com/office/officeart/2005/8/colors/colorful1#4">
   <dgm:title val=""/>
   <dgm:desc val=""/>
   <dgm:catLst>
@@ -1202,7 +1202,7 @@
 <dgm:dataModel xmlns:dgm="http://schemas.openxmlformats.org/drawingml/2006/diagram" xmlns:a="http://schemas.openxmlformats.org/drawingml/2006/main">
   <dgm:ptLst>
     <dgm:pt modelId="{E9FB0F4E-6967-3B44-A32F-E8B1C7AE98D5}" type="doc">
-      <dgm:prSet loTypeId="urn:microsoft.com/office/officeart/2005/8/layout/process5" loCatId="" qsTypeId="urn:microsoft.com/office/officeart/2005/8/quickstyle/simple1" qsCatId="simple" csTypeId="urn:microsoft.com/office/officeart/2005/8/colors/colorful1" csCatId="colorful" phldr="1"/>
+      <dgm:prSet loTypeId="urn:microsoft.com/office/officeart/2005/8/layout/process5" loCatId="" qsTypeId="urn:microsoft.com/office/officeart/2005/8/quickstyle/simple1#4" qsCatId="simple" csTypeId="urn:microsoft.com/office/officeart/2005/8/colors/colorful1#4" csCatId="colorful" phldr="1"/>
       <dgm:spPr/>
       <dgm:t>
         <a:bodyPr/>
@@ -4251,7 +4251,7 @@
 </file>
 
 <file path=ppt/diagrams/quickStyle1.xml><?xml version="1.0" encoding="utf-8"?>
-<dgm:styleDef xmlns:dgm="http://schemas.openxmlformats.org/drawingml/2006/diagram" xmlns:a="http://schemas.openxmlformats.org/drawingml/2006/main" uniqueId="urn:microsoft.com/office/officeart/2005/8/quickstyle/simple1">
+<dgm:styleDef xmlns:dgm="http://schemas.openxmlformats.org/drawingml/2006/diagram" xmlns:a="http://schemas.openxmlformats.org/drawingml/2006/main" uniqueId="urn:microsoft.com/office/officeart/2005/8/quickstyle/simple1#4">
   <dgm:title val=""/>
   <dgm:desc val=""/>
   <dgm:catLst>
@@ -13184,7 +13184,7 @@
           <a:p>
             <a:r>
               <a:rPr lang="en-US" dirty="0"/>
-              <a:t>Tomorrow’s lab session on remote workflows</a:t>
+              <a:t>Friday lab session on remote workflows</a:t>
             </a:r>
           </a:p>
           <a:p>
@@ -13277,7 +13277,7 @@
                   <a:srgbClr val="FFFF00"/>
                 </a:highlight>
               </a:rPr>
-              <a:t>(Tuesday, Sep 16)</a:t>
+              <a:t>(Tuesday, Sep 15)</a:t>
             </a:r>
           </a:p>
           <a:p>
@@ -13369,7 +13369,7 @@
           <a:p>
             <a:r>
               <a:rPr lang="en-US" dirty="0"/>
-              <a:t>Wednesday session on remote workflows and accessing project data</a:t>
+              <a:t>Friday session on remote workflows and accessing project data</a:t>
             </a:r>
           </a:p>
           <a:p>
@@ -13462,7 +13462,7 @@
                   <a:srgbClr val="FFFF00"/>
                 </a:highlight>
               </a:rPr>
-              <a:t>(Tuesday, Sep 16)</a:t>
+              <a:t>(Tuesday, Sep 15)</a:t>
             </a:r>
           </a:p>
           <a:p>
@@ -13577,7 +13577,7 @@
             </a:r>
             <a:r>
               <a:rPr lang="en-US" dirty="0"/>
-              <a:t>/mlpolicylab_fall25_{</a:t>
+              <a:t>/mlpolicylab_fall26_{</a:t>
             </a:r>
             <a:r>
               <a:rPr lang="en-US" dirty="0" err="1"/>

--- a/Lectures/03-casestudies.pptx
+++ b/Lectures/03-casestudies.pptx
@@ -5,25 +5,34 @@
     <p:sldMasterId id="2147483648" r:id="rId1"/>
   </p:sldMasterIdLst>
   <p:notesMasterIdLst>
-    <p:notesMasterId r:id="rId18"/>
+    <p:notesMasterId r:id="rId27"/>
   </p:notesMasterIdLst>
   <p:sldIdLst>
     <p:sldId id="256" r:id="rId2"/>
     <p:sldId id="281" r:id="rId3"/>
-    <p:sldId id="307" r:id="rId4"/>
-    <p:sldId id="261" r:id="rId5"/>
-    <p:sldId id="308" r:id="rId6"/>
-    <p:sldId id="309" r:id="rId7"/>
-    <p:sldId id="297" r:id="rId8"/>
-    <p:sldId id="295" r:id="rId9"/>
-    <p:sldId id="296" r:id="rId10"/>
-    <p:sldId id="299" r:id="rId11"/>
-    <p:sldId id="305" r:id="rId12"/>
-    <p:sldId id="300" r:id="rId13"/>
-    <p:sldId id="301" r:id="rId14"/>
-    <p:sldId id="302" r:id="rId15"/>
-    <p:sldId id="310" r:id="rId16"/>
-    <p:sldId id="311" r:id="rId17"/>
+    <p:sldId id="319" r:id="rId4"/>
+    <p:sldId id="307" r:id="rId5"/>
+    <p:sldId id="261" r:id="rId6"/>
+    <p:sldId id="308" r:id="rId7"/>
+    <p:sldId id="309" r:id="rId8"/>
+    <p:sldId id="297" r:id="rId9"/>
+    <p:sldId id="295" r:id="rId10"/>
+    <p:sldId id="296" r:id="rId11"/>
+    <p:sldId id="299" r:id="rId12"/>
+    <p:sldId id="305" r:id="rId13"/>
+    <p:sldId id="300" r:id="rId14"/>
+    <p:sldId id="301" r:id="rId15"/>
+    <p:sldId id="302" r:id="rId16"/>
+    <p:sldId id="310" r:id="rId17"/>
+    <p:sldId id="312" r:id="rId18"/>
+    <p:sldId id="313" r:id="rId19"/>
+    <p:sldId id="314" r:id="rId20"/>
+    <p:sldId id="315" r:id="rId21"/>
+    <p:sldId id="316" r:id="rId22"/>
+    <p:sldId id="317" r:id="rId23"/>
+    <p:sldId id="318" r:id="rId24"/>
+    <p:sldId id="311" r:id="rId25"/>
+    <p:sldId id="320" r:id="rId26"/>
   </p:sldIdLst>
   <p:sldSz cx="12192000" cy="6858000"/>
   <p:notesSz cx="6858000" cy="9144000"/>
@@ -261,7 +270,7 @@
       <p15:sldGuideLst xmlns:p15="http://schemas.microsoft.com/office/powerpoint/2012/main"/>
     </p:ext>
     <p:ext uri="http://customooxmlschemas.google.com/">
-      <go:slidesCustomData xmlns:go="http://customooxmlschemas.google.com/" xmlns:p15="http://schemas.microsoft.com/office/powerpoint/2012/main" xmlns:p14="http://schemas.microsoft.com/office/powerpoint/2010/main" xmlns:com="http://schemas.openxmlformats.org/drawingml/2006/compatibility" xmlns:pvml="urn:schemas-microsoft-com:office:powerpoint" xmlns:v="urn:schemas-microsoft-com:vml" xmlns:o="urn:schemas-microsoft-com:office:office" xmlns:dgm="http://schemas.openxmlformats.org/drawingml/2006/diagram" xmlns:c="http://schemas.openxmlformats.org/drawingml/2006/chart" xmlns:mv="urn:schemas-microsoft-com:mac:vml" xmlns:mc="http://schemas.openxmlformats.org/markup-compatibility/2006" xmlns="" r:id="rId30" roundtripDataSignature="AMtx7mjFyVUGRZWio+dc9dxzYsimUxNJbg=="/>
+      <go:slidesCustomData xmlns="" xmlns:mc="http://schemas.openxmlformats.org/markup-compatibility/2006" xmlns:mv="urn:schemas-microsoft-com:mac:vml" xmlns:c="http://schemas.openxmlformats.org/drawingml/2006/chart" xmlns:dgm="http://schemas.openxmlformats.org/drawingml/2006/diagram" xmlns:o="urn:schemas-microsoft-com:office:office" xmlns:v="urn:schemas-microsoft-com:vml" xmlns:pvml="urn:schemas-microsoft-com:office:powerpoint" xmlns:com="http://schemas.openxmlformats.org/drawingml/2006/compatibility" xmlns:p14="http://schemas.microsoft.com/office/powerpoint/2010/main" xmlns:p15="http://schemas.microsoft.com/office/powerpoint/2012/main" xmlns:go="http://customooxmlschemas.google.com/" r:id="rId30" roundtripDataSignature="AMtx7mjFyVUGRZWio+dc9dxzYsimUxNJbg=="/>
     </p:ext>
   </p:extLst>
 </p:presentation>
@@ -6704,7 +6713,7 @@
                 <a:cs typeface="Calibri"/>
                 <a:sym typeface="Calibri"/>
               </a:rPr>
-              <a:t>9</a:t>
+              <a:t>10</a:t>
             </a:fld>
             <a:endParaRPr lang="en-US" sz="1200" b="0" i="0" u="none" strike="noStrike" cap="none">
               <a:solidFill>
@@ -12285,131 +12294,40 @@
           </a:p>
         </p:txBody>
       </p:sp>
-      <p:sp>
-        <p:nvSpPr>
-          <p:cNvPr id="6" name="Google Shape;205;p17">
+      <p:pic>
+        <p:nvPicPr>
+          <p:cNvPr id="4" name="Picture 3">
             <a:extLst>
               <a:ext uri="{FF2B5EF4-FFF2-40B4-BE49-F238E27FC236}">
-                <a16:creationId xmlns:a16="http://schemas.microsoft.com/office/drawing/2014/main" id="{662D86EB-0258-0B4A-BD6B-21DB54554E75}"/>
+                <a16:creationId xmlns:a16="http://schemas.microsoft.com/office/drawing/2014/main" id="{51603EA9-D766-944A-8E3A-F6DF40F326AA}"/>
               </a:ext>
             </a:extLst>
           </p:cNvPr>
-          <p:cNvSpPr txBox="1">
-            <a:spLocks noGrp="1"/>
-          </p:cNvSpPr>
-          <p:nvPr>
-            <p:ph type="body" idx="1"/>
-          </p:nvPr>
-        </p:nvSpPr>
+          <p:cNvPicPr>
+            <a:picLocks noChangeAspect="1"/>
+          </p:cNvPicPr>
+          <p:nvPr/>
+        </p:nvPicPr>
+        <p:blipFill>
+          <a:blip r:embed="rId3"/>
+          <a:stretch>
+            <a:fillRect/>
+          </a:stretch>
+        </p:blipFill>
         <p:spPr>
           <a:xfrm>
-            <a:off x="415600" y="1536633"/>
-            <a:ext cx="11360700" cy="4555200"/>
+            <a:off x="888950" y="1670050"/>
+            <a:ext cx="10414000" cy="3517900"/>
           </a:xfrm>
           <a:prstGeom prst="rect">
             <a:avLst/>
           </a:prstGeom>
-          <a:noFill/>
-          <a:ln>
-            <a:noFill/>
-          </a:ln>
         </p:spPr>
-        <p:txBody>
-          <a:bodyPr spcFirstLastPara="1" wrap="square" lIns="91425" tIns="45700" rIns="91425" bIns="45700" anchor="t" anchorCtr="0">
-            <a:noAutofit/>
-          </a:bodyPr>
-          <a:lstStyle/>
-          <a:p>
-            <a:pPr marL="0" lvl="0" indent="0" algn="l" rtl="0">
-              <a:spcBef>
-                <a:spcPts val="0"/>
-              </a:spcBef>
-              <a:spcAft>
-                <a:spcPts val="0"/>
-              </a:spcAft>
-              <a:buClr>
-                <a:srgbClr val="000000"/>
-              </a:buClr>
-              <a:buSzPts val="3200"/>
-              <a:buNone/>
-            </a:pPr>
-            <a:endParaRPr lang="en-US" sz="4000" dirty="0">
-              <a:solidFill>
-                <a:srgbClr val="000000"/>
-              </a:solidFill>
-            </a:endParaRPr>
-          </a:p>
-          <a:p>
-            <a:pPr marL="0" lvl="0" indent="0" algn="l" rtl="0">
-              <a:spcBef>
-                <a:spcPts val="0"/>
-              </a:spcBef>
-              <a:spcAft>
-                <a:spcPts val="0"/>
-              </a:spcAft>
-              <a:buClr>
-                <a:srgbClr val="000000"/>
-              </a:buClr>
-              <a:buSzPts val="3200"/>
-              <a:buNone/>
-            </a:pPr>
-            <a:endParaRPr lang="en-US" sz="4000" dirty="0">
-              <a:solidFill>
-                <a:srgbClr val="000000"/>
-              </a:solidFill>
-            </a:endParaRPr>
-          </a:p>
-          <a:p>
-            <a:pPr marL="0" lvl="0" indent="0">
-              <a:buClr>
-                <a:srgbClr val="000000"/>
-              </a:buClr>
-              <a:buSzPts val="3200"/>
-              <a:buNone/>
-            </a:pPr>
-            <a:r>
-              <a:rPr lang="en-US" sz="4000" dirty="0">
-                <a:solidFill>
-                  <a:srgbClr val="000000"/>
-                </a:solidFill>
-              </a:rPr>
-              <a:t>If you were scoping the project described here, how would you describe the overall goal?</a:t>
-            </a:r>
-          </a:p>
-          <a:p>
-            <a:pPr marL="0" lvl="0" indent="0">
-              <a:buClr>
-                <a:srgbClr val="000000"/>
-              </a:buClr>
-              <a:buSzPts val="3200"/>
-              <a:buNone/>
-            </a:pPr>
-            <a:endParaRPr lang="en-US" sz="4000" dirty="0">
-              <a:solidFill>
-                <a:srgbClr val="000000"/>
-              </a:solidFill>
-            </a:endParaRPr>
-          </a:p>
-          <a:p>
-            <a:pPr marL="0" lvl="0" indent="0">
-              <a:buClr>
-                <a:srgbClr val="000000"/>
-              </a:buClr>
-              <a:buSzPts val="3200"/>
-              <a:buNone/>
-            </a:pPr>
-            <a:endParaRPr sz="4000" dirty="0">
-              <a:solidFill>
-                <a:srgbClr val="000000"/>
-              </a:solidFill>
-            </a:endParaRPr>
-          </a:p>
-        </p:txBody>
-      </p:sp>
+      </p:pic>
     </p:spTree>
     <p:extLst>
       <p:ext uri="{BB962C8B-B14F-4D97-AF65-F5344CB8AC3E}">
-        <p14:creationId xmlns:p14="http://schemas.microsoft.com/office/powerpoint/2010/main" val="639899210"/>
+        <p14:creationId xmlns:p14="http://schemas.microsoft.com/office/powerpoint/2010/main" val="2039079746"/>
       </p:ext>
     </p:extLst>
   </p:cSld>
@@ -12519,6 +12437,26 @@
             </a:endParaRPr>
           </a:p>
           <a:p>
+            <a:pPr marL="0" lvl="0" indent="0" algn="l" rtl="0">
+              <a:spcBef>
+                <a:spcPts val="0"/>
+              </a:spcBef>
+              <a:spcAft>
+                <a:spcPts val="0"/>
+              </a:spcAft>
+              <a:buClr>
+                <a:srgbClr val="000000"/>
+              </a:buClr>
+              <a:buSzPts val="3200"/>
+              <a:buNone/>
+            </a:pPr>
+            <a:endParaRPr lang="en-US" sz="4000" dirty="0">
+              <a:solidFill>
+                <a:srgbClr val="000000"/>
+              </a:solidFill>
+            </a:endParaRPr>
+          </a:p>
+          <a:p>
             <a:pPr marL="0" lvl="0" indent="0">
               <a:buClr>
                 <a:srgbClr val="000000"/>
@@ -12532,7 +12470,7 @@
                   <a:srgbClr val="000000"/>
                 </a:solidFill>
               </a:rPr>
-              <a:t>How well does the paper address the goal we defined above?</a:t>
+              <a:t>If you were scoping the project described here, how would you describe the overall goal?</a:t>
             </a:r>
           </a:p>
           <a:p>
@@ -12549,12 +12487,26 @@
               </a:solidFill>
             </a:endParaRPr>
           </a:p>
+          <a:p>
+            <a:pPr marL="0" lvl="0" indent="0">
+              <a:buClr>
+                <a:srgbClr val="000000"/>
+              </a:buClr>
+              <a:buSzPts val="3200"/>
+              <a:buNone/>
+            </a:pPr>
+            <a:endParaRPr sz="4000" dirty="0">
+              <a:solidFill>
+                <a:srgbClr val="000000"/>
+              </a:solidFill>
+            </a:endParaRPr>
+          </a:p>
         </p:txBody>
       </p:sp>
     </p:spTree>
     <p:extLst>
       <p:ext uri="{BB962C8B-B14F-4D97-AF65-F5344CB8AC3E}">
-        <p14:creationId xmlns:p14="http://schemas.microsoft.com/office/powerpoint/2010/main" val="4284856106"/>
+        <p14:creationId xmlns:p14="http://schemas.microsoft.com/office/powerpoint/2010/main" val="639899210"/>
       </p:ext>
     </p:extLst>
   </p:cSld>
@@ -12677,9 +12629,18 @@
                   <a:srgbClr val="000000"/>
                 </a:solidFill>
               </a:rPr>
-              <a:t>How well does the paper address the goal you defined above? What evidence do they provide in this regard?</a:t>
+              <a:t>How well does the paper address the goal we defined above?</a:t>
             </a:r>
-            <a:endParaRPr sz="4000" dirty="0">
+          </a:p>
+          <a:p>
+            <a:pPr marL="0" lvl="0" indent="0">
+              <a:buClr>
+                <a:srgbClr val="000000"/>
+              </a:buClr>
+              <a:buSzPts val="3200"/>
+              <a:buNone/>
+            </a:pPr>
+            <a:endParaRPr lang="en-US" sz="4000" dirty="0">
               <a:solidFill>
                 <a:srgbClr val="000000"/>
               </a:solidFill>
@@ -12690,7 +12651,7 @@
     </p:spTree>
     <p:extLst>
       <p:ext uri="{BB962C8B-B14F-4D97-AF65-F5344CB8AC3E}">
-        <p14:creationId xmlns:p14="http://schemas.microsoft.com/office/powerpoint/2010/main" val="1443994749"/>
+        <p14:creationId xmlns:p14="http://schemas.microsoft.com/office/powerpoint/2010/main" val="4284856106"/>
       </p:ext>
     </p:extLst>
   </p:cSld>
@@ -12800,26 +12761,6 @@
             </a:endParaRPr>
           </a:p>
           <a:p>
-            <a:pPr marL="0" lvl="0" indent="0" algn="l" rtl="0">
-              <a:spcBef>
-                <a:spcPts val="0"/>
-              </a:spcBef>
-              <a:spcAft>
-                <a:spcPts val="0"/>
-              </a:spcAft>
-              <a:buClr>
-                <a:srgbClr val="000000"/>
-              </a:buClr>
-              <a:buSzPts val="3200"/>
-              <a:buNone/>
-            </a:pPr>
-            <a:endParaRPr lang="en-US" sz="4000" dirty="0">
-              <a:solidFill>
-                <a:srgbClr val="000000"/>
-              </a:solidFill>
-            </a:endParaRPr>
-          </a:p>
-          <a:p>
             <a:pPr marL="0" lvl="0" indent="0">
               <a:buClr>
                 <a:srgbClr val="000000"/>
@@ -12833,7 +12774,7 @@
                   <a:srgbClr val="000000"/>
                 </a:solidFill>
               </a:rPr>
-              <a:t>What actions can the public health officials take to achieve that goal?</a:t>
+              <a:t>How well does the paper address the goal you defined above? What evidence do they provide in this regard?</a:t>
             </a:r>
             <a:endParaRPr sz="4000" dirty="0">
               <a:solidFill>
@@ -12846,7 +12787,7 @@
     </p:spTree>
     <p:extLst>
       <p:ext uri="{BB962C8B-B14F-4D97-AF65-F5344CB8AC3E}">
-        <p14:creationId xmlns:p14="http://schemas.microsoft.com/office/powerpoint/2010/main" val="2564637539"/>
+        <p14:creationId xmlns:p14="http://schemas.microsoft.com/office/powerpoint/2010/main" val="1443994749"/>
       </p:ext>
     </p:extLst>
   </p:cSld>
@@ -12936,7 +12877,33 @@
           </a:bodyPr>
           <a:lstStyle/>
           <a:p>
-            <a:pPr marL="0" lvl="0" indent="0">
+            <a:pPr marL="0" lvl="0" indent="0" algn="l" rtl="0">
+              <a:spcBef>
+                <a:spcPts val="0"/>
+              </a:spcBef>
+              <a:spcAft>
+                <a:spcPts val="0"/>
+              </a:spcAft>
+              <a:buClr>
+                <a:srgbClr val="000000"/>
+              </a:buClr>
+              <a:buSzPts val="3200"/>
+              <a:buNone/>
+            </a:pPr>
+            <a:endParaRPr lang="en-US" sz="4000" dirty="0">
+              <a:solidFill>
+                <a:srgbClr val="000000"/>
+              </a:solidFill>
+            </a:endParaRPr>
+          </a:p>
+          <a:p>
+            <a:pPr marL="0" lvl="0" indent="0" algn="l" rtl="0">
+              <a:spcBef>
+                <a:spcPts val="0"/>
+              </a:spcBef>
+              <a:spcAft>
+                <a:spcPts val="0"/>
+              </a:spcAft>
               <a:buClr>
                 <a:srgbClr val="000000"/>
               </a:buClr>
@@ -12963,7 +12930,7 @@
                   <a:srgbClr val="000000"/>
                 </a:solidFill>
               </a:rPr>
-              <a:t>In what ways did the model change the actions or decisions that public health officials are taking in terms of when, where, and how to act?</a:t>
+              <a:t>What actions can the public health officials take to achieve that goal?</a:t>
             </a:r>
             <a:endParaRPr sz="4000" dirty="0">
               <a:solidFill>
@@ -12976,7 +12943,7 @@
     </p:spTree>
     <p:extLst>
       <p:ext uri="{BB962C8B-B14F-4D97-AF65-F5344CB8AC3E}">
-        <p14:creationId xmlns:p14="http://schemas.microsoft.com/office/powerpoint/2010/main" val="3255311184"/>
+        <p14:creationId xmlns:p14="http://schemas.microsoft.com/office/powerpoint/2010/main" val="2564637539"/>
       </p:ext>
     </p:extLst>
   </p:cSld>
@@ -13093,7 +13060,7 @@
                   <a:srgbClr val="000000"/>
                 </a:solidFill>
               </a:rPr>
-              <a:t>What ethical or fairness considerations might be relevant here? How were these addressed in the paper?</a:t>
+              <a:t>In what ways did the model change the actions or decisions that public health officials are taking in terms of when, where, and how to act?</a:t>
             </a:r>
             <a:endParaRPr sz="4000" dirty="0">
               <a:solidFill>
@@ -13106,7 +13073,7 @@
     </p:spTree>
     <p:extLst>
       <p:ext uri="{BB962C8B-B14F-4D97-AF65-F5344CB8AC3E}">
-        <p14:creationId xmlns:p14="http://schemas.microsoft.com/office/powerpoint/2010/main" val="2410433022"/>
+        <p14:creationId xmlns:p14="http://schemas.microsoft.com/office/powerpoint/2010/main" val="3255311184"/>
       </p:ext>
     </p:extLst>
   </p:cSld>
@@ -13135,10 +13102,10 @@
       </p:grpSpPr>
       <p:sp>
         <p:nvSpPr>
-          <p:cNvPr id="3" name="Title 2">
+          <p:cNvPr id="2" name="Title 1">
             <a:extLst>
               <a:ext uri="{FF2B5EF4-FFF2-40B4-BE49-F238E27FC236}">
-                <a16:creationId xmlns:a16="http://schemas.microsoft.com/office/drawing/2014/main" id="{9323871C-7CA8-1448-8FFC-1AE6E1838941}"/>
+                <a16:creationId xmlns:a16="http://schemas.microsoft.com/office/drawing/2014/main" id="{8DE1804F-1831-E540-A1DC-073BA8437BAB}"/>
               </a:ext>
             </a:extLst>
           </p:cNvPr>
@@ -13156,17 +13123,147 @@
           <a:p>
             <a:r>
               <a:rPr lang="en-US" dirty="0"/>
-              <a:t>Things to remember</a:t>
+              <a:t>Case Study</a:t>
             </a:r>
           </a:p>
         </p:txBody>
       </p:sp>
       <p:sp>
         <p:nvSpPr>
-          <p:cNvPr id="4" name="Text Placeholder 3">
+          <p:cNvPr id="6" name="Google Shape;205;p17">
             <a:extLst>
               <a:ext uri="{FF2B5EF4-FFF2-40B4-BE49-F238E27FC236}">
-                <a16:creationId xmlns:a16="http://schemas.microsoft.com/office/drawing/2014/main" id="{5E600BA7-FA45-884F-9820-9E5F2CB7AA48}"/>
+                <a16:creationId xmlns:a16="http://schemas.microsoft.com/office/drawing/2014/main" id="{662D86EB-0258-0B4A-BD6B-21DB54554E75}"/>
+              </a:ext>
+            </a:extLst>
+          </p:cNvPr>
+          <p:cNvSpPr txBox="1">
+            <a:spLocks noGrp="1"/>
+          </p:cNvSpPr>
+          <p:nvPr>
+            <p:ph type="body" idx="1"/>
+          </p:nvPr>
+        </p:nvSpPr>
+        <p:spPr>
+          <a:xfrm>
+            <a:off x="415600" y="1536633"/>
+            <a:ext cx="11360700" cy="4555200"/>
+          </a:xfrm>
+          <a:prstGeom prst="rect">
+            <a:avLst/>
+          </a:prstGeom>
+          <a:noFill/>
+          <a:ln>
+            <a:noFill/>
+          </a:ln>
+        </p:spPr>
+        <p:txBody>
+          <a:bodyPr spcFirstLastPara="1" wrap="square" lIns="91425" tIns="45700" rIns="91425" bIns="45700" anchor="t" anchorCtr="0">
+            <a:noAutofit/>
+          </a:bodyPr>
+          <a:lstStyle/>
+          <a:p>
+            <a:pPr marL="0" lvl="0" indent="0">
+              <a:buClr>
+                <a:srgbClr val="000000"/>
+              </a:buClr>
+              <a:buSzPts val="3200"/>
+              <a:buNone/>
+            </a:pPr>
+            <a:endParaRPr lang="en-US" sz="4000" dirty="0">
+              <a:solidFill>
+                <a:srgbClr val="000000"/>
+              </a:solidFill>
+            </a:endParaRPr>
+          </a:p>
+          <a:p>
+            <a:pPr marL="0" lvl="0" indent="0">
+              <a:buClr>
+                <a:srgbClr val="000000"/>
+              </a:buClr>
+              <a:buSzPts val="3200"/>
+              <a:buNone/>
+            </a:pPr>
+            <a:r>
+              <a:rPr lang="en-US" sz="4000" dirty="0">
+                <a:solidFill>
+                  <a:srgbClr val="000000"/>
+                </a:solidFill>
+              </a:rPr>
+              <a:t>What ethical or fairness considerations might be relevant here? How were these addressed in the paper?</a:t>
+            </a:r>
+            <a:endParaRPr sz="4000" dirty="0">
+              <a:solidFill>
+                <a:srgbClr val="000000"/>
+              </a:solidFill>
+            </a:endParaRPr>
+          </a:p>
+        </p:txBody>
+      </p:sp>
+    </p:spTree>
+    <p:extLst>
+      <p:ext uri="{BB962C8B-B14F-4D97-AF65-F5344CB8AC3E}">
+        <p14:creationId xmlns:p14="http://schemas.microsoft.com/office/powerpoint/2010/main" val="2410433022"/>
+      </p:ext>
+    </p:extLst>
+  </p:cSld>
+  <p:clrMapOvr>
+    <a:masterClrMapping/>
+  </p:clrMapOvr>
+</p:sld>
+</file>
+
+<file path=ppt/slides/slide17.xml><?xml version="1.0" encoding="utf-8"?>
+<p:sld xmlns:a="http://schemas.openxmlformats.org/drawingml/2006/main" xmlns:r="http://schemas.openxmlformats.org/officeDocument/2006/relationships" xmlns:p="http://schemas.openxmlformats.org/presentationml/2006/main">
+  <p:cSld>
+    <p:spTree>
+      <p:nvGrpSpPr>
+        <p:cNvPr id="1" name=""/>
+        <p:cNvGrpSpPr/>
+        <p:nvPr/>
+      </p:nvGrpSpPr>
+      <p:grpSpPr>
+        <a:xfrm>
+          <a:off x="0" y="0"/>
+          <a:ext cx="0" cy="0"/>
+          <a:chOff x="0" y="0"/>
+          <a:chExt cx="0" cy="0"/>
+        </a:xfrm>
+      </p:grpSpPr>
+      <p:sp>
+        <p:nvSpPr>
+          <p:cNvPr id="2" name="Title 1">
+            <a:extLst>
+              <a:ext uri="{FF2B5EF4-FFF2-40B4-BE49-F238E27FC236}">
+                <a16:creationId xmlns:a16="http://schemas.microsoft.com/office/drawing/2014/main" id="{61406C43-A3C0-158F-28F0-F8E000815365}"/>
+              </a:ext>
+            </a:extLst>
+          </p:cNvPr>
+          <p:cNvSpPr>
+            <a:spLocks noGrp="1"/>
+          </p:cNvSpPr>
+          <p:nvPr>
+            <p:ph type="title"/>
+          </p:nvPr>
+        </p:nvSpPr>
+        <p:spPr/>
+        <p:txBody>
+          <a:bodyPr/>
+          <a:lstStyle/>
+          <a:p>
+            <a:r>
+              <a:rPr lang="en-US" dirty="0"/>
+              <a:t>Bonus questions to consider (after class)</a:t>
+            </a:r>
+          </a:p>
+        </p:txBody>
+      </p:sp>
+      <p:sp>
+        <p:nvSpPr>
+          <p:cNvPr id="3" name="Text Placeholder 2">
+            <a:extLst>
+              <a:ext uri="{FF2B5EF4-FFF2-40B4-BE49-F238E27FC236}">
+                <a16:creationId xmlns:a16="http://schemas.microsoft.com/office/drawing/2014/main" id="{1C85382C-0370-09E1-4F68-D95FE8852347}"/>
               </a:ext>
             </a:extLst>
           </p:cNvPr>
@@ -13179,111 +13276,67 @@
         </p:nvSpPr>
         <p:spPr/>
         <p:txBody>
-          <a:bodyPr lIns="118872"/>
+          <a:bodyPr/>
           <a:lstStyle/>
           <a:p>
             <a:r>
               <a:rPr lang="en-US" dirty="0"/>
-              <a:t>Friday lab session on remote workflows</a:t>
+              <a:t>Using the </a:t>
             </a:r>
-          </a:p>
-          <a:p>
-            <a:endParaRPr lang="en-US" dirty="0"/>
-          </a:p>
-          <a:p>
-            <a:pPr>
-              <a:lnSpc>
-                <a:spcPct val="100000"/>
-              </a:lnSpc>
-            </a:pPr>
+            <a:r>
+              <a:rPr lang="en-US" dirty="0">
+                <a:hlinkClick r:id="rId2"/>
+              </a:rPr>
+              <a:t>scoping guide</a:t>
+            </a:r>
             <a:r>
               <a:rPr lang="en-US" dirty="0"/>
-              <a:t>Focus for this week is getting to know:</a:t>
+              <a:t>, which step is weakest in this paper?</a:t>
             </a:r>
           </a:p>
           <a:p>
-            <a:pPr lvl="1">
-              <a:lnSpc>
-                <a:spcPct val="100000"/>
-              </a:lnSpc>
-              <a:spcBef>
-                <a:spcPts val="300"/>
-              </a:spcBef>
-            </a:pPr>
+            <a:pPr lvl="1"/>
             <a:r>
               <a:rPr lang="en-US" dirty="0"/>
-              <a:t>Your team</a:t>
+              <a:t>Problem understanding</a:t>
             </a:r>
           </a:p>
           <a:p>
-            <a:pPr lvl="1">
-              <a:lnSpc>
-                <a:spcPct val="100000"/>
-              </a:lnSpc>
-              <a:spcBef>
-                <a:spcPts val="300"/>
-              </a:spcBef>
-            </a:pPr>
+            <a:pPr lvl="1"/>
             <a:r>
               <a:rPr lang="en-US" dirty="0"/>
-              <a:t>Your project</a:t>
+              <a:t>Goals</a:t>
             </a:r>
           </a:p>
           <a:p>
-            <a:pPr lvl="1">
-              <a:lnSpc>
-                <a:spcPct val="100000"/>
-              </a:lnSpc>
-              <a:spcBef>
-                <a:spcPts val="300"/>
-              </a:spcBef>
-            </a:pPr>
+            <a:pPr lvl="1"/>
             <a:r>
               <a:rPr lang="en-US" dirty="0"/>
-              <a:t>Your data</a:t>
+              <a:t>Actions</a:t>
             </a:r>
-            <a:br>
-              <a:rPr lang="en-US" dirty="0"/>
-            </a:br>
-            <a:endParaRPr lang="en-US" dirty="0"/>
-          </a:p>
-          <a:p>
+          </a:p>
+          <a:p>
+            <a:pPr lvl="1"/>
             <a:r>
               <a:rPr lang="en-US" dirty="0"/>
-              <a:t>Following week:</a:t>
+              <a:t>Data</a:t>
             </a:r>
           </a:p>
           <a:p>
-            <a:pPr lvl="1">
-              <a:spcBef>
-                <a:spcPts val="0"/>
-              </a:spcBef>
-            </a:pPr>
+            <a:pPr lvl="1"/>
             <a:r>
-              <a:rPr lang="en-US" sz="2200" dirty="0">
-                <a:solidFill>
-                  <a:srgbClr val="C00000"/>
-                </a:solidFill>
-              </a:rPr>
-              <a:t>Project Proposal</a:t>
+              <a:rPr lang="en-US" dirty="0"/>
+              <a:t>Analysis</a:t>
             </a:r>
+          </a:p>
+          <a:p>
+            <a:pPr lvl="1"/>
             <a:r>
-              <a:rPr lang="en-US" sz="2200" dirty="0"/>
-              <a:t> </a:t>
+              <a:rPr lang="en-US" dirty="0"/>
+              <a:t>Ethics</a:t>
             </a:r>
-            <a:r>
-              <a:rPr lang="en-US" sz="2200" dirty="0">
-                <a:highlight>
-                  <a:srgbClr val="FFFF00"/>
-                </a:highlight>
-              </a:rPr>
-              <a:t>(Tuesday, Sep 15)</a:t>
-            </a:r>
-          </a:p>
-          <a:p>
-            <a:pPr marL="76200" indent="0">
-              <a:buNone/>
-            </a:pPr>
+          </a:p>
+          <a:p>
             <a:endParaRPr lang="en-US" dirty="0"/>
           </a:p>
         </p:txBody>
@@ -13291,7 +13344,261 @@
     </p:spTree>
     <p:extLst>
       <p:ext uri="{BB962C8B-B14F-4D97-AF65-F5344CB8AC3E}">
-        <p14:creationId xmlns:p14="http://schemas.microsoft.com/office/powerpoint/2010/main" val="2922547611"/>
+        <p14:creationId xmlns:p14="http://schemas.microsoft.com/office/powerpoint/2010/main" val="2267483000"/>
+      </p:ext>
+    </p:extLst>
+  </p:cSld>
+  <p:clrMapOvr>
+    <a:masterClrMapping/>
+  </p:clrMapOvr>
+</p:sld>
+</file>
+
+<file path=ppt/slides/slide18.xml><?xml version="1.0" encoding="utf-8"?>
+<p:sld xmlns:a="http://schemas.openxmlformats.org/drawingml/2006/main" xmlns:r="http://schemas.openxmlformats.org/officeDocument/2006/relationships" xmlns:p="http://schemas.openxmlformats.org/presentationml/2006/main">
+  <p:cSld>
+    <p:spTree>
+      <p:nvGrpSpPr>
+        <p:cNvPr id="1" name="">
+          <a:extLst>
+            <a:ext uri="{FF2B5EF4-FFF2-40B4-BE49-F238E27FC236}">
+              <a16:creationId xmlns:a16="http://schemas.microsoft.com/office/drawing/2014/main" id="{52FA6CF7-A5B6-9A4D-50FF-1081514A08D6}"/>
+            </a:ext>
+          </a:extLst>
+        </p:cNvPr>
+        <p:cNvGrpSpPr/>
+        <p:nvPr/>
+      </p:nvGrpSpPr>
+      <p:grpSpPr>
+        <a:xfrm>
+          <a:off x="0" y="0"/>
+          <a:ext cx="0" cy="0"/>
+          <a:chOff x="0" y="0"/>
+          <a:chExt cx="0" cy="0"/>
+        </a:xfrm>
+      </p:grpSpPr>
+      <p:sp>
+        <p:nvSpPr>
+          <p:cNvPr id="2" name="Title 1">
+            <a:extLst>
+              <a:ext uri="{FF2B5EF4-FFF2-40B4-BE49-F238E27FC236}">
+                <a16:creationId xmlns:a16="http://schemas.microsoft.com/office/drawing/2014/main" id="{EB78112A-6BD2-3FF4-D04E-8BA2089CD3A1}"/>
+              </a:ext>
+            </a:extLst>
+          </p:cNvPr>
+          <p:cNvSpPr>
+            <a:spLocks noGrp="1"/>
+          </p:cNvSpPr>
+          <p:nvPr>
+            <p:ph type="title"/>
+          </p:nvPr>
+        </p:nvSpPr>
+        <p:spPr/>
+        <p:txBody>
+          <a:bodyPr/>
+          <a:lstStyle/>
+          <a:p>
+            <a:r>
+              <a:rPr lang="en-US" dirty="0"/>
+              <a:t>Bonus questions to consider (after class)</a:t>
+            </a:r>
+          </a:p>
+        </p:txBody>
+      </p:sp>
+      <p:sp>
+        <p:nvSpPr>
+          <p:cNvPr id="3" name="Text Placeholder 2">
+            <a:extLst>
+              <a:ext uri="{FF2B5EF4-FFF2-40B4-BE49-F238E27FC236}">
+                <a16:creationId xmlns:a16="http://schemas.microsoft.com/office/drawing/2014/main" id="{7CC71FCE-FE5A-C561-CCEE-B98CB19A2373}"/>
+              </a:ext>
+            </a:extLst>
+          </p:cNvPr>
+          <p:cNvSpPr>
+            <a:spLocks noGrp="1"/>
+          </p:cNvSpPr>
+          <p:nvPr>
+            <p:ph type="body" idx="1"/>
+          </p:nvPr>
+        </p:nvSpPr>
+        <p:spPr/>
+        <p:txBody>
+          <a:bodyPr/>
+          <a:lstStyle/>
+          <a:p>
+            <a:r>
+              <a:rPr lang="en-US" b="1" dirty="0"/>
+              <a:t>Validation: </a:t>
+            </a:r>
+            <a:r>
+              <a:rPr lang="en-US" dirty="0"/>
+              <a:t>The model was validated with 5-fold cross-validation, with folds assigned randomly across town-weeks. What is the most serious consequence?</a:t>
+            </a:r>
+          </a:p>
+          <a:p>
+            <a:pPr lvl="1"/>
+            <a:r>
+              <a:rPr lang="en-US" dirty="0"/>
+              <a:t>Reported accuracy overstates forward performance</a:t>
+            </a:r>
+          </a:p>
+          <a:p>
+            <a:pPr lvl="1"/>
+            <a:r>
+              <a:rPr lang="en-US" dirty="0"/>
+              <a:t>Feature importances are unreliable</a:t>
+            </a:r>
+          </a:p>
+          <a:p>
+            <a:pPr lvl="1"/>
+            <a:r>
+              <a:rPr lang="en-US" dirty="0"/>
+              <a:t>Towns can't be compared to each other</a:t>
+            </a:r>
+          </a:p>
+          <a:p>
+            <a:pPr lvl="1"/>
+            <a:r>
+              <a:rPr lang="en-US" dirty="0"/>
+              <a:t>No real problem, since the model is retrained weekly anyway</a:t>
+            </a:r>
+          </a:p>
+          <a:p>
+            <a:endParaRPr lang="en-US" dirty="0"/>
+          </a:p>
+        </p:txBody>
+      </p:sp>
+    </p:spTree>
+    <p:extLst>
+      <p:ext uri="{BB962C8B-B14F-4D97-AF65-F5344CB8AC3E}">
+        <p14:creationId xmlns:p14="http://schemas.microsoft.com/office/powerpoint/2010/main" val="162559103"/>
+      </p:ext>
+    </p:extLst>
+  </p:cSld>
+  <p:clrMapOvr>
+    <a:masterClrMapping/>
+  </p:clrMapOvr>
+</p:sld>
+</file>
+
+<file path=ppt/slides/slide19.xml><?xml version="1.0" encoding="utf-8"?>
+<p:sld xmlns:a="http://schemas.openxmlformats.org/drawingml/2006/main" xmlns:r="http://schemas.openxmlformats.org/officeDocument/2006/relationships" xmlns:p="http://schemas.openxmlformats.org/presentationml/2006/main">
+  <p:cSld>
+    <p:spTree>
+      <p:nvGrpSpPr>
+        <p:cNvPr id="1" name="">
+          <a:extLst>
+            <a:ext uri="{FF2B5EF4-FFF2-40B4-BE49-F238E27FC236}">
+              <a16:creationId xmlns:a16="http://schemas.microsoft.com/office/drawing/2014/main" id="{129D368A-0EBB-72BB-5436-0DC379C638D5}"/>
+            </a:ext>
+          </a:extLst>
+        </p:cNvPr>
+        <p:cNvGrpSpPr/>
+        <p:nvPr/>
+      </p:nvGrpSpPr>
+      <p:grpSpPr>
+        <a:xfrm>
+          <a:off x="0" y="0"/>
+          <a:ext cx="0" cy="0"/>
+          <a:chOff x="0" y="0"/>
+          <a:chExt cx="0" cy="0"/>
+        </a:xfrm>
+      </p:grpSpPr>
+      <p:sp>
+        <p:nvSpPr>
+          <p:cNvPr id="2" name="Title 1">
+            <a:extLst>
+              <a:ext uri="{FF2B5EF4-FFF2-40B4-BE49-F238E27FC236}">
+                <a16:creationId xmlns:a16="http://schemas.microsoft.com/office/drawing/2014/main" id="{7B158CF8-A2A6-9F2A-300F-EF613C288B63}"/>
+              </a:ext>
+            </a:extLst>
+          </p:cNvPr>
+          <p:cNvSpPr>
+            <a:spLocks noGrp="1"/>
+          </p:cNvSpPr>
+          <p:nvPr>
+            <p:ph type="title"/>
+          </p:nvPr>
+        </p:nvSpPr>
+        <p:spPr/>
+        <p:txBody>
+          <a:bodyPr/>
+          <a:lstStyle/>
+          <a:p>
+            <a:r>
+              <a:rPr lang="en-US" dirty="0"/>
+              <a:t>Bonus questions to consider (after class)</a:t>
+            </a:r>
+          </a:p>
+        </p:txBody>
+      </p:sp>
+      <p:sp>
+        <p:nvSpPr>
+          <p:cNvPr id="3" name="Text Placeholder 2">
+            <a:extLst>
+              <a:ext uri="{FF2B5EF4-FFF2-40B4-BE49-F238E27FC236}">
+                <a16:creationId xmlns:a16="http://schemas.microsoft.com/office/drawing/2014/main" id="{B8A43981-0B83-5D51-AC0D-EF6CA6275D60}"/>
+              </a:ext>
+            </a:extLst>
+          </p:cNvPr>
+          <p:cNvSpPr>
+            <a:spLocks noGrp="1"/>
+          </p:cNvSpPr>
+          <p:nvPr>
+            <p:ph type="body" idx="1"/>
+          </p:nvPr>
+        </p:nvSpPr>
+        <p:spPr/>
+        <p:txBody>
+          <a:bodyPr/>
+          <a:lstStyle/>
+          <a:p>
+            <a:r>
+              <a:rPr lang="en-US" b="1" dirty="0"/>
+              <a:t>Metrics: </a:t>
+            </a:r>
+            <a:r>
+              <a:rPr lang="en-US" dirty="0"/>
+              <a:t>The system reports a correlation of 0.85. You have to send field teams to 3 of 10 towns each week. What number do you actually need?</a:t>
+            </a:r>
+          </a:p>
+          <a:p>
+            <a:pPr lvl="1"/>
+            <a:r>
+              <a:rPr lang="en-US" dirty="0"/>
+              <a:t>Correlation per town</a:t>
+            </a:r>
+          </a:p>
+          <a:p>
+            <a:pPr lvl="1"/>
+            <a:r>
+              <a:rPr lang="en-US" dirty="0"/>
+              <a:t>RMSE on the original case scale</a:t>
+            </a:r>
+          </a:p>
+          <a:p>
+            <a:pPr lvl="1"/>
+            <a:r>
+              <a:rPr lang="en-US" dirty="0"/>
+              <a:t>Precision at 3 towns</a:t>
+            </a:r>
+          </a:p>
+          <a:p>
+            <a:pPr lvl="1"/>
+            <a:r>
+              <a:rPr lang="en-US" dirty="0"/>
+              <a:t>Cases averted versus sending teams at random</a:t>
+            </a:r>
+          </a:p>
+          <a:p>
+            <a:endParaRPr lang="en-US" dirty="0"/>
+          </a:p>
+        </p:txBody>
+      </p:sp>
+    </p:spTree>
+    <p:extLst>
+      <p:ext uri="{BB962C8B-B14F-4D97-AF65-F5344CB8AC3E}">
+        <p14:creationId xmlns:p14="http://schemas.microsoft.com/office/powerpoint/2010/main" val="1785288315"/>
       </p:ext>
     </p:extLst>
   </p:cSld>
@@ -13427,6 +13734,33 @@
               <a:rPr lang="en-US" dirty="0"/>
               <a:t>Your data</a:t>
             </a:r>
+          </a:p>
+          <a:p>
+            <a:pPr marL="565150" lvl="1" indent="0">
+              <a:lnSpc>
+                <a:spcPct val="100000"/>
+              </a:lnSpc>
+              <a:spcBef>
+                <a:spcPts val="300"/>
+              </a:spcBef>
+              <a:buNone/>
+            </a:pPr>
+            <a:endParaRPr lang="en-US" dirty="0"/>
+          </a:p>
+          <a:p>
+            <a:pPr marL="565150" lvl="1" indent="0">
+              <a:lnSpc>
+                <a:spcPct val="100000"/>
+              </a:lnSpc>
+              <a:spcBef>
+                <a:spcPts val="300"/>
+              </a:spcBef>
+              <a:buNone/>
+            </a:pPr>
+            <a:r>
+              <a:rPr lang="en-US" b="1" dirty="0"/>
+              <a:t>Make sure to set up a time with Logan or me (office hours) to go over the project this week (as a team)</a:t>
+            </a:r>
             <a:br>
               <a:rPr lang="en-US" dirty="0"/>
             </a:br>
@@ -13486,7 +13820,509 @@
 </p:sld>
 </file>
 
-<file path=ppt/slides/slide3.xml><?xml version="1.0" encoding="utf-8"?>
+<file path=ppt/slides/slide20.xml><?xml version="1.0" encoding="utf-8"?>
+<p:sld xmlns:a="http://schemas.openxmlformats.org/drawingml/2006/main" xmlns:r="http://schemas.openxmlformats.org/officeDocument/2006/relationships" xmlns:p="http://schemas.openxmlformats.org/presentationml/2006/main">
+  <p:cSld>
+    <p:spTree>
+      <p:nvGrpSpPr>
+        <p:cNvPr id="1" name="">
+          <a:extLst>
+            <a:ext uri="{FF2B5EF4-FFF2-40B4-BE49-F238E27FC236}">
+              <a16:creationId xmlns:a16="http://schemas.microsoft.com/office/drawing/2014/main" id="{C9AD2253-1E2C-F6FA-DC7F-5F2B1C54D18E}"/>
+            </a:ext>
+          </a:extLst>
+        </p:cNvPr>
+        <p:cNvGrpSpPr/>
+        <p:nvPr/>
+      </p:nvGrpSpPr>
+      <p:grpSpPr>
+        <a:xfrm>
+          <a:off x="0" y="0"/>
+          <a:ext cx="0" cy="0"/>
+          <a:chOff x="0" y="0"/>
+          <a:chExt cx="0" cy="0"/>
+        </a:xfrm>
+      </p:grpSpPr>
+      <p:sp>
+        <p:nvSpPr>
+          <p:cNvPr id="2" name="Title 1">
+            <a:extLst>
+              <a:ext uri="{FF2B5EF4-FFF2-40B4-BE49-F238E27FC236}">
+                <a16:creationId xmlns:a16="http://schemas.microsoft.com/office/drawing/2014/main" id="{771447E0-77FC-372D-DB63-DB8986B55C60}"/>
+              </a:ext>
+            </a:extLst>
+          </p:cNvPr>
+          <p:cNvSpPr>
+            <a:spLocks noGrp="1"/>
+          </p:cNvSpPr>
+          <p:nvPr>
+            <p:ph type="title"/>
+          </p:nvPr>
+        </p:nvSpPr>
+        <p:spPr/>
+        <p:txBody>
+          <a:bodyPr/>
+          <a:lstStyle/>
+          <a:p>
+            <a:r>
+              <a:rPr lang="en-US" dirty="0"/>
+              <a:t>Bonus questions to consider</a:t>
+            </a:r>
+          </a:p>
+        </p:txBody>
+      </p:sp>
+      <p:sp>
+        <p:nvSpPr>
+          <p:cNvPr id="3" name="Text Placeholder 2">
+            <a:extLst>
+              <a:ext uri="{FF2B5EF4-FFF2-40B4-BE49-F238E27FC236}">
+                <a16:creationId xmlns:a16="http://schemas.microsoft.com/office/drawing/2014/main" id="{02C4F568-DC31-F45C-A8B2-2C7653310E19}"/>
+              </a:ext>
+            </a:extLst>
+          </p:cNvPr>
+          <p:cNvSpPr>
+            <a:spLocks noGrp="1"/>
+          </p:cNvSpPr>
+          <p:nvPr>
+            <p:ph type="body" idx="1"/>
+          </p:nvPr>
+        </p:nvSpPr>
+        <p:spPr/>
+        <p:txBody>
+          <a:bodyPr/>
+          <a:lstStyle/>
+          <a:p>
+            <a:r>
+              <a:rPr lang="en-US" b="1" dirty="0"/>
+              <a:t>Impact: </a:t>
+            </a:r>
+            <a:r>
+              <a:rPr lang="en-US" dirty="0"/>
+              <a:t>Cases in Lahore fell from 21,000 to 257 the year the system launched. How much of that drop should the forecasting system get credit for?</a:t>
+            </a:r>
+          </a:p>
+          <a:p>
+            <a:pPr lvl="1"/>
+            <a:r>
+              <a:rPr lang="en-US" dirty="0"/>
+              <a:t>Essentially none</a:t>
+            </a:r>
+          </a:p>
+          <a:p>
+            <a:pPr lvl="1"/>
+            <a:r>
+              <a:rPr lang="en-US" dirty="0"/>
+              <a:t>Some, but the paper can't tell us how much</a:t>
+            </a:r>
+          </a:p>
+          <a:p>
+            <a:pPr lvl="1"/>
+            <a:r>
+              <a:rPr lang="en-US" dirty="0"/>
+              <a:t>Most of it</a:t>
+            </a:r>
+          </a:p>
+          <a:p>
+            <a:pPr lvl="1"/>
+            <a:r>
+              <a:rPr lang="en-US" dirty="0"/>
+              <a:t>Impossible to say without a control</a:t>
+            </a:r>
+          </a:p>
+          <a:p>
+            <a:endParaRPr lang="en-US" dirty="0"/>
+          </a:p>
+        </p:txBody>
+      </p:sp>
+    </p:spTree>
+    <p:extLst>
+      <p:ext uri="{BB962C8B-B14F-4D97-AF65-F5344CB8AC3E}">
+        <p14:creationId xmlns:p14="http://schemas.microsoft.com/office/powerpoint/2010/main" val="1361091250"/>
+      </p:ext>
+    </p:extLst>
+  </p:cSld>
+  <p:clrMapOvr>
+    <a:masterClrMapping/>
+  </p:clrMapOvr>
+</p:sld>
+</file>
+
+<file path=ppt/slides/slide21.xml><?xml version="1.0" encoding="utf-8"?>
+<p:sld xmlns:a="http://schemas.openxmlformats.org/drawingml/2006/main" xmlns:r="http://schemas.openxmlformats.org/officeDocument/2006/relationships" xmlns:p="http://schemas.openxmlformats.org/presentationml/2006/main">
+  <p:cSld>
+    <p:spTree>
+      <p:nvGrpSpPr>
+        <p:cNvPr id="1" name="">
+          <a:extLst>
+            <a:ext uri="{FF2B5EF4-FFF2-40B4-BE49-F238E27FC236}">
+              <a16:creationId xmlns:a16="http://schemas.microsoft.com/office/drawing/2014/main" id="{47435EC0-7DFB-6B00-A769-307625713181}"/>
+            </a:ext>
+          </a:extLst>
+        </p:cNvPr>
+        <p:cNvGrpSpPr/>
+        <p:nvPr/>
+      </p:nvGrpSpPr>
+      <p:grpSpPr>
+        <a:xfrm>
+          <a:off x="0" y="0"/>
+          <a:ext cx="0" cy="0"/>
+          <a:chOff x="0" y="0"/>
+          <a:chExt cx="0" cy="0"/>
+        </a:xfrm>
+      </p:grpSpPr>
+      <p:sp>
+        <p:nvSpPr>
+          <p:cNvPr id="2" name="Title 1">
+            <a:extLst>
+              <a:ext uri="{FF2B5EF4-FFF2-40B4-BE49-F238E27FC236}">
+                <a16:creationId xmlns:a16="http://schemas.microsoft.com/office/drawing/2014/main" id="{3F32EB99-385C-EAC6-0F2E-06584085F466}"/>
+              </a:ext>
+            </a:extLst>
+          </p:cNvPr>
+          <p:cNvSpPr>
+            <a:spLocks noGrp="1"/>
+          </p:cNvSpPr>
+          <p:nvPr>
+            <p:ph type="title"/>
+          </p:nvPr>
+        </p:nvSpPr>
+        <p:spPr/>
+        <p:txBody>
+          <a:bodyPr/>
+          <a:lstStyle/>
+          <a:p>
+            <a:r>
+              <a:rPr lang="en-US" dirty="0"/>
+              <a:t>Bonus questions to consider</a:t>
+            </a:r>
+          </a:p>
+        </p:txBody>
+      </p:sp>
+      <p:sp>
+        <p:nvSpPr>
+          <p:cNvPr id="3" name="Text Placeholder 2">
+            <a:extLst>
+              <a:ext uri="{FF2B5EF4-FFF2-40B4-BE49-F238E27FC236}">
+                <a16:creationId xmlns:a16="http://schemas.microsoft.com/office/drawing/2014/main" id="{923E5596-D4CD-CFE9-AF7F-5081D8FC0D64}"/>
+              </a:ext>
+            </a:extLst>
+          </p:cNvPr>
+          <p:cNvSpPr>
+            <a:spLocks noGrp="1"/>
+          </p:cNvSpPr>
+          <p:nvPr>
+            <p:ph type="body" idx="1"/>
+          </p:nvPr>
+        </p:nvSpPr>
+        <p:spPr/>
+        <p:txBody>
+          <a:bodyPr/>
+          <a:lstStyle/>
+          <a:p>
+            <a:r>
+              <a:rPr lang="en-US" b="1" dirty="0"/>
+              <a:t>Feedback loops: </a:t>
+            </a:r>
+            <a:r>
+              <a:rPr lang="en-US" dirty="0"/>
+              <a:t>Field teams spray the towns the model flags. What does that do to next year's training data?</a:t>
+            </a:r>
+          </a:p>
+          <a:p>
+            <a:pPr lvl="1"/>
+            <a:r>
+              <a:rPr lang="en-US" dirty="0"/>
+              <a:t>Nothing important</a:t>
+            </a:r>
+          </a:p>
+          <a:p>
+            <a:pPr lvl="1"/>
+            <a:r>
+              <a:rPr lang="en-US" dirty="0"/>
+              <a:t>Makes flagged towns look falsely low-risk</a:t>
+            </a:r>
+          </a:p>
+          <a:p>
+            <a:pPr lvl="1"/>
+            <a:r>
+              <a:rPr lang="en-US" dirty="0"/>
+              <a:t>Makes flagged towns look falsely high-risk</a:t>
+            </a:r>
+          </a:p>
+          <a:p>
+            <a:pPr lvl="1"/>
+            <a:r>
+              <a:rPr lang="en-US" dirty="0"/>
+              <a:t>Depends on whether spraying works</a:t>
+            </a:r>
+          </a:p>
+          <a:p>
+            <a:endParaRPr lang="en-US" dirty="0"/>
+          </a:p>
+        </p:txBody>
+      </p:sp>
+    </p:spTree>
+    <p:extLst>
+      <p:ext uri="{BB962C8B-B14F-4D97-AF65-F5344CB8AC3E}">
+        <p14:creationId xmlns:p14="http://schemas.microsoft.com/office/powerpoint/2010/main" val="277959842"/>
+      </p:ext>
+    </p:extLst>
+  </p:cSld>
+  <p:clrMapOvr>
+    <a:masterClrMapping/>
+  </p:clrMapOvr>
+</p:sld>
+</file>
+
+<file path=ppt/slides/slide22.xml><?xml version="1.0" encoding="utf-8"?>
+<p:sld xmlns:a="http://schemas.openxmlformats.org/drawingml/2006/main" xmlns:r="http://schemas.openxmlformats.org/officeDocument/2006/relationships" xmlns:p="http://schemas.openxmlformats.org/presentationml/2006/main">
+  <p:cSld>
+    <p:spTree>
+      <p:nvGrpSpPr>
+        <p:cNvPr id="1" name="">
+          <a:extLst>
+            <a:ext uri="{FF2B5EF4-FFF2-40B4-BE49-F238E27FC236}">
+              <a16:creationId xmlns:a16="http://schemas.microsoft.com/office/drawing/2014/main" id="{C7D9D6E1-FFA6-66AE-2E17-DB753E40151F}"/>
+            </a:ext>
+          </a:extLst>
+        </p:cNvPr>
+        <p:cNvGrpSpPr/>
+        <p:nvPr/>
+      </p:nvGrpSpPr>
+      <p:grpSpPr>
+        <a:xfrm>
+          <a:off x="0" y="0"/>
+          <a:ext cx="0" cy="0"/>
+          <a:chOff x="0" y="0"/>
+          <a:chExt cx="0" cy="0"/>
+        </a:xfrm>
+      </p:grpSpPr>
+      <p:sp>
+        <p:nvSpPr>
+          <p:cNvPr id="2" name="Title 1">
+            <a:extLst>
+              <a:ext uri="{FF2B5EF4-FFF2-40B4-BE49-F238E27FC236}">
+                <a16:creationId xmlns:a16="http://schemas.microsoft.com/office/drawing/2014/main" id="{808DDF73-6031-6CE8-2E41-17054A314073}"/>
+              </a:ext>
+            </a:extLst>
+          </p:cNvPr>
+          <p:cNvSpPr>
+            <a:spLocks noGrp="1"/>
+          </p:cNvSpPr>
+          <p:nvPr>
+            <p:ph type="title"/>
+          </p:nvPr>
+        </p:nvSpPr>
+        <p:spPr/>
+        <p:txBody>
+          <a:bodyPr/>
+          <a:lstStyle/>
+          <a:p>
+            <a:r>
+              <a:rPr lang="en-US" dirty="0"/>
+              <a:t>Bonus questions to consider</a:t>
+            </a:r>
+          </a:p>
+        </p:txBody>
+      </p:sp>
+      <p:sp>
+        <p:nvSpPr>
+          <p:cNvPr id="3" name="Text Placeholder 2">
+            <a:extLst>
+              <a:ext uri="{FF2B5EF4-FFF2-40B4-BE49-F238E27FC236}">
+                <a16:creationId xmlns:a16="http://schemas.microsoft.com/office/drawing/2014/main" id="{854FFDDB-DD44-45BB-E3BF-7A151F4EE0E1}"/>
+              </a:ext>
+            </a:extLst>
+          </p:cNvPr>
+          <p:cNvSpPr>
+            <a:spLocks noGrp="1"/>
+          </p:cNvSpPr>
+          <p:nvPr>
+            <p:ph type="body" idx="1"/>
+          </p:nvPr>
+        </p:nvSpPr>
+        <p:spPr/>
+        <p:txBody>
+          <a:bodyPr/>
+          <a:lstStyle/>
+          <a:p>
+            <a:r>
+              <a:rPr lang="en-US" b="1" dirty="0"/>
+              <a:t>Ethics and incentives: </a:t>
+            </a:r>
+            <a:r>
+              <a:rPr lang="en-US" dirty="0"/>
+              <a:t>Officials in flagged towns must report to a weekly meeting chaired by the head of the provincial government. What is the most likely effect on the data?</a:t>
+            </a:r>
+          </a:p>
+          <a:p>
+            <a:pPr lvl="1"/>
+            <a:r>
+              <a:rPr lang="en-US" dirty="0"/>
+              <a:t>None, accountability improves reporting</a:t>
+            </a:r>
+          </a:p>
+          <a:p>
+            <a:pPr lvl="1"/>
+            <a:r>
+              <a:rPr lang="en-US" dirty="0"/>
+              <a:t>Fewer suspected cases recorded in flagged towns</a:t>
+            </a:r>
+          </a:p>
+          <a:p>
+            <a:pPr lvl="1"/>
+            <a:r>
+              <a:rPr lang="en-US" dirty="0"/>
+              <a:t>Reduced promotion of the hotline in flagged towns</a:t>
+            </a:r>
+          </a:p>
+          <a:p>
+            <a:pPr lvl="1"/>
+            <a:r>
+              <a:rPr lang="en-US" dirty="0"/>
+              <a:t>Both of the last two</a:t>
+            </a:r>
+          </a:p>
+        </p:txBody>
+      </p:sp>
+    </p:spTree>
+    <p:extLst>
+      <p:ext uri="{BB962C8B-B14F-4D97-AF65-F5344CB8AC3E}">
+        <p14:creationId xmlns:p14="http://schemas.microsoft.com/office/powerpoint/2010/main" val="811679519"/>
+      </p:ext>
+    </p:extLst>
+  </p:cSld>
+  <p:clrMapOvr>
+    <a:masterClrMapping/>
+  </p:clrMapOvr>
+</p:sld>
+</file>
+
+<file path=ppt/slides/slide23.xml><?xml version="1.0" encoding="utf-8"?>
+<p:sld xmlns:a="http://schemas.openxmlformats.org/drawingml/2006/main" xmlns:r="http://schemas.openxmlformats.org/officeDocument/2006/relationships" xmlns:p="http://schemas.openxmlformats.org/presentationml/2006/main">
+  <p:cSld>
+    <p:spTree>
+      <p:nvGrpSpPr>
+        <p:cNvPr id="1" name="">
+          <a:extLst>
+            <a:ext uri="{FF2B5EF4-FFF2-40B4-BE49-F238E27FC236}">
+              <a16:creationId xmlns:a16="http://schemas.microsoft.com/office/drawing/2014/main" id="{9FC2C7BC-4F54-746A-3106-D82081433B1E}"/>
+            </a:ext>
+          </a:extLst>
+        </p:cNvPr>
+        <p:cNvGrpSpPr/>
+        <p:nvPr/>
+      </p:nvGrpSpPr>
+      <p:grpSpPr>
+        <a:xfrm>
+          <a:off x="0" y="0"/>
+          <a:ext cx="0" cy="0"/>
+          <a:chOff x="0" y="0"/>
+          <a:chExt cx="0" cy="0"/>
+        </a:xfrm>
+      </p:grpSpPr>
+      <p:sp>
+        <p:nvSpPr>
+          <p:cNvPr id="2" name="Title 1">
+            <a:extLst>
+              <a:ext uri="{FF2B5EF4-FFF2-40B4-BE49-F238E27FC236}">
+                <a16:creationId xmlns:a16="http://schemas.microsoft.com/office/drawing/2014/main" id="{752C45AE-AA53-234A-32FB-3A752685B7EF}"/>
+              </a:ext>
+            </a:extLst>
+          </p:cNvPr>
+          <p:cNvSpPr>
+            <a:spLocks noGrp="1"/>
+          </p:cNvSpPr>
+          <p:nvPr>
+            <p:ph type="title"/>
+          </p:nvPr>
+        </p:nvSpPr>
+        <p:spPr/>
+        <p:txBody>
+          <a:bodyPr/>
+          <a:lstStyle/>
+          <a:p>
+            <a:r>
+              <a:rPr lang="en-US" dirty="0"/>
+              <a:t>Bonus questions to consider</a:t>
+            </a:r>
+          </a:p>
+        </p:txBody>
+      </p:sp>
+      <p:sp>
+        <p:nvSpPr>
+          <p:cNvPr id="3" name="Text Placeholder 2">
+            <a:extLst>
+              <a:ext uri="{FF2B5EF4-FFF2-40B4-BE49-F238E27FC236}">
+                <a16:creationId xmlns:a16="http://schemas.microsoft.com/office/drawing/2014/main" id="{059DF2C3-54F5-3474-05D7-3B6BCB84F4D4}"/>
+              </a:ext>
+            </a:extLst>
+          </p:cNvPr>
+          <p:cNvSpPr>
+            <a:spLocks noGrp="1"/>
+          </p:cNvSpPr>
+          <p:nvPr>
+            <p:ph type="body" idx="1"/>
+          </p:nvPr>
+        </p:nvSpPr>
+        <p:spPr/>
+        <p:txBody>
+          <a:bodyPr/>
+          <a:lstStyle/>
+          <a:p>
+            <a:r>
+              <a:rPr lang="en-US" b="1" dirty="0"/>
+              <a:t>Equity: </a:t>
+            </a:r>
+            <a:r>
+              <a:rPr lang="en-US" dirty="0"/>
+              <a:t>Call volume comes from people who know the hotline exists and can afford to call. Which is the better fix?</a:t>
+            </a:r>
+          </a:p>
+          <a:p>
+            <a:pPr lvl="1"/>
+            <a:r>
+              <a:rPr lang="en-US" dirty="0"/>
+              <a:t>Train separate models per town, as the authors suggest</a:t>
+            </a:r>
+          </a:p>
+          <a:p>
+            <a:pPr lvl="1"/>
+            <a:r>
+              <a:rPr lang="en-US" dirty="0"/>
+              <a:t>Add socioeconomic covariates</a:t>
+            </a:r>
+          </a:p>
+          <a:p>
+            <a:pPr lvl="1"/>
+            <a:r>
+              <a:rPr lang="en-US" dirty="0"/>
+              <a:t>Change the metric to require equal performance across towns</a:t>
+            </a:r>
+          </a:p>
+          <a:p>
+            <a:pPr lvl="1"/>
+            <a:r>
+              <a:rPr lang="en-US" dirty="0"/>
+              <a:t>Don't fix the model, fix the hotline's reach</a:t>
+            </a:r>
+          </a:p>
+        </p:txBody>
+      </p:sp>
+    </p:spTree>
+    <p:extLst>
+      <p:ext uri="{BB962C8B-B14F-4D97-AF65-F5344CB8AC3E}">
+        <p14:creationId xmlns:p14="http://schemas.microsoft.com/office/powerpoint/2010/main" val="955488120"/>
+      </p:ext>
+    </p:extLst>
+  </p:cSld>
+  <p:clrMapOvr>
+    <a:masterClrMapping/>
+  </p:clrMapOvr>
+</p:sld>
+</file>
+
+<file path=ppt/slides/slide24.xml><?xml version="1.0" encoding="utf-8"?>
 <p:sld xmlns:a="http://schemas.openxmlformats.org/drawingml/2006/main" xmlns:r="http://schemas.openxmlformats.org/officeDocument/2006/relationships" xmlns:p="http://schemas.openxmlformats.org/presentationml/2006/main">
   <p:cSld>
     <p:spTree>
@@ -13526,7 +14362,7 @@
           <a:p>
             <a:r>
               <a:rPr lang="en-US" dirty="0"/>
-              <a:t>Project Info</a:t>
+              <a:t>Things to remember</a:t>
             </a:r>
           </a:p>
         </p:txBody>
@@ -13549,135 +14385,105 @@
         </p:nvSpPr>
         <p:spPr/>
         <p:txBody>
-          <a:bodyPr/>
+          <a:bodyPr lIns="118872"/>
           <a:lstStyle/>
           <a:p>
             <a:r>
               <a:rPr lang="en-US" dirty="0"/>
-              <a:t>GitHub Repos:</a:t>
+              <a:t>Friday lab session on remote workflows</a:t>
+            </a:r>
+          </a:p>
+          <a:p>
+            <a:endParaRPr lang="en-US" dirty="0"/>
+          </a:p>
+          <a:p>
+            <a:pPr>
+              <a:lnSpc>
+                <a:spcPct val="100000"/>
+              </a:lnSpc>
+            </a:pPr>
+            <a:r>
+              <a:rPr lang="en-US" dirty="0"/>
+              <a:t>Focus for this week is getting to know:</a:t>
+            </a:r>
+          </a:p>
+          <a:p>
+            <a:pPr lvl="1">
+              <a:lnSpc>
+                <a:spcPct val="100000"/>
+              </a:lnSpc>
+              <a:spcBef>
+                <a:spcPts val="300"/>
+              </a:spcBef>
+            </a:pPr>
+            <a:r>
+              <a:rPr lang="en-US" dirty="0"/>
+              <a:t>Your team</a:t>
+            </a:r>
+          </a:p>
+          <a:p>
+            <a:pPr lvl="1">
+              <a:lnSpc>
+                <a:spcPct val="100000"/>
+              </a:lnSpc>
+              <a:spcBef>
+                <a:spcPts val="300"/>
+              </a:spcBef>
+            </a:pPr>
+            <a:r>
+              <a:rPr lang="en-US" dirty="0"/>
+              <a:t>Your project</a:t>
+            </a:r>
+          </a:p>
+          <a:p>
+            <a:pPr lvl="1">
+              <a:lnSpc>
+                <a:spcPct val="100000"/>
+              </a:lnSpc>
+              <a:spcBef>
+                <a:spcPts val="300"/>
+              </a:spcBef>
+            </a:pPr>
+            <a:r>
+              <a:rPr lang="en-US" dirty="0"/>
+              <a:t>Your data</a:t>
             </a:r>
             <a:br>
               <a:rPr lang="en-US" dirty="0"/>
             </a:br>
+            <a:endParaRPr lang="en-US" dirty="0"/>
+          </a:p>
+          <a:p>
             <a:r>
               <a:rPr lang="en-US" dirty="0"/>
-              <a:t>https://</a:t>
+              <a:t>Following week:</a:t>
             </a:r>
+          </a:p>
+          <a:p>
+            <a:pPr lvl="1">
+              <a:spcBef>
+                <a:spcPts val="0"/>
+              </a:spcBef>
+            </a:pPr>
             <a:r>
-              <a:rPr lang="en-US" dirty="0" err="1"/>
-              <a:t>github.com</a:t>
-            </a:r>
-            <a:r>
-              <a:rPr lang="en-US" dirty="0"/>
-              <a:t>/</a:t>
-            </a:r>
-            <a:r>
-              <a:rPr lang="en-US" dirty="0" err="1"/>
-              <a:t>dssg</a:t>
-            </a:r>
-            <a:r>
-              <a:rPr lang="en-US" dirty="0"/>
-              <a:t>/mlpolicylab_fall26_{</a:t>
-            </a:r>
-            <a:r>
-              <a:rPr lang="en-US" dirty="0" err="1"/>
-              <a:t>team_name</a:t>
-            </a:r>
-            <a:r>
-              <a:rPr lang="en-US" dirty="0"/>
-              <a:t>}</a:t>
-            </a:r>
-          </a:p>
-          <a:p>
-            <a:pPr lvl="1"/>
-            <a:r>
-              <a:rPr lang="en-US" dirty="0">
+              <a:rPr lang="en-US" sz="2200" dirty="0">
                 <a:solidFill>
                   <a:srgbClr val="C00000"/>
                 </a:solidFill>
-                <a:hlinkClick r:id="rId2">
-                  <a:extLst>
-                    <a:ext uri="{A12FA001-AC4F-418D-AE19-62706E023703}">
-                      <ahyp:hlinkClr xmlns:ahyp="http://schemas.microsoft.com/office/drawing/2018/hyperlinkcolor" val="tx"/>
-                    </a:ext>
-                  </a:extLst>
-                </a:hlinkClick>
               </a:rPr>
-              <a:t>Bills Project</a:t>
+              <a:t>Project Proposal</a:t>
             </a:r>
-            <a:endParaRPr lang="en-US" dirty="0">
-              <a:solidFill>
-                <a:srgbClr val="C00000"/>
-              </a:solidFill>
-            </a:endParaRPr>
-          </a:p>
-          <a:p>
-            <a:pPr lvl="1"/>
             <a:r>
-              <a:rPr lang="en-US" dirty="0">
-                <a:solidFill>
-                  <a:srgbClr val="C00000"/>
-                </a:solidFill>
-                <a:hlinkClick r:id="rId3"/>
+              <a:rPr lang="en-US" sz="2200" dirty="0"/>
+              <a:t> </a:t>
+            </a:r>
+            <a:r>
+              <a:rPr lang="en-US" sz="2200" dirty="0">
+                <a:highlight>
+                  <a:srgbClr val="FFFF00"/>
+                </a:highlight>
               </a:rPr>
-              <a:t>Mental Health Outreach Project</a:t>
-            </a:r>
-            <a:endParaRPr lang="en-US" dirty="0">
-              <a:solidFill>
-                <a:srgbClr val="C00000"/>
-              </a:solidFill>
-            </a:endParaRPr>
-          </a:p>
-          <a:p>
-            <a:pPr lvl="1"/>
-            <a:endParaRPr lang="en-US" dirty="0">
-              <a:solidFill>
-                <a:srgbClr val="C00000"/>
-              </a:solidFill>
-            </a:endParaRPr>
-          </a:p>
-          <a:p>
-            <a:r>
-              <a:rPr lang="en-US" dirty="0">
-                <a:solidFill>
-                  <a:schemeClr val="tx1"/>
-                </a:solidFill>
-              </a:rPr>
-              <a:t>Database</a:t>
-            </a:r>
-          </a:p>
-          <a:p>
-            <a:endParaRPr lang="en-US" dirty="0">
-              <a:solidFill>
-                <a:schemeClr val="tx1"/>
-              </a:solidFill>
-            </a:endParaRPr>
-          </a:p>
-          <a:p>
-            <a:r>
-              <a:rPr lang="en-US" dirty="0">
-                <a:solidFill>
-                  <a:schemeClr val="tx1"/>
-                </a:solidFill>
-              </a:rPr>
-              <a:t>Project directory on server</a:t>
-            </a:r>
-          </a:p>
-          <a:p>
-            <a:endParaRPr lang="en-US" dirty="0">
-              <a:solidFill>
-                <a:schemeClr val="tx1"/>
-              </a:solidFill>
-            </a:endParaRPr>
-          </a:p>
-          <a:p>
-            <a:r>
-              <a:rPr lang="en-US" dirty="0">
-                <a:solidFill>
-                  <a:schemeClr val="tx1"/>
-                </a:solidFill>
-              </a:rPr>
-              <a:t>Private Slack channel</a:t>
+              <a:t>(Tuesday, Sep 15)</a:t>
             </a:r>
           </a:p>
           <a:p>
@@ -13691,7 +14497,329 @@
     </p:spTree>
     <p:extLst>
       <p:ext uri="{BB962C8B-B14F-4D97-AF65-F5344CB8AC3E}">
-        <p14:creationId xmlns:p14="http://schemas.microsoft.com/office/powerpoint/2010/main" val="4042955773"/>
+        <p14:creationId xmlns:p14="http://schemas.microsoft.com/office/powerpoint/2010/main" val="2922547611"/>
+      </p:ext>
+    </p:extLst>
+  </p:cSld>
+  <p:clrMapOvr>
+    <a:masterClrMapping/>
+  </p:clrMapOvr>
+</p:sld>
+</file>
+
+<file path=ppt/slides/slide25.xml><?xml version="1.0" encoding="utf-8"?>
+<p:sld xmlns:a="http://schemas.openxmlformats.org/drawingml/2006/main" xmlns:r="http://schemas.openxmlformats.org/officeDocument/2006/relationships" xmlns:p="http://schemas.openxmlformats.org/presentationml/2006/main">
+  <p:cSld>
+    <p:spTree>
+      <p:nvGrpSpPr>
+        <p:cNvPr id="1" name="">
+          <a:extLst>
+            <a:ext uri="{FF2B5EF4-FFF2-40B4-BE49-F238E27FC236}">
+              <a16:creationId xmlns:a16="http://schemas.microsoft.com/office/drawing/2014/main" id="{F3726390-A3DA-BB21-E21F-F7D99C935BD4}"/>
+            </a:ext>
+          </a:extLst>
+        </p:cNvPr>
+        <p:cNvGrpSpPr/>
+        <p:nvPr/>
+      </p:nvGrpSpPr>
+      <p:grpSpPr>
+        <a:xfrm>
+          <a:off x="0" y="0"/>
+          <a:ext cx="0" cy="0"/>
+          <a:chOff x="0" y="0"/>
+          <a:chExt cx="0" cy="0"/>
+        </a:xfrm>
+      </p:grpSpPr>
+      <p:sp>
+        <p:nvSpPr>
+          <p:cNvPr id="3" name="Title 2">
+            <a:extLst>
+              <a:ext uri="{FF2B5EF4-FFF2-40B4-BE49-F238E27FC236}">
+                <a16:creationId xmlns:a16="http://schemas.microsoft.com/office/drawing/2014/main" id="{3BA56AF6-17B7-B8B3-3DC5-D4B881C6C9EB}"/>
+              </a:ext>
+            </a:extLst>
+          </p:cNvPr>
+          <p:cNvSpPr>
+            <a:spLocks noGrp="1"/>
+          </p:cNvSpPr>
+          <p:nvPr>
+            <p:ph type="title"/>
+          </p:nvPr>
+        </p:nvSpPr>
+        <p:spPr/>
+        <p:txBody>
+          <a:bodyPr/>
+          <a:lstStyle/>
+          <a:p>
+            <a:r>
+              <a:rPr lang="en-US" dirty="0"/>
+              <a:t>Things to remember</a:t>
+            </a:r>
+          </a:p>
+        </p:txBody>
+      </p:sp>
+      <p:sp>
+        <p:nvSpPr>
+          <p:cNvPr id="4" name="Text Placeholder 3">
+            <a:extLst>
+              <a:ext uri="{FF2B5EF4-FFF2-40B4-BE49-F238E27FC236}">
+                <a16:creationId xmlns:a16="http://schemas.microsoft.com/office/drawing/2014/main" id="{9131D802-4E47-8BF8-2B21-7E4E2ACB4697}"/>
+              </a:ext>
+            </a:extLst>
+          </p:cNvPr>
+          <p:cNvSpPr>
+            <a:spLocks noGrp="1"/>
+          </p:cNvSpPr>
+          <p:nvPr>
+            <p:ph type="body" idx="1"/>
+          </p:nvPr>
+        </p:nvSpPr>
+        <p:spPr/>
+        <p:txBody>
+          <a:bodyPr lIns="118872"/>
+          <a:lstStyle/>
+          <a:p>
+            <a:r>
+              <a:rPr lang="en-US" dirty="0"/>
+              <a:t>Friday session on remote workflows and accessing project data</a:t>
+            </a:r>
+          </a:p>
+          <a:p>
+            <a:endParaRPr lang="en-US" dirty="0"/>
+          </a:p>
+          <a:p>
+            <a:pPr>
+              <a:lnSpc>
+                <a:spcPct val="100000"/>
+              </a:lnSpc>
+            </a:pPr>
+            <a:r>
+              <a:rPr lang="en-US" dirty="0"/>
+              <a:t>Focus for this week is getting to know:</a:t>
+            </a:r>
+          </a:p>
+          <a:p>
+            <a:pPr lvl="1">
+              <a:lnSpc>
+                <a:spcPct val="100000"/>
+              </a:lnSpc>
+              <a:spcBef>
+                <a:spcPts val="300"/>
+              </a:spcBef>
+            </a:pPr>
+            <a:r>
+              <a:rPr lang="en-US" dirty="0"/>
+              <a:t>Your team</a:t>
+            </a:r>
+          </a:p>
+          <a:p>
+            <a:pPr lvl="1">
+              <a:lnSpc>
+                <a:spcPct val="100000"/>
+              </a:lnSpc>
+              <a:spcBef>
+                <a:spcPts val="300"/>
+              </a:spcBef>
+            </a:pPr>
+            <a:r>
+              <a:rPr lang="en-US" dirty="0"/>
+              <a:t>Your project</a:t>
+            </a:r>
+          </a:p>
+          <a:p>
+            <a:pPr lvl="1">
+              <a:lnSpc>
+                <a:spcPct val="100000"/>
+              </a:lnSpc>
+              <a:spcBef>
+                <a:spcPts val="300"/>
+              </a:spcBef>
+            </a:pPr>
+            <a:r>
+              <a:rPr lang="en-US" dirty="0"/>
+              <a:t>Your data</a:t>
+            </a:r>
+          </a:p>
+          <a:p>
+            <a:pPr marL="565150" lvl="1" indent="0">
+              <a:lnSpc>
+                <a:spcPct val="100000"/>
+              </a:lnSpc>
+              <a:spcBef>
+                <a:spcPts val="300"/>
+              </a:spcBef>
+              <a:buNone/>
+            </a:pPr>
+            <a:endParaRPr lang="en-US" dirty="0"/>
+          </a:p>
+          <a:p>
+            <a:pPr marL="565150" lvl="1" indent="0">
+              <a:lnSpc>
+                <a:spcPct val="100000"/>
+              </a:lnSpc>
+              <a:spcBef>
+                <a:spcPts val="300"/>
+              </a:spcBef>
+              <a:buNone/>
+            </a:pPr>
+            <a:r>
+              <a:rPr lang="en-US" b="1" dirty="0"/>
+              <a:t>Make sure to set up a time with Logan or me (office hours) to go over the project this week (as a team)</a:t>
+            </a:r>
+            <a:br>
+              <a:rPr lang="en-US" dirty="0"/>
+            </a:br>
+            <a:endParaRPr lang="en-US" dirty="0"/>
+          </a:p>
+          <a:p>
+            <a:r>
+              <a:rPr lang="en-US" dirty="0"/>
+              <a:t>Following week:</a:t>
+            </a:r>
+          </a:p>
+          <a:p>
+            <a:pPr lvl="1">
+              <a:spcBef>
+                <a:spcPts val="0"/>
+              </a:spcBef>
+            </a:pPr>
+            <a:r>
+              <a:rPr lang="en-US" sz="2200" dirty="0">
+                <a:solidFill>
+                  <a:srgbClr val="C00000"/>
+                </a:solidFill>
+              </a:rPr>
+              <a:t>Project Proposal</a:t>
+            </a:r>
+            <a:r>
+              <a:rPr lang="en-US" sz="2200" dirty="0"/>
+              <a:t> </a:t>
+            </a:r>
+            <a:r>
+              <a:rPr lang="en-US" sz="2200" dirty="0">
+                <a:highlight>
+                  <a:srgbClr val="FFFF00"/>
+                </a:highlight>
+              </a:rPr>
+              <a:t>(Tuesday, Sep 15)</a:t>
+            </a:r>
+          </a:p>
+          <a:p>
+            <a:pPr marL="76200" indent="0">
+              <a:buNone/>
+            </a:pPr>
+            <a:endParaRPr lang="en-US" dirty="0"/>
+          </a:p>
+        </p:txBody>
+      </p:sp>
+    </p:spTree>
+    <p:extLst>
+      <p:ext uri="{BB962C8B-B14F-4D97-AF65-F5344CB8AC3E}">
+        <p14:creationId xmlns:p14="http://schemas.microsoft.com/office/powerpoint/2010/main" val="578434264"/>
+      </p:ext>
+    </p:extLst>
+  </p:cSld>
+  <p:clrMapOvr>
+    <a:masterClrMapping/>
+  </p:clrMapOvr>
+</p:sld>
+</file>
+
+<file path=ppt/slides/slide3.xml><?xml version="1.0" encoding="utf-8"?>
+<p:sld xmlns:a="http://schemas.openxmlformats.org/drawingml/2006/main" xmlns:r="http://schemas.openxmlformats.org/officeDocument/2006/relationships" xmlns:p="http://schemas.openxmlformats.org/presentationml/2006/main">
+  <p:cSld>
+    <p:spTree>
+      <p:nvGrpSpPr>
+        <p:cNvPr id="1" name=""/>
+        <p:cNvGrpSpPr/>
+        <p:nvPr/>
+      </p:nvGrpSpPr>
+      <p:grpSpPr>
+        <a:xfrm>
+          <a:off x="0" y="0"/>
+          <a:ext cx="0" cy="0"/>
+          <a:chOff x="0" y="0"/>
+          <a:chExt cx="0" cy="0"/>
+        </a:xfrm>
+      </p:grpSpPr>
+      <p:sp>
+        <p:nvSpPr>
+          <p:cNvPr id="2" name="Title 1">
+            <a:extLst>
+              <a:ext uri="{FF2B5EF4-FFF2-40B4-BE49-F238E27FC236}">
+                <a16:creationId xmlns:a16="http://schemas.microsoft.com/office/drawing/2014/main" id="{6CA754AB-463D-C8BD-6D43-AFD2F76CCAFD}"/>
+              </a:ext>
+            </a:extLst>
+          </p:cNvPr>
+          <p:cNvSpPr>
+            <a:spLocks noGrp="1"/>
+          </p:cNvSpPr>
+          <p:nvPr>
+            <p:ph type="title"/>
+          </p:nvPr>
+        </p:nvSpPr>
+        <p:spPr/>
+        <p:txBody>
+          <a:bodyPr/>
+          <a:lstStyle/>
+          <a:p>
+            <a:r>
+              <a:rPr lang="en-US" dirty="0"/>
+              <a:t>Plan for today</a:t>
+            </a:r>
+          </a:p>
+        </p:txBody>
+      </p:sp>
+      <p:sp>
+        <p:nvSpPr>
+          <p:cNvPr id="3" name="Text Placeholder 2">
+            <a:extLst>
+              <a:ext uri="{FF2B5EF4-FFF2-40B4-BE49-F238E27FC236}">
+                <a16:creationId xmlns:a16="http://schemas.microsoft.com/office/drawing/2014/main" id="{B0E965DE-0B89-AFAB-BC60-9EF772F28200}"/>
+              </a:ext>
+            </a:extLst>
+          </p:cNvPr>
+          <p:cNvSpPr>
+            <a:spLocks noGrp="1"/>
+          </p:cNvSpPr>
+          <p:nvPr>
+            <p:ph type="body" idx="1"/>
+          </p:nvPr>
+        </p:nvSpPr>
+        <p:spPr/>
+        <p:txBody>
+          <a:bodyPr/>
+          <a:lstStyle/>
+          <a:p>
+            <a:r>
+              <a:rPr lang="en-US" dirty="0"/>
+              <a:t>Quick note on project and teamwork</a:t>
+            </a:r>
+          </a:p>
+          <a:p>
+            <a:endParaRPr lang="en-US" dirty="0"/>
+          </a:p>
+          <a:p>
+            <a:r>
+              <a:rPr lang="en-US" dirty="0"/>
+              <a:t>Finish up Scoping</a:t>
+            </a:r>
+          </a:p>
+          <a:p>
+            <a:endParaRPr lang="en-US" dirty="0"/>
+          </a:p>
+          <a:p>
+            <a:r>
+              <a:rPr lang="en-US" dirty="0"/>
+              <a:t>Discuss Dengue case study (reading)</a:t>
+            </a:r>
+          </a:p>
+        </p:txBody>
+      </p:sp>
+    </p:spTree>
+    <p:extLst>
+      <p:ext uri="{BB962C8B-B14F-4D97-AF65-F5344CB8AC3E}">
+        <p14:creationId xmlns:p14="http://schemas.microsoft.com/office/powerpoint/2010/main" val="2587940020"/>
       </p:ext>
     </p:extLst>
   </p:cSld>
@@ -13720,9 +14848,15 @@
       </p:grpSpPr>
       <p:sp>
         <p:nvSpPr>
-          <p:cNvPr id="8194" name="Rectangle 2"/>
+          <p:cNvPr id="3" name="Title 2">
+            <a:extLst>
+              <a:ext uri="{FF2B5EF4-FFF2-40B4-BE49-F238E27FC236}">
+                <a16:creationId xmlns:a16="http://schemas.microsoft.com/office/drawing/2014/main" id="{9323871C-7CA8-1448-8FFC-1AE6E1838941}"/>
+              </a:ext>
+            </a:extLst>
+          </p:cNvPr>
           <p:cNvSpPr>
-            <a:spLocks noGrp="1" noChangeArrowheads="1"/>
+            <a:spLocks noGrp="1"/>
           </p:cNvSpPr>
           <p:nvPr>
             <p:ph type="title"/>
@@ -13734,17 +14868,23 @@
           <a:lstStyle/>
           <a:p>
             <a:r>
-              <a:rPr lang="en-US" altLang="en-US" dirty="0"/>
-              <a:t> Working with Your Project Team</a:t>
+              <a:rPr lang="en-US" dirty="0"/>
+              <a:t>Project Info</a:t>
             </a:r>
           </a:p>
         </p:txBody>
       </p:sp>
       <p:sp>
         <p:nvSpPr>
-          <p:cNvPr id="8195" name="Rectangle 3"/>
+          <p:cNvPr id="4" name="Text Placeholder 3">
+            <a:extLst>
+              <a:ext uri="{FF2B5EF4-FFF2-40B4-BE49-F238E27FC236}">
+                <a16:creationId xmlns:a16="http://schemas.microsoft.com/office/drawing/2014/main" id="{5E600BA7-FA45-884F-9820-9E5F2CB7AA48}"/>
+              </a:ext>
+            </a:extLst>
+          </p:cNvPr>
           <p:cNvSpPr>
-            <a:spLocks noGrp="1" noChangeArrowheads="1"/>
+            <a:spLocks noGrp="1"/>
           </p:cNvSpPr>
           <p:nvPr>
             <p:ph type="body" idx="1"/>
@@ -13752,94 +14892,151 @@
         </p:nvSpPr>
         <p:spPr>
           <a:xfrm>
-            <a:off x="207800" y="1709433"/>
-            <a:ext cx="11776300" cy="4555200"/>
+            <a:off x="170273" y="1356867"/>
+            <a:ext cx="11360700" cy="4555200"/>
           </a:xfrm>
         </p:spPr>
         <p:txBody>
           <a:bodyPr/>
           <a:lstStyle/>
           <a:p>
-            <a:pPr>
-              <a:lnSpc>
-                <a:spcPct val="150000"/>
-              </a:lnSpc>
-            </a:pPr>
             <a:r>
-              <a:rPr lang="en-US" altLang="en-US" b="1" dirty="0"/>
-              <a:t>Spend some time up front figuring out how to work as a team and work styles</a:t>
+              <a:rPr lang="en-US" dirty="0"/>
+              <a:t>GitHub Repos:</a:t>
             </a:r>
             <a:br>
-              <a:rPr lang="en-US" altLang="en-US" b="1" dirty="0"/>
+              <a:rPr lang="en-US" dirty="0"/>
             </a:br>
-            <a:endParaRPr lang="en-US" altLang="en-US" b="1" dirty="0"/>
-          </a:p>
-          <a:p>
-            <a:pPr>
-              <a:lnSpc>
-                <a:spcPct val="150000"/>
-              </a:lnSpc>
-            </a:pPr>
             <a:r>
-              <a:rPr lang="en-US" altLang="en-US" dirty="0"/>
-              <a:t>Everyone should participate in </a:t>
+              <a:rPr lang="en-US" dirty="0"/>
+              <a:t>https://github.com/dssg/mlpolicylab_fall26_{team_name}</a:t>
             </a:r>
-            <a:r>
-              <a:rPr lang="en-US" altLang="en-US" b="1" dirty="0">
-                <a:solidFill>
-                  <a:srgbClr val="FF0000"/>
-                </a:solidFill>
-              </a:rPr>
-              <a:t>all</a:t>
-            </a:r>
-            <a:r>
-              <a:rPr lang="en-US" altLang="en-US" dirty="0"/>
-              <a:t> aspects of project</a:t>
-            </a:r>
-          </a:p>
-          <a:p>
-            <a:pPr lvl="1">
+          </a:p>
+          <a:p>
+            <a:pPr lvl="1" fontAlgn="t">
               <a:lnSpc>
                 <a:spcPct val="100000"/>
               </a:lnSpc>
             </a:pPr>
             <a:r>
-              <a:rPr lang="en-US" altLang="en-US" dirty="0"/>
-              <a:t>No individual should do the majority of the python coding, SQL writing, report writing</a:t>
+              <a:rPr lang="en-US" b="1" dirty="0">
+                <a:hlinkClick r:id="rId2"/>
+              </a:rPr>
+              <a:t>mlpolicylab_fall26_jail_mh1</a:t>
             </a:r>
-            <a:br>
-              <a:rPr lang="en-US" altLang="en-US" dirty="0"/>
-            </a:br>
-            <a:endParaRPr lang="en-US" altLang="en-US" dirty="0"/>
-          </a:p>
-          <a:p>
-            <a:pPr>
-              <a:lnSpc>
-                <a:spcPct val="150000"/>
-              </a:lnSpc>
-            </a:pPr>
             <a:r>
-              <a:rPr lang="en-US" altLang="en-US" dirty="0"/>
-              <a:t>However, you should divide up different pieces of the work</a:t>
+              <a:rPr lang="en-US" b="1" dirty="0"/>
+              <a:t>,2</a:t>
             </a:r>
           </a:p>
           <a:p>
-            <a:pPr lvl="1">
+            <a:pPr lvl="1" fontAlgn="t">
               <a:lnSpc>
                 <a:spcPct val="100000"/>
               </a:lnSpc>
             </a:pPr>
             <a:r>
-              <a:rPr lang="en-US" altLang="en-US" dirty="0"/>
-              <a:t>For instance, working on different parts of the pipeline code in parallel or splitting up sections of the report</a:t>
+              <a:rPr lang="en-US" b="1" dirty="0">
+                <a:hlinkClick r:id="rId3"/>
+              </a:rPr>
+              <a:t>mlpolicylab_fall26_bills1</a:t>
             </a:r>
+            <a:r>
+              <a:rPr lang="en-US" b="1" dirty="0"/>
+              <a:t>,2</a:t>
+            </a:r>
+            <a:br>
+              <a:rPr lang="en-US" dirty="0"/>
+            </a:br>
+            <a:endParaRPr lang="en-US" dirty="0">
+              <a:solidFill>
+                <a:srgbClr val="C00000"/>
+              </a:solidFill>
+            </a:endParaRPr>
+          </a:p>
+          <a:p>
+            <a:r>
+              <a:rPr lang="en-US" dirty="0">
+                <a:solidFill>
+                  <a:schemeClr val="tx1"/>
+                </a:solidFill>
+              </a:rPr>
+              <a:t>Database (same server, different </a:t>
+            </a:r>
+            <a:r>
+              <a:rPr lang="en-US" dirty="0" err="1">
+                <a:solidFill>
+                  <a:schemeClr val="tx1"/>
+                </a:solidFill>
+              </a:rPr>
+              <a:t>db</a:t>
+            </a:r>
+            <a:r>
+              <a:rPr lang="en-US" dirty="0">
+                <a:solidFill>
+                  <a:schemeClr val="tx1"/>
+                </a:solidFill>
+              </a:rPr>
+              <a:t> name)</a:t>
+            </a:r>
+          </a:p>
+          <a:p>
+            <a:pPr lvl="1"/>
+            <a:r>
+              <a:rPr lang="en-US" dirty="0">
+                <a:solidFill>
+                  <a:schemeClr val="tx1"/>
+                </a:solidFill>
+              </a:rPr>
+              <a:t> bills_passage_bills1, bills_passage_bills2, johnson_county_ddj_jail_mh1, johnson_county_ddj_jail_mh2</a:t>
+            </a:r>
+          </a:p>
+          <a:p>
+            <a:endParaRPr lang="en-US" dirty="0">
+              <a:solidFill>
+                <a:schemeClr val="tx1"/>
+              </a:solidFill>
+            </a:endParaRPr>
+          </a:p>
+          <a:p>
+            <a:r>
+              <a:rPr lang="en-US" dirty="0">
+                <a:solidFill>
+                  <a:schemeClr val="tx1"/>
+                </a:solidFill>
+              </a:rPr>
+              <a:t>Project directory on server</a:t>
+            </a:r>
+          </a:p>
+          <a:p>
+            <a:endParaRPr lang="en-US" dirty="0">
+              <a:solidFill>
+                <a:schemeClr val="tx1"/>
+              </a:solidFill>
+            </a:endParaRPr>
+          </a:p>
+          <a:p>
+            <a:r>
+              <a:rPr lang="en-US" dirty="0">
+                <a:solidFill>
+                  <a:schemeClr val="tx1"/>
+                </a:solidFill>
+              </a:rPr>
+              <a:t>Private Slack channel</a:t>
+            </a:r>
+          </a:p>
+          <a:p>
+            <a:pPr marL="76200" indent="0">
+              <a:buNone/>
+            </a:pPr>
+            <a:endParaRPr lang="en-US" dirty="0"/>
           </a:p>
         </p:txBody>
       </p:sp>
     </p:spTree>
     <p:extLst>
       <p:ext uri="{BB962C8B-B14F-4D97-AF65-F5344CB8AC3E}">
-        <p14:creationId xmlns:p14="http://schemas.microsoft.com/office/powerpoint/2010/main" val="2446059493"/>
+        <p14:creationId xmlns:p14="http://schemas.microsoft.com/office/powerpoint/2010/main" val="4042955773"/>
       </p:ext>
     </p:extLst>
   </p:cSld>
@@ -13900,13 +15097,28 @@
         </p:nvSpPr>
         <p:spPr>
           <a:xfrm>
-            <a:off x="207750" y="1548990"/>
-            <a:ext cx="11776400" cy="4555200"/>
+            <a:off x="207800" y="1709433"/>
+            <a:ext cx="11776300" cy="4555200"/>
           </a:xfrm>
         </p:spPr>
         <p:txBody>
           <a:bodyPr/>
           <a:lstStyle/>
+          <a:p>
+            <a:pPr>
+              <a:lnSpc>
+                <a:spcPct val="150000"/>
+              </a:lnSpc>
+            </a:pPr>
+            <a:r>
+              <a:rPr lang="en-US" altLang="en-US" b="1" dirty="0"/>
+              <a:t>Spend some time up front figuring out how to work as a team and work styles</a:t>
+            </a:r>
+            <a:br>
+              <a:rPr lang="en-US" altLang="en-US" b="1" dirty="0"/>
+            </a:br>
+            <a:endParaRPr lang="en-US" altLang="en-US" b="1" dirty="0"/>
+          </a:p>
           <a:p>
             <a:pPr>
               <a:lnSpc>
@@ -13915,7 +15127,30 @@
             </a:pPr>
             <a:r>
               <a:rPr lang="en-US" altLang="en-US" dirty="0"/>
-              <a:t>We’re providing class time to make it easier to coordinate with your group and get feedback from peers and instructors, but you won’t be able to complete the project just in this allotted time</a:t>
+              <a:t>Everyone should participate in </a:t>
+            </a:r>
+            <a:r>
+              <a:rPr lang="en-US" altLang="en-US" b="1" dirty="0">
+                <a:solidFill>
+                  <a:srgbClr val="FF0000"/>
+                </a:solidFill>
+              </a:rPr>
+              <a:t>all</a:t>
+            </a:r>
+            <a:r>
+              <a:rPr lang="en-US" altLang="en-US" dirty="0"/>
+              <a:t> aspects of project</a:t>
+            </a:r>
+          </a:p>
+          <a:p>
+            <a:pPr lvl="1">
+              <a:lnSpc>
+                <a:spcPct val="100000"/>
+              </a:lnSpc>
+            </a:pPr>
+            <a:r>
+              <a:rPr lang="en-US" altLang="en-US" dirty="0"/>
+              <a:t>No individual should do the majority of the python coding, SQL writing, report writing</a:t>
             </a:r>
             <a:br>
               <a:rPr lang="en-US" altLang="en-US" dirty="0"/>
@@ -13930,45 +15165,18 @@
             </a:pPr>
             <a:r>
               <a:rPr lang="en-US" altLang="en-US" dirty="0"/>
-              <a:t>Tools for coordination:</a:t>
+              <a:t>However, you should divide up different pieces of the work</a:t>
             </a:r>
           </a:p>
           <a:p>
             <a:pPr lvl="1">
               <a:lnSpc>
-                <a:spcPct val="150000"/>
+                <a:spcPct val="100000"/>
               </a:lnSpc>
             </a:pPr>
             <a:r>
               <a:rPr lang="en-US" altLang="en-US" dirty="0"/>
-              <a:t>Slack: we’ve created group-level channels. Additionally, feel free to use group DMs and video calls with your group to coordinate as well.</a:t>
-            </a:r>
-          </a:p>
-          <a:p>
-            <a:pPr lvl="1">
-              <a:lnSpc>
-                <a:spcPct val="150000"/>
-              </a:lnSpc>
-            </a:pPr>
-            <a:r>
-              <a:rPr lang="en-US" altLang="en-US" dirty="0"/>
-              <a:t>Many good free options for task tracking/management: </a:t>
-            </a:r>
-            <a:r>
-              <a:rPr lang="en-US" altLang="en-US" dirty="0" err="1"/>
-              <a:t>github</a:t>
-            </a:r>
-            <a:r>
-              <a:rPr lang="en-US" altLang="en-US" dirty="0"/>
-              <a:t> issues or project boards, </a:t>
-            </a:r>
-            <a:r>
-              <a:rPr lang="en-US" altLang="en-US" dirty="0" err="1"/>
-              <a:t>trello</a:t>
-            </a:r>
-            <a:r>
-              <a:rPr lang="en-US" altLang="en-US" dirty="0"/>
-              <a:t>, etc.</a:t>
+              <a:t>For instance, working on different parts of the pipeline code in parallel or splitting up sections of the report</a:t>
             </a:r>
           </a:p>
         </p:txBody>
@@ -13976,7 +15184,7 @@
     </p:spTree>
     <p:extLst>
       <p:ext uri="{BB962C8B-B14F-4D97-AF65-F5344CB8AC3E}">
-        <p14:creationId xmlns:p14="http://schemas.microsoft.com/office/powerpoint/2010/main" val="2143740766"/>
+        <p14:creationId xmlns:p14="http://schemas.microsoft.com/office/powerpoint/2010/main" val="2446059493"/>
       </p:ext>
     </p:extLst>
   </p:cSld>
@@ -14051,6 +15259,143 @@
               </a:lnSpc>
             </a:pPr>
             <a:r>
+              <a:rPr lang="en-US" altLang="en-US" dirty="0"/>
+              <a:t>We’re providing class time to make it easier to coordinate with your group and get feedback from peers and instructors, but you won’t be able to complete the project just in this allotted time</a:t>
+            </a:r>
+            <a:br>
+              <a:rPr lang="en-US" altLang="en-US" dirty="0"/>
+            </a:br>
+            <a:endParaRPr lang="en-US" altLang="en-US" dirty="0"/>
+          </a:p>
+          <a:p>
+            <a:pPr>
+              <a:lnSpc>
+                <a:spcPct val="150000"/>
+              </a:lnSpc>
+            </a:pPr>
+            <a:r>
+              <a:rPr lang="en-US" altLang="en-US" dirty="0"/>
+              <a:t>Tools for coordination:</a:t>
+            </a:r>
+          </a:p>
+          <a:p>
+            <a:pPr lvl="1">
+              <a:lnSpc>
+                <a:spcPct val="150000"/>
+              </a:lnSpc>
+            </a:pPr>
+            <a:r>
+              <a:rPr lang="en-US" altLang="en-US" dirty="0"/>
+              <a:t>Slack: we’ve created group-level channels. Additionally, feel free to use group DMs and video calls with your group to coordinate as well.</a:t>
+            </a:r>
+          </a:p>
+          <a:p>
+            <a:pPr lvl="1">
+              <a:lnSpc>
+                <a:spcPct val="150000"/>
+              </a:lnSpc>
+            </a:pPr>
+            <a:r>
+              <a:rPr lang="en-US" altLang="en-US" dirty="0"/>
+              <a:t>Many good free options for task tracking/management: </a:t>
+            </a:r>
+            <a:r>
+              <a:rPr lang="en-US" altLang="en-US" dirty="0" err="1"/>
+              <a:t>github</a:t>
+            </a:r>
+            <a:r>
+              <a:rPr lang="en-US" altLang="en-US" dirty="0"/>
+              <a:t> issues or project boards, </a:t>
+            </a:r>
+            <a:r>
+              <a:rPr lang="en-US" altLang="en-US" dirty="0" err="1"/>
+              <a:t>trello</a:t>
+            </a:r>
+            <a:r>
+              <a:rPr lang="en-US" altLang="en-US" dirty="0"/>
+              <a:t>, etc.</a:t>
+            </a:r>
+          </a:p>
+        </p:txBody>
+      </p:sp>
+    </p:spTree>
+    <p:extLst>
+      <p:ext uri="{BB962C8B-B14F-4D97-AF65-F5344CB8AC3E}">
+        <p14:creationId xmlns:p14="http://schemas.microsoft.com/office/powerpoint/2010/main" val="2143740766"/>
+      </p:ext>
+    </p:extLst>
+  </p:cSld>
+  <p:clrMapOvr>
+    <a:masterClrMapping/>
+  </p:clrMapOvr>
+</p:sld>
+</file>
+
+<file path=ppt/slides/slide7.xml><?xml version="1.0" encoding="utf-8"?>
+<p:sld xmlns:a="http://schemas.openxmlformats.org/drawingml/2006/main" xmlns:r="http://schemas.openxmlformats.org/officeDocument/2006/relationships" xmlns:p="http://schemas.openxmlformats.org/presentationml/2006/main">
+  <p:cSld>
+    <p:spTree>
+      <p:nvGrpSpPr>
+        <p:cNvPr id="1" name=""/>
+        <p:cNvGrpSpPr/>
+        <p:nvPr/>
+      </p:nvGrpSpPr>
+      <p:grpSpPr>
+        <a:xfrm>
+          <a:off x="0" y="0"/>
+          <a:ext cx="0" cy="0"/>
+          <a:chOff x="0" y="0"/>
+          <a:chExt cx="0" cy="0"/>
+        </a:xfrm>
+      </p:grpSpPr>
+      <p:sp>
+        <p:nvSpPr>
+          <p:cNvPr id="8194" name="Rectangle 2"/>
+          <p:cNvSpPr>
+            <a:spLocks noGrp="1" noChangeArrowheads="1"/>
+          </p:cNvSpPr>
+          <p:nvPr>
+            <p:ph type="title"/>
+          </p:nvPr>
+        </p:nvSpPr>
+        <p:spPr/>
+        <p:txBody>
+          <a:bodyPr/>
+          <a:lstStyle/>
+          <a:p>
+            <a:r>
+              <a:rPr lang="en-US" altLang="en-US" dirty="0"/>
+              <a:t> Working with Your Project Team</a:t>
+            </a:r>
+          </a:p>
+        </p:txBody>
+      </p:sp>
+      <p:sp>
+        <p:nvSpPr>
+          <p:cNvPr id="8195" name="Rectangle 3"/>
+          <p:cNvSpPr>
+            <a:spLocks noGrp="1" noChangeArrowheads="1"/>
+          </p:cNvSpPr>
+          <p:nvPr>
+            <p:ph type="body" idx="1"/>
+          </p:nvPr>
+        </p:nvSpPr>
+        <p:spPr>
+          <a:xfrm>
+            <a:off x="207750" y="1548990"/>
+            <a:ext cx="11776400" cy="4555200"/>
+          </a:xfrm>
+        </p:spPr>
+        <p:txBody>
+          <a:bodyPr/>
+          <a:lstStyle/>
+          <a:p>
+            <a:pPr>
+              <a:lnSpc>
+                <a:spcPct val="150000"/>
+              </a:lnSpc>
+            </a:pPr>
+            <a:r>
               <a:rPr lang="en-US" altLang="en-US" b="1" dirty="0"/>
               <a:t>Active participation</a:t>
             </a:r>
@@ -14112,7 +15457,7 @@
 </p:sld>
 </file>
 
-<file path=ppt/slides/slide7.xml><?xml version="1.0" encoding="utf-8"?>
+<file path=ppt/slides/slide8.xml><?xml version="1.0" encoding="utf-8"?>
 <p:sld xmlns:a="http://schemas.openxmlformats.org/drawingml/2006/main" xmlns:r="http://schemas.openxmlformats.org/officeDocument/2006/relationships" xmlns:p="http://schemas.openxmlformats.org/presentationml/2006/main">
   <p:cSld>
     <p:spTree>
@@ -14212,7 +15557,7 @@
 </p:sld>
 </file>
 
-<file path=ppt/slides/slide8.xml><?xml version="1.0" encoding="utf-8"?>
+<file path=ppt/slides/slide9.xml><?xml version="1.0" encoding="utf-8"?>
 <p:sld xmlns:a="http://schemas.openxmlformats.org/drawingml/2006/main" xmlns:r="http://schemas.openxmlformats.org/officeDocument/2006/relationships" xmlns:p="http://schemas.openxmlformats.org/presentationml/2006/main">
   <p:cSld>
     <p:spTree>
@@ -14338,94 +15683,6 @@
     <p:extLst>
       <p:ext uri="{BB962C8B-B14F-4D97-AF65-F5344CB8AC3E}">
         <p14:creationId xmlns:p14="http://schemas.microsoft.com/office/powerpoint/2010/main" val="2624855364"/>
-      </p:ext>
-    </p:extLst>
-  </p:cSld>
-  <p:clrMapOvr>
-    <a:masterClrMapping/>
-  </p:clrMapOvr>
-</p:sld>
-</file>
-
-<file path=ppt/slides/slide9.xml><?xml version="1.0" encoding="utf-8"?>
-<p:sld xmlns:a="http://schemas.openxmlformats.org/drawingml/2006/main" xmlns:r="http://schemas.openxmlformats.org/officeDocument/2006/relationships" xmlns:p="http://schemas.openxmlformats.org/presentationml/2006/main">
-  <p:cSld>
-    <p:spTree>
-      <p:nvGrpSpPr>
-        <p:cNvPr id="1" name=""/>
-        <p:cNvGrpSpPr/>
-        <p:nvPr/>
-      </p:nvGrpSpPr>
-      <p:grpSpPr>
-        <a:xfrm>
-          <a:off x="0" y="0"/>
-          <a:ext cx="0" cy="0"/>
-          <a:chOff x="0" y="0"/>
-          <a:chExt cx="0" cy="0"/>
-        </a:xfrm>
-      </p:grpSpPr>
-      <p:sp>
-        <p:nvSpPr>
-          <p:cNvPr id="2" name="Title 1">
-            <a:extLst>
-              <a:ext uri="{FF2B5EF4-FFF2-40B4-BE49-F238E27FC236}">
-                <a16:creationId xmlns:a16="http://schemas.microsoft.com/office/drawing/2014/main" id="{8DE1804F-1831-E540-A1DC-073BA8437BAB}"/>
-              </a:ext>
-            </a:extLst>
-          </p:cNvPr>
-          <p:cNvSpPr>
-            <a:spLocks noGrp="1"/>
-          </p:cNvSpPr>
-          <p:nvPr>
-            <p:ph type="title"/>
-          </p:nvPr>
-        </p:nvSpPr>
-        <p:spPr/>
-        <p:txBody>
-          <a:bodyPr/>
-          <a:lstStyle/>
-          <a:p>
-            <a:r>
-              <a:rPr lang="en-US" dirty="0"/>
-              <a:t>Case Study</a:t>
-            </a:r>
-          </a:p>
-        </p:txBody>
-      </p:sp>
-      <p:pic>
-        <p:nvPicPr>
-          <p:cNvPr id="4" name="Picture 3">
-            <a:extLst>
-              <a:ext uri="{FF2B5EF4-FFF2-40B4-BE49-F238E27FC236}">
-                <a16:creationId xmlns:a16="http://schemas.microsoft.com/office/drawing/2014/main" id="{51603EA9-D766-944A-8E3A-F6DF40F326AA}"/>
-              </a:ext>
-            </a:extLst>
-          </p:cNvPr>
-          <p:cNvPicPr>
-            <a:picLocks noChangeAspect="1"/>
-          </p:cNvPicPr>
-          <p:nvPr/>
-        </p:nvPicPr>
-        <p:blipFill>
-          <a:blip r:embed="rId3"/>
-          <a:stretch>
-            <a:fillRect/>
-          </a:stretch>
-        </p:blipFill>
-        <p:spPr>
-          <a:xfrm>
-            <a:off x="888950" y="1670050"/>
-            <a:ext cx="10414000" cy="3517900"/>
-          </a:xfrm>
-          <a:prstGeom prst="rect">
-            <a:avLst/>
-          </a:prstGeom>
-        </p:spPr>
-      </p:pic>
-    </p:spTree>
-    <p:extLst>
-      <p:ext uri="{BB962C8B-B14F-4D97-AF65-F5344CB8AC3E}">
-        <p14:creationId xmlns:p14="http://schemas.microsoft.com/office/powerpoint/2010/main" val="2039079746"/>
       </p:ext>
     </p:extLst>
   </p:cSld>

--- a/Lectures/03-casestudies.pptx
+++ b/Lectures/03-casestudies.pptx
@@ -5,7 +5,7 @@
     <p:sldMasterId id="2147483648" r:id="rId1"/>
   </p:sldMasterIdLst>
   <p:notesMasterIdLst>
-    <p:notesMasterId r:id="rId27"/>
+    <p:notesMasterId r:id="rId29"/>
   </p:notesMasterIdLst>
   <p:sldIdLst>
     <p:sldId id="256" r:id="rId2"/>
@@ -19,23 +19,28 @@
     <p:sldId id="295" r:id="rId10"/>
     <p:sldId id="296" r:id="rId11"/>
     <p:sldId id="299" r:id="rId12"/>
-    <p:sldId id="305" r:id="rId13"/>
-    <p:sldId id="300" r:id="rId14"/>
-    <p:sldId id="301" r:id="rId15"/>
-    <p:sldId id="302" r:id="rId16"/>
-    <p:sldId id="310" r:id="rId17"/>
-    <p:sldId id="312" r:id="rId18"/>
-    <p:sldId id="313" r:id="rId19"/>
-    <p:sldId id="314" r:id="rId20"/>
-    <p:sldId id="315" r:id="rId21"/>
-    <p:sldId id="316" r:id="rId22"/>
-    <p:sldId id="317" r:id="rId23"/>
-    <p:sldId id="318" r:id="rId24"/>
-    <p:sldId id="311" r:id="rId25"/>
-    <p:sldId id="320" r:id="rId26"/>
+    <p:sldId id="321" r:id="rId13"/>
+    <p:sldId id="305" r:id="rId14"/>
+    <p:sldId id="322" r:id="rId15"/>
+    <p:sldId id="300" r:id="rId16"/>
+    <p:sldId id="301" r:id="rId17"/>
+    <p:sldId id="302" r:id="rId18"/>
+    <p:sldId id="310" r:id="rId19"/>
+    <p:sldId id="312" r:id="rId20"/>
+    <p:sldId id="313" r:id="rId21"/>
+    <p:sldId id="314" r:id="rId22"/>
+    <p:sldId id="315" r:id="rId23"/>
+    <p:sldId id="316" r:id="rId24"/>
+    <p:sldId id="317" r:id="rId25"/>
+    <p:sldId id="318" r:id="rId26"/>
+    <p:sldId id="311" r:id="rId27"/>
+    <p:sldId id="320" r:id="rId28"/>
   </p:sldIdLst>
   <p:sldSz cx="12192000" cy="6858000"/>
   <p:notesSz cx="6858000" cy="9144000"/>
+  <p:custDataLst>
+    <p:tags r:id="rId30"/>
+  </p:custDataLst>
   <p:defaultTextStyle>
     <a:defPPr marR="0" lvl="0" algn="l" rtl="0">
       <a:lnSpc>
@@ -270,7 +275,7 @@
       <p15:sldGuideLst xmlns:p15="http://schemas.microsoft.com/office/powerpoint/2012/main"/>
     </p:ext>
     <p:ext uri="http://customooxmlschemas.google.com/">
-      <go:slidesCustomData xmlns="" xmlns:mc="http://schemas.openxmlformats.org/markup-compatibility/2006" xmlns:mv="urn:schemas-microsoft-com:mac:vml" xmlns:c="http://schemas.openxmlformats.org/drawingml/2006/chart" xmlns:dgm="http://schemas.openxmlformats.org/drawingml/2006/diagram" xmlns:o="urn:schemas-microsoft-com:office:office" xmlns:v="urn:schemas-microsoft-com:vml" xmlns:pvml="urn:schemas-microsoft-com:office:powerpoint" xmlns:com="http://schemas.openxmlformats.org/drawingml/2006/compatibility" xmlns:p14="http://schemas.microsoft.com/office/powerpoint/2010/main" xmlns:p15="http://schemas.microsoft.com/office/powerpoint/2012/main" xmlns:go="http://customooxmlschemas.google.com/" r:id="rId30" roundtripDataSignature="AMtx7mjFyVUGRZWio+dc9dxzYsimUxNJbg=="/>
+      <go:slidesCustomData xmlns:go="http://customooxmlschemas.google.com/" xmlns:p15="http://schemas.microsoft.com/office/powerpoint/2012/main" xmlns:p14="http://schemas.microsoft.com/office/powerpoint/2010/main" xmlns:com="http://schemas.openxmlformats.org/drawingml/2006/compatibility" xmlns:pvml="urn:schemas-microsoft-com:office:powerpoint" xmlns:v="urn:schemas-microsoft-com:vml" xmlns:o="urn:schemas-microsoft-com:office:office" xmlns:dgm="http://schemas.openxmlformats.org/drawingml/2006/diagram" xmlns:c="http://schemas.openxmlformats.org/drawingml/2006/chart" xmlns:mv="urn:schemas-microsoft-com:mac:vml" xmlns:mc="http://schemas.openxmlformats.org/markup-compatibility/2006" xmlns="" r:id="rId31" roundtripDataSignature="AMtx7mjFyVUGRZWio+dc9dxzYsimUxNJbg=="/>
     </p:ext>
   </p:extLst>
 </p:presentation>
@@ -12517,8 +12522,16 @@
 </file>
 
 <file path=ppt/slides/slide12.xml><?xml version="1.0" encoding="utf-8"?>
-<p:sld xmlns:a="http://schemas.openxmlformats.org/drawingml/2006/main" xmlns:r="http://schemas.openxmlformats.org/officeDocument/2006/relationships" xmlns:p="http://schemas.openxmlformats.org/presentationml/2006/main">
+<p:sld xmlns:a="http://schemas.openxmlformats.org/drawingml/2006/main" xmlns:r="http://schemas.openxmlformats.org/officeDocument/2006/relationships" xmlns:p="http://schemas.openxmlformats.org/presentationml/2006/main" showMasterSp="0">
   <p:cSld>
+    <p:bg>
+      <p:bgPr>
+        <a:solidFill>
+          <a:srgbClr val="FFFFFF"/>
+        </a:solidFill>
+        <a:effectLst/>
+      </p:bgPr>
+    </p:bg>
     <p:spTree>
       <p:nvGrpSpPr>
         <p:cNvPr id="1" name=""/>
@@ -12535,129 +12548,503 @@
       </p:grpSpPr>
       <p:sp>
         <p:nvSpPr>
-          <p:cNvPr id="2" name="Title 1">
+          <p:cNvPr id="2" name="Rectangle 1">
             <a:extLst>
               <a:ext uri="{FF2B5EF4-FFF2-40B4-BE49-F238E27FC236}">
-                <a16:creationId xmlns:a16="http://schemas.microsoft.com/office/drawing/2014/main" id="{8DE1804F-1831-E540-A1DC-073BA8437BAB}"/>
+                <a16:creationId xmlns:a16="http://schemas.microsoft.com/office/drawing/2014/main" id="{3DF3C6A7-76EE-07E9-7238-EC3F04FD94A7}"/>
               </a:ext>
             </a:extLst>
           </p:cNvPr>
-          <p:cNvSpPr>
-            <a:spLocks noGrp="1"/>
-          </p:cNvSpPr>
+          <p:cNvSpPr/>
           <p:nvPr>
-            <p:ph type="title"/>
+            <p:custDataLst>
+              <p:tags r:id="rId2"/>
+            </p:custDataLst>
           </p:nvPr>
         </p:nvSpPr>
-        <p:spPr/>
+        <p:spPr>
+          <a:xfrm>
+            <a:off x="444693" y="1742703"/>
+            <a:ext cx="2371696" cy="2371696"/>
+          </a:xfrm>
+          <a:prstGeom prst="rect">
+            <a:avLst/>
+          </a:prstGeom>
+          <a:blipFill>
+            <a:blip>
+              <a:extLst>
+                <a:ext uri="{96DAC541-7B7A-43D3-8B79-37D633B846F1}">
+                  <asvg:svgBlip xmlns:asvg="http://schemas.microsoft.com/office/drawing/2016/SVG/main" r:embed="rId5"/>
+                </a:ext>
+              </a:extLst>
+            </a:blip>
+            <a:stretch>
+              <a:fillRect/>
+            </a:stretch>
+          </a:blipFill>
+          <a:ln>
+            <a:solidFill>
+              <a:srgbClr val="FFFFFF"/>
+            </a:solidFill>
+          </a:ln>
+        </p:spPr>
+        <p:style>
+          <a:lnRef idx="2">
+            <a:schemeClr val="accent1">
+              <a:shade val="15000"/>
+            </a:schemeClr>
+          </a:lnRef>
+          <a:fillRef idx="1">
+            <a:schemeClr val="accent1"/>
+          </a:fillRef>
+          <a:effectRef idx="0">
+            <a:schemeClr val="accent1"/>
+          </a:effectRef>
+          <a:fontRef idx="minor">
+            <a:schemeClr val="lt1"/>
+          </a:fontRef>
+        </p:style>
         <p:txBody>
-          <a:bodyPr/>
+          <a:bodyPr rtlCol="0" anchor="ctr"/>
           <a:lstStyle/>
           <a:p>
-            <a:r>
-              <a:rPr lang="en-US" dirty="0"/>
-              <a:t>Case Study</a:t>
-            </a:r>
+            <a:pPr algn="ctr"/>
+            <a:endParaRPr lang="en-US"/>
           </a:p>
         </p:txBody>
       </p:sp>
       <p:sp>
         <p:nvSpPr>
-          <p:cNvPr id="6" name="Google Shape;205;p17">
+          <p:cNvPr id="3" name="Rectangle 2">
             <a:extLst>
               <a:ext uri="{FF2B5EF4-FFF2-40B4-BE49-F238E27FC236}">
-                <a16:creationId xmlns:a16="http://schemas.microsoft.com/office/drawing/2014/main" id="{662D86EB-0258-0B4A-BD6B-21DB54554E75}"/>
+                <a16:creationId xmlns:a16="http://schemas.microsoft.com/office/drawing/2014/main" id="{011F2AF0-30C3-927A-0D7C-4986024DBABC}"/>
               </a:ext>
             </a:extLst>
           </p:cNvPr>
-          <p:cNvSpPr txBox="1">
-            <a:spLocks noGrp="1"/>
-          </p:cNvSpPr>
+          <p:cNvSpPr/>
           <p:nvPr>
-            <p:ph type="body" idx="1"/>
+            <p:custDataLst>
+              <p:tags r:id="rId3"/>
+            </p:custDataLst>
           </p:nvPr>
         </p:nvSpPr>
         <p:spPr>
           <a:xfrm>
-            <a:off x="415600" y="1536633"/>
-            <a:ext cx="11360700" cy="4555200"/>
+            <a:off x="3112851" y="1000897"/>
+            <a:ext cx="8486226" cy="3855308"/>
           </a:xfrm>
           <a:prstGeom prst="rect">
             <a:avLst/>
           </a:prstGeom>
           <a:noFill/>
-          <a:ln>
-            <a:noFill/>
+          <a:ln w="25400" cap="flat" cmpd="sng" algn="ctr">
+            <a:solidFill>
+              <a:srgbClr val="FFFFFF"/>
+            </a:solidFill>
+            <a:prstDash val="solid"/>
           </a:ln>
+          <a:effectLst/>
+          <a:extLst>
+            <a:ext uri="{909E8E84-426E-40DD-AFC4-6F175D3DCCD1}">
+              <a14:hiddenFill xmlns:a14="http://schemas.microsoft.com/office/drawing/2010/main">
+                <a:solidFill>
+                  <a:schemeClr val="accent1"/>
+                </a:solidFill>
+              </a14:hiddenFill>
+            </a:ext>
+          </a:extLst>
         </p:spPr>
+        <p:style>
+          <a:lnRef idx="2">
+            <a:schemeClr val="accent1">
+              <a:shade val="15000"/>
+            </a:schemeClr>
+          </a:lnRef>
+          <a:fillRef idx="1">
+            <a:schemeClr val="accent1"/>
+          </a:fillRef>
+          <a:effectRef idx="0">
+            <a:schemeClr val="accent1"/>
+          </a:effectRef>
+          <a:fontRef idx="minor">
+            <a:schemeClr val="lt1"/>
+          </a:fontRef>
+        </p:style>
         <p:txBody>
-          <a:bodyPr spcFirstLastPara="1" wrap="square" lIns="91425" tIns="45700" rIns="91425" bIns="45700" anchor="t" anchorCtr="0">
-            <a:noAutofit/>
-          </a:bodyPr>
+          <a:bodyPr rtlCol="0" anchor="ctr"/>
           <a:lstStyle/>
           <a:p>
-            <a:pPr marL="0" lvl="0" indent="0" algn="l" rtl="0">
-              <a:spcBef>
-                <a:spcPts val="0"/>
-              </a:spcBef>
-              <a:spcAft>
-                <a:spcPts val="0"/>
-              </a:spcAft>
-              <a:buClr>
-                <a:srgbClr val="000000"/>
-              </a:buClr>
-              <a:buSzPts val="3200"/>
-              <a:buNone/>
-            </a:pPr>
-            <a:endParaRPr lang="en-US" sz="4000" dirty="0">
-              <a:solidFill>
-                <a:srgbClr val="000000"/>
-              </a:solidFill>
-            </a:endParaRPr>
-          </a:p>
-          <a:p>
-            <a:pPr marL="0" lvl="0" indent="0">
-              <a:buClr>
-                <a:srgbClr val="000000"/>
-              </a:buClr>
-              <a:buSzPts val="3200"/>
-              <a:buNone/>
-            </a:pPr>
             <a:r>
-              <a:rPr lang="en-US" sz="4000" dirty="0">
+              <a:rPr lang="en-US" sz="3500" b="1">
                 <a:solidFill>
                   <a:srgbClr val="000000"/>
                 </a:solidFill>
               </a:rPr>
-              <a:t>How well does the paper address the goal we defined above?</a:t>
+              <a:t>
+If you were scoping the project described here, how would you describe the overall goal?
+</a:t>
             </a:r>
           </a:p>
-          <a:p>
-            <a:pPr marL="0" lvl="0" indent="0">
-              <a:buClr>
-                <a:srgbClr val="000000"/>
-              </a:buClr>
-              <a:buSzPts val="3200"/>
-              <a:buNone/>
-            </a:pPr>
-            <a:endParaRPr lang="en-US" sz="4000" dirty="0">
+        </p:txBody>
+      </p:sp>
+      <p:sp>
+        <p:nvSpPr>
+          <p:cNvPr id="4" name="Rectangle 3">
+            <a:extLst>
+              <a:ext uri="{FF2B5EF4-FFF2-40B4-BE49-F238E27FC236}">
+                <a16:creationId xmlns:a16="http://schemas.microsoft.com/office/drawing/2014/main" id="{36C9B8DA-C11C-AF99-66AE-0E4189592632}"/>
+              </a:ext>
+            </a:extLst>
+          </p:cNvPr>
+          <p:cNvSpPr/>
+          <p:nvPr/>
+        </p:nvSpPr>
+        <p:spPr>
+          <a:xfrm>
+            <a:off x="0" y="5820032"/>
+            <a:ext cx="12192001" cy="1037968"/>
+          </a:xfrm>
+          <a:prstGeom prst="rect">
+            <a:avLst/>
+          </a:prstGeom>
+          <a:solidFill>
+            <a:srgbClr val="198038"/>
+          </a:solidFill>
+          <a:ln w="25400" cap="flat" cmpd="sng" algn="ctr">
+            <a:noFill/>
+            <a:prstDash val="solid"/>
+          </a:ln>
+          <a:effectLst/>
+          <a:extLst>
+            <a:ext uri="{91240B29-F687-4F45-9708-019B960494DF}">
+              <a14:hiddenLine xmlns:a14="http://schemas.microsoft.com/office/drawing/2010/main" w="25400" cap="flat" cmpd="sng" algn="ctr">
+                <a:solidFill>
+                  <a:schemeClr val="accent1">
+                    <a:shade val="15000"/>
+                  </a:schemeClr>
+                </a:solidFill>
+                <a:prstDash val="solid"/>
+              </a14:hiddenLine>
+            </a:ext>
+          </a:extLst>
+        </p:spPr>
+        <p:style>
+          <a:lnRef idx="2">
+            <a:schemeClr val="accent1">
+              <a:shade val="15000"/>
+            </a:schemeClr>
+          </a:lnRef>
+          <a:fillRef idx="1">
+            <a:schemeClr val="accent1"/>
+          </a:fillRef>
+          <a:effectRef idx="0">
+            <a:schemeClr val="accent1"/>
+          </a:effectRef>
+          <a:fontRef idx="minor">
+            <a:schemeClr val="lt1"/>
+          </a:fontRef>
+        </p:style>
+        <p:txBody>
+          <a:bodyPr lIns="741155" tIns="259492" rIns="1852888" bIns="203886" rtlCol="0" anchor="ctr">
+            <a:normAutofit fontScale="85000" lnSpcReduction="10000"/>
+          </a:bodyPr>
+          <a:lstStyle/>
+          <a:p>
+            <a:r>
+              <a:rPr lang="en-US" sz="2600">
+                <a:solidFill>
+                  <a:srgbClr val="FFFFFF"/>
+                </a:solidFill>
+              </a:rPr>
+              <a:t>The </a:t>
+            </a:r>
+            <a:r>
+              <a:rPr lang="en-US" sz="2600">
+                <a:solidFill>
+                  <a:srgbClr val="FFFFFF"/>
+                </a:solidFill>
+                <a:hlinkClick r:id="rId6">
+                  <a:extLst>
+                    <a:ext uri="{A12FA001-AC4F-418D-AE19-62706E023703}">
+                      <ahyp:hlinkClr xmlns:ahyp="http://schemas.microsoft.com/office/drawing/2018/hyperlinkcolor" val="tx"/>
+                    </a:ext>
+                  </a:extLst>
+                </a:hlinkClick>
+              </a:rPr>
+              <a:t>Slido app</a:t>
+            </a:r>
+            <a:r>
+              <a:rPr lang="en-US" sz="2600">
+                <a:solidFill>
+                  <a:srgbClr val="FFFFFF"/>
+                </a:solidFill>
+              </a:rPr>
+              <a:t> must be installed on every computer you’re presenting from</a:t>
+            </a:r>
+          </a:p>
+        </p:txBody>
+      </p:sp>
+      <p:pic>
+        <p:nvPicPr>
+          <p:cNvPr id="6" name="Graphic 5">
+            <a:extLst>
+              <a:ext uri="{FF2B5EF4-FFF2-40B4-BE49-F238E27FC236}">
+                <a16:creationId xmlns:a16="http://schemas.microsoft.com/office/drawing/2014/main" id="{2E75C080-C21D-8A12-13D9-B77E8973F6D8}"/>
+              </a:ext>
+            </a:extLst>
+          </p:cNvPr>
+          <p:cNvPicPr>
+            <a:picLocks/>
+          </p:cNvPicPr>
+          <p:nvPr/>
+        </p:nvPicPr>
+        <p:blipFill>
+          <a:blip>
+            <a:extLst>
+              <a:ext uri="{96DAC541-7B7A-43D3-8B79-37D633B846F1}">
+                <asvg:svgBlip xmlns:asvg="http://schemas.microsoft.com/office/drawing/2016/SVG/main" r:embed="rId7"/>
+              </a:ext>
+            </a:extLst>
+          </a:blip>
+          <a:stretch>
+            <a:fillRect/>
+          </a:stretch>
+        </p:blipFill>
+        <p:spPr>
+          <a:xfrm>
+            <a:off x="296462" y="6190785"/>
+            <a:ext cx="296462" cy="296462"/>
+          </a:xfrm>
+          <a:prstGeom prst="rect">
+            <a:avLst/>
+          </a:prstGeom>
+        </p:spPr>
+      </p:pic>
+      <p:sp>
+        <p:nvSpPr>
+          <p:cNvPr id="7" name="Trapezoid 6">
+            <a:extLst>
+              <a:ext uri="{FF2B5EF4-FFF2-40B4-BE49-F238E27FC236}">
+                <a16:creationId xmlns:a16="http://schemas.microsoft.com/office/drawing/2014/main" id="{0AB3CF34-034A-72C5-5EDF-5FA5731E9AFF}"/>
+              </a:ext>
+            </a:extLst>
+          </p:cNvPr>
+          <p:cNvSpPr/>
+          <p:nvPr/>
+        </p:nvSpPr>
+        <p:spPr>
+          <a:xfrm rot="2700000">
+            <a:off x="9620371" y="514924"/>
+            <a:ext cx="3335198" cy="778213"/>
+          </a:xfrm>
+          <a:prstGeom prst="trapezoid">
+            <a:avLst>
+              <a:gd name="adj" fmla="val 100000"/>
+            </a:avLst>
+          </a:prstGeom>
+          <a:solidFill>
+            <a:srgbClr val="EDFAF2"/>
+          </a:solidFill>
+          <a:ln w="25400" cap="flat" cmpd="sng" algn="ctr">
+            <a:noFill/>
+            <a:prstDash val="solid"/>
+          </a:ln>
+          <a:effectLst/>
+          <a:extLst>
+            <a:ext uri="{91240B29-F687-4F45-9708-019B960494DF}">
+              <a14:hiddenLine xmlns:a14="http://schemas.microsoft.com/office/drawing/2010/main" w="25400" cap="flat" cmpd="sng" algn="ctr">
+                <a:solidFill>
+                  <a:schemeClr val="accent1">
+                    <a:shade val="15000"/>
+                  </a:schemeClr>
+                </a:solidFill>
+                <a:prstDash val="solid"/>
+              </a14:hiddenLine>
+            </a:ext>
+          </a:extLst>
+        </p:spPr>
+        <p:style>
+          <a:lnRef idx="2">
+            <a:schemeClr val="accent1">
+              <a:shade val="15000"/>
+            </a:schemeClr>
+          </a:lnRef>
+          <a:fillRef idx="1">
+            <a:schemeClr val="accent1"/>
+          </a:fillRef>
+          <a:effectRef idx="0">
+            <a:schemeClr val="accent1"/>
+          </a:effectRef>
+          <a:fontRef idx="minor">
+            <a:schemeClr val="lt1"/>
+          </a:fontRef>
+        </p:style>
+        <p:txBody>
+          <a:bodyPr tIns="0" bIns="0" rtlCol="0" anchor="t">
+            <a:normAutofit fontScale="70000" lnSpcReduction="20000"/>
+          </a:bodyPr>
+          <a:lstStyle/>
+          <a:p>
+            <a:pPr algn="ctr"/>
+            <a:r>
+              <a:rPr lang="en-US" sz="2600" b="1">
+                <a:solidFill>
+                  <a:srgbClr val="198038"/>
+                </a:solidFill>
+              </a:rPr>
+              <a:t>Do not edit
+</a:t>
+            </a:r>
+            <a:r>
+              <a:rPr lang="en-US" sz="2200">
+                <a:solidFill>
+                  <a:srgbClr val="198038"/>
+                </a:solidFill>
+                <a:hlinkClick r:id="rId8">
+                  <a:extLst>
+                    <a:ext uri="{A12FA001-AC4F-418D-AE19-62706E023703}">
+                      <ahyp:hlinkClr xmlns:ahyp="http://schemas.microsoft.com/office/drawing/2018/hyperlinkcolor" val="tx"/>
+                    </a:ext>
+                  </a:extLst>
+                </a:hlinkClick>
+              </a:rPr>
+              <a:t>How to change the design</a:t>
+            </a:r>
+            <a:endParaRPr lang="en-US" sz="2200">
               <a:solidFill>
-                <a:srgbClr val="000000"/>
+                <a:srgbClr val="198038"/>
               </a:solidFill>
             </a:endParaRPr>
           </a:p>
         </p:txBody>
       </p:sp>
+      <p:pic>
+        <p:nvPicPr>
+          <p:cNvPr id="9" name="Graphic 8">
+            <a:extLst>
+              <a:ext uri="{FF2B5EF4-FFF2-40B4-BE49-F238E27FC236}">
+                <a16:creationId xmlns:a16="http://schemas.microsoft.com/office/drawing/2014/main" id="{16131167-4DA8-95BA-BEA7-D9B4244CE7D8}"/>
+              </a:ext>
+            </a:extLst>
+          </p:cNvPr>
+          <p:cNvPicPr>
+            <a:picLocks/>
+          </p:cNvPicPr>
+          <p:nvPr/>
+        </p:nvPicPr>
+        <p:blipFill>
+          <a:blip>
+            <a:extLst>
+              <a:ext uri="{96DAC541-7B7A-43D3-8B79-37D633B846F1}">
+                <asvg:svgBlip xmlns:asvg="http://schemas.microsoft.com/office/drawing/2016/SVG/main" r:embed="rId9"/>
+              </a:ext>
+            </a:extLst>
+          </a:blip>
+          <a:stretch>
+            <a:fillRect/>
+          </a:stretch>
+        </p:blipFill>
+        <p:spPr>
+          <a:xfrm>
+            <a:off x="10746748" y="6153727"/>
+            <a:ext cx="1111733" cy="370578"/>
+          </a:xfrm>
+          <a:prstGeom prst="rect">
+            <a:avLst/>
+          </a:prstGeom>
+        </p:spPr>
+      </p:pic>
     </p:spTree>
+    <p:custDataLst>
+      <p:tags r:id="rId1"/>
+    </p:custDataLst>
     <p:extLst>
       <p:ext uri="{BB962C8B-B14F-4D97-AF65-F5344CB8AC3E}">
-        <p14:creationId xmlns:p14="http://schemas.microsoft.com/office/powerpoint/2010/main" val="4284856106"/>
+        <p14:creationId xmlns:p14="http://schemas.microsoft.com/office/powerpoint/2010/main" val="1030471923"/>
       </p:ext>
     </p:extLst>
   </p:cSld>
   <p:clrMapOvr>
     <a:masterClrMapping/>
   </p:clrMapOvr>
+  <p:timing>
+    <p:tnLst>
+      <p:par>
+        <p:cTn id="1" dur="indefinite" restart="never" nodeType="tmRoot">
+          <p:childTnLst>
+            <p:seq concurrent="1" nextAc="seek">
+              <p:cTn id="2" dur="indefinite" nodeType="mainSeq">
+                <p:childTnLst>
+                  <p:par>
+                    <p:cTn id="3" fill="hold">
+                      <p:stCondLst>
+                        <p:cond delay="indefinite"/>
+                      </p:stCondLst>
+                      <p:childTnLst>
+                        <p:par>
+                          <p:cTn id="4" fill="hold">
+                            <p:stCondLst>
+                              <p:cond delay="0"/>
+                            </p:stCondLst>
+                            <p:childTnLst>
+                              <p:par>
+                                <p:cTn id="5" presetID="26" presetClass="emph" presetSubtype="0" fill="hold" grpId="0" nodeType="clickEffect">
+                                  <p:stCondLst>
+                                    <p:cond delay="0"/>
+                                  </p:stCondLst>
+                                  <p:childTnLst>
+                                    <p:animEffect transition="out" filter="fade">
+                                      <p:cBhvr>
+                                        <p:cTn id="6" dur="50" tmFilter="0, 0; .2, .5; .8, .5; 1, 0"/>
+                                        <p:tgtEl>
+                                          <p:spTgt spid="3"/>
+                                        </p:tgtEl>
+                                      </p:cBhvr>
+                                    </p:animEffect>
+                                    <p:animScale>
+                                      <p:cBhvr>
+                                        <p:cTn id="7" dur="25" autoRev="1" fill="hold"/>
+                                        <p:tgtEl>
+                                          <p:spTgt spid="3"/>
+                                        </p:tgtEl>
+                                      </p:cBhvr>
+                                      <p:by x="105000" y="105000"/>
+                                    </p:animScale>
+                                  </p:childTnLst>
+                                </p:cTn>
+                              </p:par>
+                            </p:childTnLst>
+                          </p:cTn>
+                        </p:par>
+                      </p:childTnLst>
+                    </p:cTn>
+                  </p:par>
+                </p:childTnLst>
+              </p:cTn>
+              <p:prevCondLst>
+                <p:cond evt="onPrev" delay="0">
+                  <p:tgtEl>
+                    <p:sldTgt/>
+                  </p:tgtEl>
+                </p:cond>
+              </p:prevCondLst>
+              <p:nextCondLst>
+                <p:cond evt="onNext" delay="0">
+                  <p:tgtEl>
+                    <p:sldTgt/>
+                  </p:tgtEl>
+                </p:cond>
+              </p:nextCondLst>
+            </p:seq>
+          </p:childTnLst>
+        </p:cTn>
+      </p:par>
+    </p:tnLst>
+    <p:bldLst>
+      <p:bldP spid="3" grpId="0" animBg="1"/>
+    </p:bldLst>
+  </p:timing>
 </p:sld>
 </file>
 
@@ -12774,9 +13161,18 @@
                   <a:srgbClr val="000000"/>
                 </a:solidFill>
               </a:rPr>
-              <a:t>How well does the paper address the goal you defined above? What evidence do they provide in this regard?</a:t>
+              <a:t>How well does the paper address the goal we defined above?</a:t>
             </a:r>
-            <a:endParaRPr sz="4000" dirty="0">
+          </a:p>
+          <a:p>
+            <a:pPr marL="0" lvl="0" indent="0">
+              <a:buClr>
+                <a:srgbClr val="000000"/>
+              </a:buClr>
+              <a:buSzPts val="3200"/>
+              <a:buNone/>
+            </a:pPr>
+            <a:endParaRPr lang="en-US" sz="4000" dirty="0">
               <a:solidFill>
                 <a:srgbClr val="000000"/>
               </a:solidFill>
@@ -12787,7 +13183,7 @@
     </p:spTree>
     <p:extLst>
       <p:ext uri="{BB962C8B-B14F-4D97-AF65-F5344CB8AC3E}">
-        <p14:creationId xmlns:p14="http://schemas.microsoft.com/office/powerpoint/2010/main" val="1443994749"/>
+        <p14:creationId xmlns:p14="http://schemas.microsoft.com/office/powerpoint/2010/main" val="4284856106"/>
       </p:ext>
     </p:extLst>
   </p:cSld>
@@ -12798,8 +13194,16 @@
 </file>
 
 <file path=ppt/slides/slide14.xml><?xml version="1.0" encoding="utf-8"?>
-<p:sld xmlns:a="http://schemas.openxmlformats.org/drawingml/2006/main" xmlns:r="http://schemas.openxmlformats.org/officeDocument/2006/relationships" xmlns:p="http://schemas.openxmlformats.org/presentationml/2006/main">
+<p:sld xmlns:a="http://schemas.openxmlformats.org/drawingml/2006/main" xmlns:r="http://schemas.openxmlformats.org/officeDocument/2006/relationships" xmlns:p="http://schemas.openxmlformats.org/presentationml/2006/main" showMasterSp="0">
   <p:cSld>
+    <p:bg>
+      <p:bgPr>
+        <a:solidFill>
+          <a:srgbClr val="FFFFFF"/>
+        </a:solidFill>
+        <a:effectLst/>
+      </p:bgPr>
+    </p:bg>
     <p:spTree>
       <p:nvGrpSpPr>
         <p:cNvPr id="1" name=""/>
@@ -12816,140 +13220,501 @@
       </p:grpSpPr>
       <p:sp>
         <p:nvSpPr>
-          <p:cNvPr id="2" name="Title 1">
+          <p:cNvPr id="2" name="Rectangle 1">
             <a:extLst>
               <a:ext uri="{FF2B5EF4-FFF2-40B4-BE49-F238E27FC236}">
-                <a16:creationId xmlns:a16="http://schemas.microsoft.com/office/drawing/2014/main" id="{8DE1804F-1831-E540-A1DC-073BA8437BAB}"/>
+                <a16:creationId xmlns:a16="http://schemas.microsoft.com/office/drawing/2014/main" id="{3E54F02D-78D7-C1B8-0671-CFA1E5F9D854}"/>
               </a:ext>
             </a:extLst>
           </p:cNvPr>
-          <p:cNvSpPr>
-            <a:spLocks noGrp="1"/>
-          </p:cNvSpPr>
+          <p:cNvSpPr/>
           <p:nvPr>
-            <p:ph type="title"/>
+            <p:custDataLst>
+              <p:tags r:id="rId2"/>
+            </p:custDataLst>
           </p:nvPr>
         </p:nvSpPr>
-        <p:spPr/>
+        <p:spPr>
+          <a:xfrm>
+            <a:off x="444693" y="1742703"/>
+            <a:ext cx="2371696" cy="2371696"/>
+          </a:xfrm>
+          <a:prstGeom prst="rect">
+            <a:avLst/>
+          </a:prstGeom>
+          <a:blipFill>
+            <a:blip>
+              <a:extLst>
+                <a:ext uri="{96DAC541-7B7A-43D3-8B79-37D633B846F1}">
+                  <asvg:svgBlip xmlns:asvg="http://schemas.microsoft.com/office/drawing/2016/SVG/main" r:embed="rId5"/>
+                </a:ext>
+              </a:extLst>
+            </a:blip>
+            <a:stretch>
+              <a:fillRect/>
+            </a:stretch>
+          </a:blipFill>
+          <a:ln>
+            <a:solidFill>
+              <a:srgbClr val="FFFFFF"/>
+            </a:solidFill>
+          </a:ln>
+        </p:spPr>
+        <p:style>
+          <a:lnRef idx="2">
+            <a:schemeClr val="accent1">
+              <a:shade val="15000"/>
+            </a:schemeClr>
+          </a:lnRef>
+          <a:fillRef idx="1">
+            <a:schemeClr val="accent1"/>
+          </a:fillRef>
+          <a:effectRef idx="0">
+            <a:schemeClr val="accent1"/>
+          </a:effectRef>
+          <a:fontRef idx="minor">
+            <a:schemeClr val="lt1"/>
+          </a:fontRef>
+        </p:style>
         <p:txBody>
-          <a:bodyPr/>
+          <a:bodyPr rtlCol="0" anchor="ctr"/>
           <a:lstStyle/>
           <a:p>
-            <a:r>
-              <a:rPr lang="en-US" dirty="0"/>
-              <a:t>Case Study</a:t>
-            </a:r>
+            <a:pPr algn="ctr"/>
+            <a:endParaRPr lang="en-US"/>
           </a:p>
         </p:txBody>
       </p:sp>
       <p:sp>
         <p:nvSpPr>
-          <p:cNvPr id="6" name="Google Shape;205;p17">
+          <p:cNvPr id="3" name="Rectangle 2">
             <a:extLst>
               <a:ext uri="{FF2B5EF4-FFF2-40B4-BE49-F238E27FC236}">
-                <a16:creationId xmlns:a16="http://schemas.microsoft.com/office/drawing/2014/main" id="{662D86EB-0258-0B4A-BD6B-21DB54554E75}"/>
+                <a16:creationId xmlns:a16="http://schemas.microsoft.com/office/drawing/2014/main" id="{49CB6BDC-FFE1-1A5D-747C-646CCB7E676D}"/>
               </a:ext>
             </a:extLst>
           </p:cNvPr>
-          <p:cNvSpPr txBox="1">
-            <a:spLocks noGrp="1"/>
-          </p:cNvSpPr>
+          <p:cNvSpPr/>
           <p:nvPr>
-            <p:ph type="body" idx="1"/>
+            <p:custDataLst>
+              <p:tags r:id="rId3"/>
+            </p:custDataLst>
           </p:nvPr>
         </p:nvSpPr>
         <p:spPr>
           <a:xfrm>
-            <a:off x="415600" y="1536633"/>
-            <a:ext cx="11360700" cy="4555200"/>
+            <a:off x="3112851" y="1000897"/>
+            <a:ext cx="8486226" cy="3855308"/>
           </a:xfrm>
           <a:prstGeom prst="rect">
             <a:avLst/>
           </a:prstGeom>
           <a:noFill/>
-          <a:ln>
-            <a:noFill/>
+          <a:ln w="25400" cap="flat" cmpd="sng" algn="ctr">
+            <a:solidFill>
+              <a:srgbClr val="FFFFFF"/>
+            </a:solidFill>
+            <a:prstDash val="solid"/>
           </a:ln>
+          <a:effectLst/>
+          <a:extLst>
+            <a:ext uri="{909E8E84-426E-40DD-AFC4-6F175D3DCCD1}">
+              <a14:hiddenFill xmlns:a14="http://schemas.microsoft.com/office/drawing/2010/main">
+                <a:solidFill>
+                  <a:schemeClr val="accent1"/>
+                </a:solidFill>
+              </a14:hiddenFill>
+            </a:ext>
+          </a:extLst>
         </p:spPr>
+        <p:style>
+          <a:lnRef idx="2">
+            <a:schemeClr val="accent1">
+              <a:shade val="15000"/>
+            </a:schemeClr>
+          </a:lnRef>
+          <a:fillRef idx="1">
+            <a:schemeClr val="accent1"/>
+          </a:fillRef>
+          <a:effectRef idx="0">
+            <a:schemeClr val="accent1"/>
+          </a:effectRef>
+          <a:fontRef idx="minor">
+            <a:schemeClr val="lt1"/>
+          </a:fontRef>
+        </p:style>
         <p:txBody>
-          <a:bodyPr spcFirstLastPara="1" wrap="square" lIns="91425" tIns="45700" rIns="91425" bIns="45700" anchor="t" anchorCtr="0">
-            <a:noAutofit/>
-          </a:bodyPr>
+          <a:bodyPr rtlCol="0" anchor="ctr"/>
           <a:lstStyle/>
           <a:p>
-            <a:pPr marL="0" lvl="0" indent="0" algn="l" rtl="0">
-              <a:spcBef>
-                <a:spcPts val="0"/>
-              </a:spcBef>
-              <a:spcAft>
-                <a:spcPts val="0"/>
-              </a:spcAft>
-              <a:buClr>
-                <a:srgbClr val="000000"/>
-              </a:buClr>
-              <a:buSzPts val="3200"/>
-              <a:buNone/>
-            </a:pPr>
-            <a:endParaRPr lang="en-US" sz="4000" dirty="0">
-              <a:solidFill>
-                <a:srgbClr val="000000"/>
-              </a:solidFill>
-            </a:endParaRPr>
-          </a:p>
-          <a:p>
-            <a:pPr marL="0" lvl="0" indent="0" algn="l" rtl="0">
-              <a:spcBef>
-                <a:spcPts val="0"/>
-              </a:spcBef>
-              <a:spcAft>
-                <a:spcPts val="0"/>
-              </a:spcAft>
-              <a:buClr>
-                <a:srgbClr val="000000"/>
-              </a:buClr>
-              <a:buSzPts val="3200"/>
-              <a:buNone/>
-            </a:pPr>
-            <a:endParaRPr lang="en-US" sz="4000" dirty="0">
-              <a:solidFill>
-                <a:srgbClr val="000000"/>
-              </a:solidFill>
-            </a:endParaRPr>
-          </a:p>
-          <a:p>
-            <a:pPr marL="0" lvl="0" indent="0">
-              <a:buClr>
-                <a:srgbClr val="000000"/>
-              </a:buClr>
-              <a:buSzPts val="3200"/>
-              <a:buNone/>
-            </a:pPr>
             <a:r>
-              <a:rPr lang="en-US" sz="4000" dirty="0">
+              <a:rPr lang="en-US" sz="4000" b="1">
                 <a:solidFill>
                   <a:srgbClr val="000000"/>
                 </a:solidFill>
               </a:rPr>
-              <a:t>What actions can the public health officials take to achieve that goal?</a:t>
+              <a:t>How well does the paper address the goal we defined above?</a:t>
             </a:r>
-            <a:endParaRPr sz="4000" dirty="0">
+          </a:p>
+        </p:txBody>
+      </p:sp>
+      <p:sp>
+        <p:nvSpPr>
+          <p:cNvPr id="4" name="Rectangle 3">
+            <a:extLst>
+              <a:ext uri="{FF2B5EF4-FFF2-40B4-BE49-F238E27FC236}">
+                <a16:creationId xmlns:a16="http://schemas.microsoft.com/office/drawing/2014/main" id="{26773520-AD8F-903C-BA7E-9D6C6E808D5B}"/>
+              </a:ext>
+            </a:extLst>
+          </p:cNvPr>
+          <p:cNvSpPr/>
+          <p:nvPr/>
+        </p:nvSpPr>
+        <p:spPr>
+          <a:xfrm>
+            <a:off x="0" y="5820032"/>
+            <a:ext cx="12192001" cy="1037968"/>
+          </a:xfrm>
+          <a:prstGeom prst="rect">
+            <a:avLst/>
+          </a:prstGeom>
+          <a:solidFill>
+            <a:srgbClr val="198038"/>
+          </a:solidFill>
+          <a:ln w="25400" cap="flat" cmpd="sng" algn="ctr">
+            <a:noFill/>
+            <a:prstDash val="solid"/>
+          </a:ln>
+          <a:effectLst/>
+          <a:extLst>
+            <a:ext uri="{91240B29-F687-4F45-9708-019B960494DF}">
+              <a14:hiddenLine xmlns:a14="http://schemas.microsoft.com/office/drawing/2010/main" w="25400" cap="flat" cmpd="sng" algn="ctr">
+                <a:solidFill>
+                  <a:schemeClr val="accent1">
+                    <a:shade val="15000"/>
+                  </a:schemeClr>
+                </a:solidFill>
+                <a:prstDash val="solid"/>
+              </a14:hiddenLine>
+            </a:ext>
+          </a:extLst>
+        </p:spPr>
+        <p:style>
+          <a:lnRef idx="2">
+            <a:schemeClr val="accent1">
+              <a:shade val="15000"/>
+            </a:schemeClr>
+          </a:lnRef>
+          <a:fillRef idx="1">
+            <a:schemeClr val="accent1"/>
+          </a:fillRef>
+          <a:effectRef idx="0">
+            <a:schemeClr val="accent1"/>
+          </a:effectRef>
+          <a:fontRef idx="minor">
+            <a:schemeClr val="lt1"/>
+          </a:fontRef>
+        </p:style>
+        <p:txBody>
+          <a:bodyPr lIns="741155" tIns="259492" rIns="1852888" bIns="203886" rtlCol="0" anchor="ctr">
+            <a:normAutofit fontScale="85000" lnSpcReduction="10000"/>
+          </a:bodyPr>
+          <a:lstStyle/>
+          <a:p>
+            <a:r>
+              <a:rPr lang="en-US" sz="2600">
+                <a:solidFill>
+                  <a:srgbClr val="FFFFFF"/>
+                </a:solidFill>
+              </a:rPr>
+              <a:t>The </a:t>
+            </a:r>
+            <a:r>
+              <a:rPr lang="en-US" sz="2600">
+                <a:solidFill>
+                  <a:srgbClr val="FFFFFF"/>
+                </a:solidFill>
+                <a:hlinkClick r:id="rId6">
+                  <a:extLst>
+                    <a:ext uri="{A12FA001-AC4F-418D-AE19-62706E023703}">
+                      <ahyp:hlinkClr xmlns:ahyp="http://schemas.microsoft.com/office/drawing/2018/hyperlinkcolor" val="tx"/>
+                    </a:ext>
+                  </a:extLst>
+                </a:hlinkClick>
+              </a:rPr>
+              <a:t>Slido app</a:t>
+            </a:r>
+            <a:r>
+              <a:rPr lang="en-US" sz="2600">
+                <a:solidFill>
+                  <a:srgbClr val="FFFFFF"/>
+                </a:solidFill>
+              </a:rPr>
+              <a:t> must be installed on every computer you’re presenting from</a:t>
+            </a:r>
+          </a:p>
+        </p:txBody>
+      </p:sp>
+      <p:pic>
+        <p:nvPicPr>
+          <p:cNvPr id="6" name="Graphic 5">
+            <a:extLst>
+              <a:ext uri="{FF2B5EF4-FFF2-40B4-BE49-F238E27FC236}">
+                <a16:creationId xmlns:a16="http://schemas.microsoft.com/office/drawing/2014/main" id="{3DBA7457-BE4B-838C-4A3D-420AC0E8E4B7}"/>
+              </a:ext>
+            </a:extLst>
+          </p:cNvPr>
+          <p:cNvPicPr>
+            <a:picLocks/>
+          </p:cNvPicPr>
+          <p:nvPr/>
+        </p:nvPicPr>
+        <p:blipFill>
+          <a:blip>
+            <a:extLst>
+              <a:ext uri="{96DAC541-7B7A-43D3-8B79-37D633B846F1}">
+                <asvg:svgBlip xmlns:asvg="http://schemas.microsoft.com/office/drawing/2016/SVG/main" r:embed="rId7"/>
+              </a:ext>
+            </a:extLst>
+          </a:blip>
+          <a:stretch>
+            <a:fillRect/>
+          </a:stretch>
+        </p:blipFill>
+        <p:spPr>
+          <a:xfrm>
+            <a:off x="296462" y="6190785"/>
+            <a:ext cx="296462" cy="296462"/>
+          </a:xfrm>
+          <a:prstGeom prst="rect">
+            <a:avLst/>
+          </a:prstGeom>
+        </p:spPr>
+      </p:pic>
+      <p:sp>
+        <p:nvSpPr>
+          <p:cNvPr id="7" name="Trapezoid 6">
+            <a:extLst>
+              <a:ext uri="{FF2B5EF4-FFF2-40B4-BE49-F238E27FC236}">
+                <a16:creationId xmlns:a16="http://schemas.microsoft.com/office/drawing/2014/main" id="{EE16A06E-CEFB-5AC5-64AE-5324F559686B}"/>
+              </a:ext>
+            </a:extLst>
+          </p:cNvPr>
+          <p:cNvSpPr/>
+          <p:nvPr/>
+        </p:nvSpPr>
+        <p:spPr>
+          <a:xfrm rot="2700000">
+            <a:off x="9620371" y="514924"/>
+            <a:ext cx="3335198" cy="778213"/>
+          </a:xfrm>
+          <a:prstGeom prst="trapezoid">
+            <a:avLst>
+              <a:gd name="adj" fmla="val 100000"/>
+            </a:avLst>
+          </a:prstGeom>
+          <a:solidFill>
+            <a:srgbClr val="EDFAF2"/>
+          </a:solidFill>
+          <a:ln w="25400" cap="flat" cmpd="sng" algn="ctr">
+            <a:noFill/>
+            <a:prstDash val="solid"/>
+          </a:ln>
+          <a:effectLst/>
+          <a:extLst>
+            <a:ext uri="{91240B29-F687-4F45-9708-019B960494DF}">
+              <a14:hiddenLine xmlns:a14="http://schemas.microsoft.com/office/drawing/2010/main" w="25400" cap="flat" cmpd="sng" algn="ctr">
+                <a:solidFill>
+                  <a:schemeClr val="accent1">
+                    <a:shade val="15000"/>
+                  </a:schemeClr>
+                </a:solidFill>
+                <a:prstDash val="solid"/>
+              </a14:hiddenLine>
+            </a:ext>
+          </a:extLst>
+        </p:spPr>
+        <p:style>
+          <a:lnRef idx="2">
+            <a:schemeClr val="accent1">
+              <a:shade val="15000"/>
+            </a:schemeClr>
+          </a:lnRef>
+          <a:fillRef idx="1">
+            <a:schemeClr val="accent1"/>
+          </a:fillRef>
+          <a:effectRef idx="0">
+            <a:schemeClr val="accent1"/>
+          </a:effectRef>
+          <a:fontRef idx="minor">
+            <a:schemeClr val="lt1"/>
+          </a:fontRef>
+        </p:style>
+        <p:txBody>
+          <a:bodyPr tIns="0" bIns="0" rtlCol="0" anchor="t">
+            <a:normAutofit fontScale="70000" lnSpcReduction="20000"/>
+          </a:bodyPr>
+          <a:lstStyle/>
+          <a:p>
+            <a:pPr algn="ctr"/>
+            <a:r>
+              <a:rPr lang="en-US" sz="2600" b="1">
+                <a:solidFill>
+                  <a:srgbClr val="198038"/>
+                </a:solidFill>
+              </a:rPr>
+              <a:t>Do not edit
+</a:t>
+            </a:r>
+            <a:r>
+              <a:rPr lang="en-US" sz="2200">
+                <a:solidFill>
+                  <a:srgbClr val="198038"/>
+                </a:solidFill>
+                <a:hlinkClick r:id="rId8">
+                  <a:extLst>
+                    <a:ext uri="{A12FA001-AC4F-418D-AE19-62706E023703}">
+                      <ahyp:hlinkClr xmlns:ahyp="http://schemas.microsoft.com/office/drawing/2018/hyperlinkcolor" val="tx"/>
+                    </a:ext>
+                  </a:extLst>
+                </a:hlinkClick>
+              </a:rPr>
+              <a:t>How to change the design</a:t>
+            </a:r>
+            <a:endParaRPr lang="en-US" sz="2200">
               <a:solidFill>
-                <a:srgbClr val="000000"/>
+                <a:srgbClr val="198038"/>
               </a:solidFill>
             </a:endParaRPr>
           </a:p>
         </p:txBody>
       </p:sp>
+      <p:pic>
+        <p:nvPicPr>
+          <p:cNvPr id="9" name="Graphic 8">
+            <a:extLst>
+              <a:ext uri="{FF2B5EF4-FFF2-40B4-BE49-F238E27FC236}">
+                <a16:creationId xmlns:a16="http://schemas.microsoft.com/office/drawing/2014/main" id="{84141AC1-DC22-AA9E-00D8-9425F7C8C770}"/>
+              </a:ext>
+            </a:extLst>
+          </p:cNvPr>
+          <p:cNvPicPr>
+            <a:picLocks/>
+          </p:cNvPicPr>
+          <p:nvPr/>
+        </p:nvPicPr>
+        <p:blipFill>
+          <a:blip>
+            <a:extLst>
+              <a:ext uri="{96DAC541-7B7A-43D3-8B79-37D633B846F1}">
+                <asvg:svgBlip xmlns:asvg="http://schemas.microsoft.com/office/drawing/2016/SVG/main" r:embed="rId9"/>
+              </a:ext>
+            </a:extLst>
+          </a:blip>
+          <a:stretch>
+            <a:fillRect/>
+          </a:stretch>
+        </p:blipFill>
+        <p:spPr>
+          <a:xfrm>
+            <a:off x="10746748" y="6153727"/>
+            <a:ext cx="1111733" cy="370578"/>
+          </a:xfrm>
+          <a:prstGeom prst="rect">
+            <a:avLst/>
+          </a:prstGeom>
+        </p:spPr>
+      </p:pic>
     </p:spTree>
+    <p:custDataLst>
+      <p:tags r:id="rId1"/>
+    </p:custDataLst>
     <p:extLst>
       <p:ext uri="{BB962C8B-B14F-4D97-AF65-F5344CB8AC3E}">
-        <p14:creationId xmlns:p14="http://schemas.microsoft.com/office/powerpoint/2010/main" val="2564637539"/>
+        <p14:creationId xmlns:p14="http://schemas.microsoft.com/office/powerpoint/2010/main" val="2954376814"/>
       </p:ext>
     </p:extLst>
   </p:cSld>
   <p:clrMapOvr>
     <a:masterClrMapping/>
   </p:clrMapOvr>
+  <p:timing>
+    <p:tnLst>
+      <p:par>
+        <p:cTn id="1" dur="indefinite" restart="never" nodeType="tmRoot">
+          <p:childTnLst>
+            <p:seq concurrent="1" nextAc="seek">
+              <p:cTn id="2" dur="indefinite" nodeType="mainSeq">
+                <p:childTnLst>
+                  <p:par>
+                    <p:cTn id="3" fill="hold">
+                      <p:stCondLst>
+                        <p:cond delay="indefinite"/>
+                      </p:stCondLst>
+                      <p:childTnLst>
+                        <p:par>
+                          <p:cTn id="4" fill="hold">
+                            <p:stCondLst>
+                              <p:cond delay="0"/>
+                            </p:stCondLst>
+                            <p:childTnLst>
+                              <p:par>
+                                <p:cTn id="5" presetID="26" presetClass="emph" presetSubtype="0" fill="hold" grpId="0" nodeType="clickEffect">
+                                  <p:stCondLst>
+                                    <p:cond delay="0"/>
+                                  </p:stCondLst>
+                                  <p:childTnLst>
+                                    <p:animEffect transition="out" filter="fade">
+                                      <p:cBhvr>
+                                        <p:cTn id="6" dur="50" tmFilter="0, 0; .2, .5; .8, .5; 1, 0"/>
+                                        <p:tgtEl>
+                                          <p:spTgt spid="3"/>
+                                        </p:tgtEl>
+                                      </p:cBhvr>
+                                    </p:animEffect>
+                                    <p:animScale>
+                                      <p:cBhvr>
+                                        <p:cTn id="7" dur="25" autoRev="1" fill="hold"/>
+                                        <p:tgtEl>
+                                          <p:spTgt spid="3"/>
+                                        </p:tgtEl>
+                                      </p:cBhvr>
+                                      <p:by x="105000" y="105000"/>
+                                    </p:animScale>
+                                  </p:childTnLst>
+                                </p:cTn>
+                              </p:par>
+                            </p:childTnLst>
+                          </p:cTn>
+                        </p:par>
+                      </p:childTnLst>
+                    </p:cTn>
+                  </p:par>
+                </p:childTnLst>
+              </p:cTn>
+              <p:prevCondLst>
+                <p:cond evt="onPrev" delay="0">
+                  <p:tgtEl>
+                    <p:sldTgt/>
+                  </p:tgtEl>
+                </p:cond>
+              </p:prevCondLst>
+              <p:nextCondLst>
+                <p:cond evt="onNext" delay="0">
+                  <p:tgtEl>
+                    <p:sldTgt/>
+                  </p:tgtEl>
+                </p:cond>
+              </p:nextCondLst>
+            </p:seq>
+          </p:childTnLst>
+        </p:cTn>
+      </p:par>
+    </p:tnLst>
+    <p:bldLst>
+      <p:bldP spid="3" grpId="0" animBg="1"/>
+    </p:bldLst>
+  </p:timing>
 </p:sld>
 </file>
 
@@ -13033,7 +13798,13 @@
           </a:bodyPr>
           <a:lstStyle/>
           <a:p>
-            <a:pPr marL="0" lvl="0" indent="0">
+            <a:pPr marL="0" lvl="0" indent="0" algn="l" rtl="0">
+              <a:spcBef>
+                <a:spcPts val="0"/>
+              </a:spcBef>
+              <a:spcAft>
+                <a:spcPts val="0"/>
+              </a:spcAft>
               <a:buClr>
                 <a:srgbClr val="000000"/>
               </a:buClr>
@@ -13060,7 +13831,7 @@
                   <a:srgbClr val="000000"/>
                 </a:solidFill>
               </a:rPr>
-              <a:t>In what ways did the model change the actions or decisions that public health officials are taking in terms of when, where, and how to act?</a:t>
+              <a:t>How well does the paper address the goal you defined above? What evidence do they provide in this regard?</a:t>
             </a:r>
             <a:endParaRPr sz="4000" dirty="0">
               <a:solidFill>
@@ -13073,7 +13844,7 @@
     </p:spTree>
     <p:extLst>
       <p:ext uri="{BB962C8B-B14F-4D97-AF65-F5344CB8AC3E}">
-        <p14:creationId xmlns:p14="http://schemas.microsoft.com/office/powerpoint/2010/main" val="3255311184"/>
+        <p14:creationId xmlns:p14="http://schemas.microsoft.com/office/powerpoint/2010/main" val="1443994749"/>
       </p:ext>
     </p:extLst>
   </p:cSld>
@@ -13163,6 +13934,292 @@
           </a:bodyPr>
           <a:lstStyle/>
           <a:p>
+            <a:pPr marL="0" lvl="0" indent="0" algn="l" rtl="0">
+              <a:spcBef>
+                <a:spcPts val="0"/>
+              </a:spcBef>
+              <a:spcAft>
+                <a:spcPts val="0"/>
+              </a:spcAft>
+              <a:buClr>
+                <a:srgbClr val="000000"/>
+              </a:buClr>
+              <a:buSzPts val="3200"/>
+              <a:buNone/>
+            </a:pPr>
+            <a:endParaRPr lang="en-US" sz="4000" dirty="0">
+              <a:solidFill>
+                <a:srgbClr val="000000"/>
+              </a:solidFill>
+            </a:endParaRPr>
+          </a:p>
+          <a:p>
+            <a:pPr marL="0" lvl="0" indent="0" algn="l" rtl="0">
+              <a:spcBef>
+                <a:spcPts val="0"/>
+              </a:spcBef>
+              <a:spcAft>
+                <a:spcPts val="0"/>
+              </a:spcAft>
+              <a:buClr>
+                <a:srgbClr val="000000"/>
+              </a:buClr>
+              <a:buSzPts val="3200"/>
+              <a:buNone/>
+            </a:pPr>
+            <a:endParaRPr lang="en-US" sz="4000" dirty="0">
+              <a:solidFill>
+                <a:srgbClr val="000000"/>
+              </a:solidFill>
+            </a:endParaRPr>
+          </a:p>
+          <a:p>
+            <a:pPr marL="0" lvl="0" indent="0">
+              <a:buClr>
+                <a:srgbClr val="000000"/>
+              </a:buClr>
+              <a:buSzPts val="3200"/>
+              <a:buNone/>
+            </a:pPr>
+            <a:r>
+              <a:rPr lang="en-US" sz="4000" dirty="0">
+                <a:solidFill>
+                  <a:srgbClr val="000000"/>
+                </a:solidFill>
+              </a:rPr>
+              <a:t>What actions can the public health officials take to achieve that goal?</a:t>
+            </a:r>
+            <a:endParaRPr sz="4000" dirty="0">
+              <a:solidFill>
+                <a:srgbClr val="000000"/>
+              </a:solidFill>
+            </a:endParaRPr>
+          </a:p>
+        </p:txBody>
+      </p:sp>
+    </p:spTree>
+    <p:extLst>
+      <p:ext uri="{BB962C8B-B14F-4D97-AF65-F5344CB8AC3E}">
+        <p14:creationId xmlns:p14="http://schemas.microsoft.com/office/powerpoint/2010/main" val="2564637539"/>
+      </p:ext>
+    </p:extLst>
+  </p:cSld>
+  <p:clrMapOvr>
+    <a:masterClrMapping/>
+  </p:clrMapOvr>
+</p:sld>
+</file>
+
+<file path=ppt/slides/slide17.xml><?xml version="1.0" encoding="utf-8"?>
+<p:sld xmlns:a="http://schemas.openxmlformats.org/drawingml/2006/main" xmlns:r="http://schemas.openxmlformats.org/officeDocument/2006/relationships" xmlns:p="http://schemas.openxmlformats.org/presentationml/2006/main">
+  <p:cSld>
+    <p:spTree>
+      <p:nvGrpSpPr>
+        <p:cNvPr id="1" name=""/>
+        <p:cNvGrpSpPr/>
+        <p:nvPr/>
+      </p:nvGrpSpPr>
+      <p:grpSpPr>
+        <a:xfrm>
+          <a:off x="0" y="0"/>
+          <a:ext cx="0" cy="0"/>
+          <a:chOff x="0" y="0"/>
+          <a:chExt cx="0" cy="0"/>
+        </a:xfrm>
+      </p:grpSpPr>
+      <p:sp>
+        <p:nvSpPr>
+          <p:cNvPr id="2" name="Title 1">
+            <a:extLst>
+              <a:ext uri="{FF2B5EF4-FFF2-40B4-BE49-F238E27FC236}">
+                <a16:creationId xmlns:a16="http://schemas.microsoft.com/office/drawing/2014/main" id="{8DE1804F-1831-E540-A1DC-073BA8437BAB}"/>
+              </a:ext>
+            </a:extLst>
+          </p:cNvPr>
+          <p:cNvSpPr>
+            <a:spLocks noGrp="1"/>
+          </p:cNvSpPr>
+          <p:nvPr>
+            <p:ph type="title"/>
+          </p:nvPr>
+        </p:nvSpPr>
+        <p:spPr/>
+        <p:txBody>
+          <a:bodyPr/>
+          <a:lstStyle/>
+          <a:p>
+            <a:r>
+              <a:rPr lang="en-US" dirty="0"/>
+              <a:t>Case Study</a:t>
+            </a:r>
+          </a:p>
+        </p:txBody>
+      </p:sp>
+      <p:sp>
+        <p:nvSpPr>
+          <p:cNvPr id="6" name="Google Shape;205;p17">
+            <a:extLst>
+              <a:ext uri="{FF2B5EF4-FFF2-40B4-BE49-F238E27FC236}">
+                <a16:creationId xmlns:a16="http://schemas.microsoft.com/office/drawing/2014/main" id="{662D86EB-0258-0B4A-BD6B-21DB54554E75}"/>
+              </a:ext>
+            </a:extLst>
+          </p:cNvPr>
+          <p:cNvSpPr txBox="1">
+            <a:spLocks noGrp="1"/>
+          </p:cNvSpPr>
+          <p:nvPr>
+            <p:ph type="body" idx="1"/>
+          </p:nvPr>
+        </p:nvSpPr>
+        <p:spPr>
+          <a:xfrm>
+            <a:off x="415600" y="1536633"/>
+            <a:ext cx="11360700" cy="4555200"/>
+          </a:xfrm>
+          <a:prstGeom prst="rect">
+            <a:avLst/>
+          </a:prstGeom>
+          <a:noFill/>
+          <a:ln>
+            <a:noFill/>
+          </a:ln>
+        </p:spPr>
+        <p:txBody>
+          <a:bodyPr spcFirstLastPara="1" wrap="square" lIns="91425" tIns="45700" rIns="91425" bIns="45700" anchor="t" anchorCtr="0">
+            <a:noAutofit/>
+          </a:bodyPr>
+          <a:lstStyle/>
+          <a:p>
+            <a:pPr marL="0" lvl="0" indent="0">
+              <a:buClr>
+                <a:srgbClr val="000000"/>
+              </a:buClr>
+              <a:buSzPts val="3200"/>
+              <a:buNone/>
+            </a:pPr>
+            <a:endParaRPr lang="en-US" sz="4000" dirty="0">
+              <a:solidFill>
+                <a:srgbClr val="000000"/>
+              </a:solidFill>
+            </a:endParaRPr>
+          </a:p>
+          <a:p>
+            <a:pPr marL="0" lvl="0" indent="0">
+              <a:buClr>
+                <a:srgbClr val="000000"/>
+              </a:buClr>
+              <a:buSzPts val="3200"/>
+              <a:buNone/>
+            </a:pPr>
+            <a:r>
+              <a:rPr lang="en-US" sz="4000" dirty="0">
+                <a:solidFill>
+                  <a:srgbClr val="000000"/>
+                </a:solidFill>
+              </a:rPr>
+              <a:t>In what ways did the model change the actions or decisions that public health officials are taking in terms of when, where, and how to act?</a:t>
+            </a:r>
+            <a:endParaRPr sz="4000" dirty="0">
+              <a:solidFill>
+                <a:srgbClr val="000000"/>
+              </a:solidFill>
+            </a:endParaRPr>
+          </a:p>
+        </p:txBody>
+      </p:sp>
+    </p:spTree>
+    <p:extLst>
+      <p:ext uri="{BB962C8B-B14F-4D97-AF65-F5344CB8AC3E}">
+        <p14:creationId xmlns:p14="http://schemas.microsoft.com/office/powerpoint/2010/main" val="3255311184"/>
+      </p:ext>
+    </p:extLst>
+  </p:cSld>
+  <p:clrMapOvr>
+    <a:masterClrMapping/>
+  </p:clrMapOvr>
+</p:sld>
+</file>
+
+<file path=ppt/slides/slide18.xml><?xml version="1.0" encoding="utf-8"?>
+<p:sld xmlns:a="http://schemas.openxmlformats.org/drawingml/2006/main" xmlns:r="http://schemas.openxmlformats.org/officeDocument/2006/relationships" xmlns:p="http://schemas.openxmlformats.org/presentationml/2006/main">
+  <p:cSld>
+    <p:spTree>
+      <p:nvGrpSpPr>
+        <p:cNvPr id="1" name=""/>
+        <p:cNvGrpSpPr/>
+        <p:nvPr/>
+      </p:nvGrpSpPr>
+      <p:grpSpPr>
+        <a:xfrm>
+          <a:off x="0" y="0"/>
+          <a:ext cx="0" cy="0"/>
+          <a:chOff x="0" y="0"/>
+          <a:chExt cx="0" cy="0"/>
+        </a:xfrm>
+      </p:grpSpPr>
+      <p:sp>
+        <p:nvSpPr>
+          <p:cNvPr id="2" name="Title 1">
+            <a:extLst>
+              <a:ext uri="{FF2B5EF4-FFF2-40B4-BE49-F238E27FC236}">
+                <a16:creationId xmlns:a16="http://schemas.microsoft.com/office/drawing/2014/main" id="{8DE1804F-1831-E540-A1DC-073BA8437BAB}"/>
+              </a:ext>
+            </a:extLst>
+          </p:cNvPr>
+          <p:cNvSpPr>
+            <a:spLocks noGrp="1"/>
+          </p:cNvSpPr>
+          <p:nvPr>
+            <p:ph type="title"/>
+          </p:nvPr>
+        </p:nvSpPr>
+        <p:spPr/>
+        <p:txBody>
+          <a:bodyPr/>
+          <a:lstStyle/>
+          <a:p>
+            <a:r>
+              <a:rPr lang="en-US" dirty="0"/>
+              <a:t>Case Study</a:t>
+            </a:r>
+          </a:p>
+        </p:txBody>
+      </p:sp>
+      <p:sp>
+        <p:nvSpPr>
+          <p:cNvPr id="6" name="Google Shape;205;p17">
+            <a:extLst>
+              <a:ext uri="{FF2B5EF4-FFF2-40B4-BE49-F238E27FC236}">
+                <a16:creationId xmlns:a16="http://schemas.microsoft.com/office/drawing/2014/main" id="{662D86EB-0258-0B4A-BD6B-21DB54554E75}"/>
+              </a:ext>
+            </a:extLst>
+          </p:cNvPr>
+          <p:cNvSpPr txBox="1">
+            <a:spLocks noGrp="1"/>
+          </p:cNvSpPr>
+          <p:nvPr>
+            <p:ph type="body" idx="1"/>
+          </p:nvPr>
+        </p:nvSpPr>
+        <p:spPr>
+          <a:xfrm>
+            <a:off x="415600" y="1536633"/>
+            <a:ext cx="11360700" cy="4555200"/>
+          </a:xfrm>
+          <a:prstGeom prst="rect">
+            <a:avLst/>
+          </a:prstGeom>
+          <a:noFill/>
+          <a:ln>
+            <a:noFill/>
+          </a:ln>
+        </p:spPr>
+        <p:txBody>
+          <a:bodyPr spcFirstLastPara="1" wrap="square" lIns="91425" tIns="45700" rIns="91425" bIns="45700" anchor="t" anchorCtr="0">
+            <a:noAutofit/>
+          </a:bodyPr>
+          <a:lstStyle/>
+          <a:p>
             <a:pPr marL="0" lvl="0" indent="0">
               <a:buClr>
                 <a:srgbClr val="000000"/>
@@ -13213,7 +14270,7 @@
 </p:sld>
 </file>
 
-<file path=ppt/slides/slide17.xml><?xml version="1.0" encoding="utf-8"?>
+<file path=ppt/slides/slide19.xml><?xml version="1.0" encoding="utf-8"?>
 <p:sld xmlns:a="http://schemas.openxmlformats.org/drawingml/2006/main" xmlns:r="http://schemas.openxmlformats.org/officeDocument/2006/relationships" xmlns:p="http://schemas.openxmlformats.org/presentationml/2006/main">
   <p:cSld>
     <p:spTree>
@@ -13345,260 +14402,6 @@
     <p:extLst>
       <p:ext uri="{BB962C8B-B14F-4D97-AF65-F5344CB8AC3E}">
         <p14:creationId xmlns:p14="http://schemas.microsoft.com/office/powerpoint/2010/main" val="2267483000"/>
-      </p:ext>
-    </p:extLst>
-  </p:cSld>
-  <p:clrMapOvr>
-    <a:masterClrMapping/>
-  </p:clrMapOvr>
-</p:sld>
-</file>
-
-<file path=ppt/slides/slide18.xml><?xml version="1.0" encoding="utf-8"?>
-<p:sld xmlns:a="http://schemas.openxmlformats.org/drawingml/2006/main" xmlns:r="http://schemas.openxmlformats.org/officeDocument/2006/relationships" xmlns:p="http://schemas.openxmlformats.org/presentationml/2006/main">
-  <p:cSld>
-    <p:spTree>
-      <p:nvGrpSpPr>
-        <p:cNvPr id="1" name="">
-          <a:extLst>
-            <a:ext uri="{FF2B5EF4-FFF2-40B4-BE49-F238E27FC236}">
-              <a16:creationId xmlns:a16="http://schemas.microsoft.com/office/drawing/2014/main" id="{52FA6CF7-A5B6-9A4D-50FF-1081514A08D6}"/>
-            </a:ext>
-          </a:extLst>
-        </p:cNvPr>
-        <p:cNvGrpSpPr/>
-        <p:nvPr/>
-      </p:nvGrpSpPr>
-      <p:grpSpPr>
-        <a:xfrm>
-          <a:off x="0" y="0"/>
-          <a:ext cx="0" cy="0"/>
-          <a:chOff x="0" y="0"/>
-          <a:chExt cx="0" cy="0"/>
-        </a:xfrm>
-      </p:grpSpPr>
-      <p:sp>
-        <p:nvSpPr>
-          <p:cNvPr id="2" name="Title 1">
-            <a:extLst>
-              <a:ext uri="{FF2B5EF4-FFF2-40B4-BE49-F238E27FC236}">
-                <a16:creationId xmlns:a16="http://schemas.microsoft.com/office/drawing/2014/main" id="{EB78112A-6BD2-3FF4-D04E-8BA2089CD3A1}"/>
-              </a:ext>
-            </a:extLst>
-          </p:cNvPr>
-          <p:cNvSpPr>
-            <a:spLocks noGrp="1"/>
-          </p:cNvSpPr>
-          <p:nvPr>
-            <p:ph type="title"/>
-          </p:nvPr>
-        </p:nvSpPr>
-        <p:spPr/>
-        <p:txBody>
-          <a:bodyPr/>
-          <a:lstStyle/>
-          <a:p>
-            <a:r>
-              <a:rPr lang="en-US" dirty="0"/>
-              <a:t>Bonus questions to consider (after class)</a:t>
-            </a:r>
-          </a:p>
-        </p:txBody>
-      </p:sp>
-      <p:sp>
-        <p:nvSpPr>
-          <p:cNvPr id="3" name="Text Placeholder 2">
-            <a:extLst>
-              <a:ext uri="{FF2B5EF4-FFF2-40B4-BE49-F238E27FC236}">
-                <a16:creationId xmlns:a16="http://schemas.microsoft.com/office/drawing/2014/main" id="{7CC71FCE-FE5A-C561-CCEE-B98CB19A2373}"/>
-              </a:ext>
-            </a:extLst>
-          </p:cNvPr>
-          <p:cNvSpPr>
-            <a:spLocks noGrp="1"/>
-          </p:cNvSpPr>
-          <p:nvPr>
-            <p:ph type="body" idx="1"/>
-          </p:nvPr>
-        </p:nvSpPr>
-        <p:spPr/>
-        <p:txBody>
-          <a:bodyPr/>
-          <a:lstStyle/>
-          <a:p>
-            <a:r>
-              <a:rPr lang="en-US" b="1" dirty="0"/>
-              <a:t>Validation: </a:t>
-            </a:r>
-            <a:r>
-              <a:rPr lang="en-US" dirty="0"/>
-              <a:t>The model was validated with 5-fold cross-validation, with folds assigned randomly across town-weeks. What is the most serious consequence?</a:t>
-            </a:r>
-          </a:p>
-          <a:p>
-            <a:pPr lvl="1"/>
-            <a:r>
-              <a:rPr lang="en-US" dirty="0"/>
-              <a:t>Reported accuracy overstates forward performance</a:t>
-            </a:r>
-          </a:p>
-          <a:p>
-            <a:pPr lvl="1"/>
-            <a:r>
-              <a:rPr lang="en-US" dirty="0"/>
-              <a:t>Feature importances are unreliable</a:t>
-            </a:r>
-          </a:p>
-          <a:p>
-            <a:pPr lvl="1"/>
-            <a:r>
-              <a:rPr lang="en-US" dirty="0"/>
-              <a:t>Towns can't be compared to each other</a:t>
-            </a:r>
-          </a:p>
-          <a:p>
-            <a:pPr lvl="1"/>
-            <a:r>
-              <a:rPr lang="en-US" dirty="0"/>
-              <a:t>No real problem, since the model is retrained weekly anyway</a:t>
-            </a:r>
-          </a:p>
-          <a:p>
-            <a:endParaRPr lang="en-US" dirty="0"/>
-          </a:p>
-        </p:txBody>
-      </p:sp>
-    </p:spTree>
-    <p:extLst>
-      <p:ext uri="{BB962C8B-B14F-4D97-AF65-F5344CB8AC3E}">
-        <p14:creationId xmlns:p14="http://schemas.microsoft.com/office/powerpoint/2010/main" val="162559103"/>
-      </p:ext>
-    </p:extLst>
-  </p:cSld>
-  <p:clrMapOvr>
-    <a:masterClrMapping/>
-  </p:clrMapOvr>
-</p:sld>
-</file>
-
-<file path=ppt/slides/slide19.xml><?xml version="1.0" encoding="utf-8"?>
-<p:sld xmlns:a="http://schemas.openxmlformats.org/drawingml/2006/main" xmlns:r="http://schemas.openxmlformats.org/officeDocument/2006/relationships" xmlns:p="http://schemas.openxmlformats.org/presentationml/2006/main">
-  <p:cSld>
-    <p:spTree>
-      <p:nvGrpSpPr>
-        <p:cNvPr id="1" name="">
-          <a:extLst>
-            <a:ext uri="{FF2B5EF4-FFF2-40B4-BE49-F238E27FC236}">
-              <a16:creationId xmlns:a16="http://schemas.microsoft.com/office/drawing/2014/main" id="{129D368A-0EBB-72BB-5436-0DC379C638D5}"/>
-            </a:ext>
-          </a:extLst>
-        </p:cNvPr>
-        <p:cNvGrpSpPr/>
-        <p:nvPr/>
-      </p:nvGrpSpPr>
-      <p:grpSpPr>
-        <a:xfrm>
-          <a:off x="0" y="0"/>
-          <a:ext cx="0" cy="0"/>
-          <a:chOff x="0" y="0"/>
-          <a:chExt cx="0" cy="0"/>
-        </a:xfrm>
-      </p:grpSpPr>
-      <p:sp>
-        <p:nvSpPr>
-          <p:cNvPr id="2" name="Title 1">
-            <a:extLst>
-              <a:ext uri="{FF2B5EF4-FFF2-40B4-BE49-F238E27FC236}">
-                <a16:creationId xmlns:a16="http://schemas.microsoft.com/office/drawing/2014/main" id="{7B158CF8-A2A6-9F2A-300F-EF613C288B63}"/>
-              </a:ext>
-            </a:extLst>
-          </p:cNvPr>
-          <p:cNvSpPr>
-            <a:spLocks noGrp="1"/>
-          </p:cNvSpPr>
-          <p:nvPr>
-            <p:ph type="title"/>
-          </p:nvPr>
-        </p:nvSpPr>
-        <p:spPr/>
-        <p:txBody>
-          <a:bodyPr/>
-          <a:lstStyle/>
-          <a:p>
-            <a:r>
-              <a:rPr lang="en-US" dirty="0"/>
-              <a:t>Bonus questions to consider (after class)</a:t>
-            </a:r>
-          </a:p>
-        </p:txBody>
-      </p:sp>
-      <p:sp>
-        <p:nvSpPr>
-          <p:cNvPr id="3" name="Text Placeholder 2">
-            <a:extLst>
-              <a:ext uri="{FF2B5EF4-FFF2-40B4-BE49-F238E27FC236}">
-                <a16:creationId xmlns:a16="http://schemas.microsoft.com/office/drawing/2014/main" id="{B8A43981-0B83-5D51-AC0D-EF6CA6275D60}"/>
-              </a:ext>
-            </a:extLst>
-          </p:cNvPr>
-          <p:cNvSpPr>
-            <a:spLocks noGrp="1"/>
-          </p:cNvSpPr>
-          <p:nvPr>
-            <p:ph type="body" idx="1"/>
-          </p:nvPr>
-        </p:nvSpPr>
-        <p:spPr/>
-        <p:txBody>
-          <a:bodyPr/>
-          <a:lstStyle/>
-          <a:p>
-            <a:r>
-              <a:rPr lang="en-US" b="1" dirty="0"/>
-              <a:t>Metrics: </a:t>
-            </a:r>
-            <a:r>
-              <a:rPr lang="en-US" dirty="0"/>
-              <a:t>The system reports a correlation of 0.85. You have to send field teams to 3 of 10 towns each week. What number do you actually need?</a:t>
-            </a:r>
-          </a:p>
-          <a:p>
-            <a:pPr lvl="1"/>
-            <a:r>
-              <a:rPr lang="en-US" dirty="0"/>
-              <a:t>Correlation per town</a:t>
-            </a:r>
-          </a:p>
-          <a:p>
-            <a:pPr lvl="1"/>
-            <a:r>
-              <a:rPr lang="en-US" dirty="0"/>
-              <a:t>RMSE on the original case scale</a:t>
-            </a:r>
-          </a:p>
-          <a:p>
-            <a:pPr lvl="1"/>
-            <a:r>
-              <a:rPr lang="en-US" dirty="0"/>
-              <a:t>Precision at 3 towns</a:t>
-            </a:r>
-          </a:p>
-          <a:p>
-            <a:pPr lvl="1"/>
-            <a:r>
-              <a:rPr lang="en-US" dirty="0"/>
-              <a:t>Cases averted versus sending teams at random</a:t>
-            </a:r>
-          </a:p>
-          <a:p>
-            <a:endParaRPr lang="en-US" dirty="0"/>
-          </a:p>
-        </p:txBody>
-      </p:sp>
-    </p:spTree>
-    <p:extLst>
-      <p:ext uri="{BB962C8B-B14F-4D97-AF65-F5344CB8AC3E}">
-        <p14:creationId xmlns:p14="http://schemas.microsoft.com/office/powerpoint/2010/main" val="1785288315"/>
       </p:ext>
     </p:extLst>
   </p:cSld>
@@ -13828,6 +14631,260 @@
         <p:cNvPr id="1" name="">
           <a:extLst>
             <a:ext uri="{FF2B5EF4-FFF2-40B4-BE49-F238E27FC236}">
+              <a16:creationId xmlns:a16="http://schemas.microsoft.com/office/drawing/2014/main" id="{52FA6CF7-A5B6-9A4D-50FF-1081514A08D6}"/>
+            </a:ext>
+          </a:extLst>
+        </p:cNvPr>
+        <p:cNvGrpSpPr/>
+        <p:nvPr/>
+      </p:nvGrpSpPr>
+      <p:grpSpPr>
+        <a:xfrm>
+          <a:off x="0" y="0"/>
+          <a:ext cx="0" cy="0"/>
+          <a:chOff x="0" y="0"/>
+          <a:chExt cx="0" cy="0"/>
+        </a:xfrm>
+      </p:grpSpPr>
+      <p:sp>
+        <p:nvSpPr>
+          <p:cNvPr id="2" name="Title 1">
+            <a:extLst>
+              <a:ext uri="{FF2B5EF4-FFF2-40B4-BE49-F238E27FC236}">
+                <a16:creationId xmlns:a16="http://schemas.microsoft.com/office/drawing/2014/main" id="{EB78112A-6BD2-3FF4-D04E-8BA2089CD3A1}"/>
+              </a:ext>
+            </a:extLst>
+          </p:cNvPr>
+          <p:cNvSpPr>
+            <a:spLocks noGrp="1"/>
+          </p:cNvSpPr>
+          <p:nvPr>
+            <p:ph type="title"/>
+          </p:nvPr>
+        </p:nvSpPr>
+        <p:spPr/>
+        <p:txBody>
+          <a:bodyPr/>
+          <a:lstStyle/>
+          <a:p>
+            <a:r>
+              <a:rPr lang="en-US" dirty="0"/>
+              <a:t>Bonus questions to consider (after class)</a:t>
+            </a:r>
+          </a:p>
+        </p:txBody>
+      </p:sp>
+      <p:sp>
+        <p:nvSpPr>
+          <p:cNvPr id="3" name="Text Placeholder 2">
+            <a:extLst>
+              <a:ext uri="{FF2B5EF4-FFF2-40B4-BE49-F238E27FC236}">
+                <a16:creationId xmlns:a16="http://schemas.microsoft.com/office/drawing/2014/main" id="{7CC71FCE-FE5A-C561-CCEE-B98CB19A2373}"/>
+              </a:ext>
+            </a:extLst>
+          </p:cNvPr>
+          <p:cNvSpPr>
+            <a:spLocks noGrp="1"/>
+          </p:cNvSpPr>
+          <p:nvPr>
+            <p:ph type="body" idx="1"/>
+          </p:nvPr>
+        </p:nvSpPr>
+        <p:spPr/>
+        <p:txBody>
+          <a:bodyPr/>
+          <a:lstStyle/>
+          <a:p>
+            <a:r>
+              <a:rPr lang="en-US" b="1" dirty="0"/>
+              <a:t>Validation: </a:t>
+            </a:r>
+            <a:r>
+              <a:rPr lang="en-US" dirty="0"/>
+              <a:t>The model was validated with 5-fold cross-validation, with folds assigned randomly across town-weeks. What is the most serious consequence?</a:t>
+            </a:r>
+          </a:p>
+          <a:p>
+            <a:pPr lvl="1"/>
+            <a:r>
+              <a:rPr lang="en-US" dirty="0"/>
+              <a:t>Reported accuracy overstates forward performance</a:t>
+            </a:r>
+          </a:p>
+          <a:p>
+            <a:pPr lvl="1"/>
+            <a:r>
+              <a:rPr lang="en-US" dirty="0"/>
+              <a:t>Feature importances are unreliable</a:t>
+            </a:r>
+          </a:p>
+          <a:p>
+            <a:pPr lvl="1"/>
+            <a:r>
+              <a:rPr lang="en-US" dirty="0"/>
+              <a:t>Towns can't be compared to each other</a:t>
+            </a:r>
+          </a:p>
+          <a:p>
+            <a:pPr lvl="1"/>
+            <a:r>
+              <a:rPr lang="en-US" dirty="0"/>
+              <a:t>No real problem, since the model is retrained weekly anyway</a:t>
+            </a:r>
+          </a:p>
+          <a:p>
+            <a:endParaRPr lang="en-US" dirty="0"/>
+          </a:p>
+        </p:txBody>
+      </p:sp>
+    </p:spTree>
+    <p:extLst>
+      <p:ext uri="{BB962C8B-B14F-4D97-AF65-F5344CB8AC3E}">
+        <p14:creationId xmlns:p14="http://schemas.microsoft.com/office/powerpoint/2010/main" val="162559103"/>
+      </p:ext>
+    </p:extLst>
+  </p:cSld>
+  <p:clrMapOvr>
+    <a:masterClrMapping/>
+  </p:clrMapOvr>
+</p:sld>
+</file>
+
+<file path=ppt/slides/slide21.xml><?xml version="1.0" encoding="utf-8"?>
+<p:sld xmlns:a="http://schemas.openxmlformats.org/drawingml/2006/main" xmlns:r="http://schemas.openxmlformats.org/officeDocument/2006/relationships" xmlns:p="http://schemas.openxmlformats.org/presentationml/2006/main">
+  <p:cSld>
+    <p:spTree>
+      <p:nvGrpSpPr>
+        <p:cNvPr id="1" name="">
+          <a:extLst>
+            <a:ext uri="{FF2B5EF4-FFF2-40B4-BE49-F238E27FC236}">
+              <a16:creationId xmlns:a16="http://schemas.microsoft.com/office/drawing/2014/main" id="{129D368A-0EBB-72BB-5436-0DC379C638D5}"/>
+            </a:ext>
+          </a:extLst>
+        </p:cNvPr>
+        <p:cNvGrpSpPr/>
+        <p:nvPr/>
+      </p:nvGrpSpPr>
+      <p:grpSpPr>
+        <a:xfrm>
+          <a:off x="0" y="0"/>
+          <a:ext cx="0" cy="0"/>
+          <a:chOff x="0" y="0"/>
+          <a:chExt cx="0" cy="0"/>
+        </a:xfrm>
+      </p:grpSpPr>
+      <p:sp>
+        <p:nvSpPr>
+          <p:cNvPr id="2" name="Title 1">
+            <a:extLst>
+              <a:ext uri="{FF2B5EF4-FFF2-40B4-BE49-F238E27FC236}">
+                <a16:creationId xmlns:a16="http://schemas.microsoft.com/office/drawing/2014/main" id="{7B158CF8-A2A6-9F2A-300F-EF613C288B63}"/>
+              </a:ext>
+            </a:extLst>
+          </p:cNvPr>
+          <p:cNvSpPr>
+            <a:spLocks noGrp="1"/>
+          </p:cNvSpPr>
+          <p:nvPr>
+            <p:ph type="title"/>
+          </p:nvPr>
+        </p:nvSpPr>
+        <p:spPr/>
+        <p:txBody>
+          <a:bodyPr/>
+          <a:lstStyle/>
+          <a:p>
+            <a:r>
+              <a:rPr lang="en-US" dirty="0"/>
+              <a:t>Bonus questions to consider (after class)</a:t>
+            </a:r>
+          </a:p>
+        </p:txBody>
+      </p:sp>
+      <p:sp>
+        <p:nvSpPr>
+          <p:cNvPr id="3" name="Text Placeholder 2">
+            <a:extLst>
+              <a:ext uri="{FF2B5EF4-FFF2-40B4-BE49-F238E27FC236}">
+                <a16:creationId xmlns:a16="http://schemas.microsoft.com/office/drawing/2014/main" id="{B8A43981-0B83-5D51-AC0D-EF6CA6275D60}"/>
+              </a:ext>
+            </a:extLst>
+          </p:cNvPr>
+          <p:cNvSpPr>
+            <a:spLocks noGrp="1"/>
+          </p:cNvSpPr>
+          <p:nvPr>
+            <p:ph type="body" idx="1"/>
+          </p:nvPr>
+        </p:nvSpPr>
+        <p:spPr/>
+        <p:txBody>
+          <a:bodyPr/>
+          <a:lstStyle/>
+          <a:p>
+            <a:r>
+              <a:rPr lang="en-US" b="1" dirty="0"/>
+              <a:t>Metrics: </a:t>
+            </a:r>
+            <a:r>
+              <a:rPr lang="en-US" dirty="0"/>
+              <a:t>The system reports a correlation of 0.85. You have to send field teams to 3 of 10 towns each week. What number do you actually need?</a:t>
+            </a:r>
+          </a:p>
+          <a:p>
+            <a:pPr lvl="1"/>
+            <a:r>
+              <a:rPr lang="en-US" dirty="0"/>
+              <a:t>Correlation per town</a:t>
+            </a:r>
+          </a:p>
+          <a:p>
+            <a:pPr lvl="1"/>
+            <a:r>
+              <a:rPr lang="en-US" dirty="0"/>
+              <a:t>RMSE on the original case scale</a:t>
+            </a:r>
+          </a:p>
+          <a:p>
+            <a:pPr lvl="1"/>
+            <a:r>
+              <a:rPr lang="en-US" dirty="0"/>
+              <a:t>Precision at 3 towns</a:t>
+            </a:r>
+          </a:p>
+          <a:p>
+            <a:pPr lvl="1"/>
+            <a:r>
+              <a:rPr lang="en-US" dirty="0"/>
+              <a:t>Cases averted versus sending teams at random</a:t>
+            </a:r>
+          </a:p>
+          <a:p>
+            <a:endParaRPr lang="en-US" dirty="0"/>
+          </a:p>
+        </p:txBody>
+      </p:sp>
+    </p:spTree>
+    <p:extLst>
+      <p:ext uri="{BB962C8B-B14F-4D97-AF65-F5344CB8AC3E}">
+        <p14:creationId xmlns:p14="http://schemas.microsoft.com/office/powerpoint/2010/main" val="1785288315"/>
+      </p:ext>
+    </p:extLst>
+  </p:cSld>
+  <p:clrMapOvr>
+    <a:masterClrMapping/>
+  </p:clrMapOvr>
+</p:sld>
+</file>
+
+<file path=ppt/slides/slide22.xml><?xml version="1.0" encoding="utf-8"?>
+<p:sld xmlns:a="http://schemas.openxmlformats.org/drawingml/2006/main" xmlns:r="http://schemas.openxmlformats.org/officeDocument/2006/relationships" xmlns:p="http://schemas.openxmlformats.org/presentationml/2006/main">
+  <p:cSld>
+    <p:spTree>
+      <p:nvGrpSpPr>
+        <p:cNvPr id="1" name="">
+          <a:extLst>
+            <a:ext uri="{FF2B5EF4-FFF2-40B4-BE49-F238E27FC236}">
               <a16:creationId xmlns:a16="http://schemas.microsoft.com/office/drawing/2014/main" id="{C9AD2253-1E2C-F6FA-DC7F-5F2B1C54D18E}"/>
             </a:ext>
           </a:extLst>
@@ -13947,7 +15004,7 @@
 </p:sld>
 </file>
 
-<file path=ppt/slides/slide21.xml><?xml version="1.0" encoding="utf-8"?>
+<file path=ppt/slides/slide23.xml><?xml version="1.0" encoding="utf-8"?>
 <p:sld xmlns:a="http://schemas.openxmlformats.org/drawingml/2006/main" xmlns:r="http://schemas.openxmlformats.org/officeDocument/2006/relationships" xmlns:p="http://schemas.openxmlformats.org/presentationml/2006/main">
   <p:cSld>
     <p:spTree>
@@ -14074,7 +15131,7 @@
 </p:sld>
 </file>
 
-<file path=ppt/slides/slide22.xml><?xml version="1.0" encoding="utf-8"?>
+<file path=ppt/slides/slide24.xml><?xml version="1.0" encoding="utf-8"?>
 <p:sld xmlns:a="http://schemas.openxmlformats.org/drawingml/2006/main" xmlns:r="http://schemas.openxmlformats.org/officeDocument/2006/relationships" xmlns:p="http://schemas.openxmlformats.org/presentationml/2006/main">
   <p:cSld>
     <p:spTree>
@@ -14198,7 +15255,7 @@
 </p:sld>
 </file>
 
-<file path=ppt/slides/slide23.xml><?xml version="1.0" encoding="utf-8"?>
+<file path=ppt/slides/slide25.xml><?xml version="1.0" encoding="utf-8"?>
 <p:sld xmlns:a="http://schemas.openxmlformats.org/drawingml/2006/main" xmlns:r="http://schemas.openxmlformats.org/officeDocument/2006/relationships" xmlns:p="http://schemas.openxmlformats.org/presentationml/2006/main">
   <p:cSld>
     <p:spTree>
@@ -14322,7 +15379,7 @@
 </p:sld>
 </file>
 
-<file path=ppt/slides/slide24.xml><?xml version="1.0" encoding="utf-8"?>
+<file path=ppt/slides/slide26.xml><?xml version="1.0" encoding="utf-8"?>
 <p:sld xmlns:a="http://schemas.openxmlformats.org/drawingml/2006/main" xmlns:r="http://schemas.openxmlformats.org/officeDocument/2006/relationships" xmlns:p="http://schemas.openxmlformats.org/presentationml/2006/main">
   <p:cSld>
     <p:spTree>
@@ -14507,7 +15564,7 @@
 </p:sld>
 </file>
 
-<file path=ppt/slides/slide25.xml><?xml version="1.0" encoding="utf-8"?>
+<file path=ppt/slides/slide27.xml><?xml version="1.0" encoding="utf-8"?>
 <p:sld xmlns:a="http://schemas.openxmlformats.org/drawingml/2006/main" xmlns:r="http://schemas.openxmlformats.org/officeDocument/2006/relationships" xmlns:p="http://schemas.openxmlformats.org/presentationml/2006/main">
   <p:cSld>
     <p:spTree>
@@ -15690,6 +16747,57 @@
     <a:masterClrMapping/>
   </p:clrMapOvr>
 </p:sld>
+</file>
+
+<file path=ppt/tags/tag1.xml><?xml version="1.0" encoding="utf-8"?>
+<p:tagLst xmlns:a="http://schemas.openxmlformats.org/drawingml/2006/main" xmlns:r="http://schemas.openxmlformats.org/officeDocument/2006/relationships" xmlns:p="http://schemas.openxmlformats.org/presentationml/2006/main">
+  <p:tag name="SLIDO_APP_VERSION" val="1.5.0.0"/>
+  <p:tag name="SLIDO_PRESENTATION_ID" val="41b38481-a31f-4745-88b3-977b97929e47"/>
+  <p:tag name="SLIDO_EVENT_UUID" val="4ee70ca1-e1e6-4271-9fce-4efcf7d701cb"/>
+  <p:tag name="SLIDO_EVENT_SECTION_UUID" val="4e6b9f65-e842-4d53-9e0b-c4f65d721159"/>
+</p:tagLst>
+</file>
+
+<file path=ppt/tags/tag2.xml><?xml version="1.0" encoding="utf-8"?>
+<p:tagLst xmlns:a="http://schemas.openxmlformats.org/drawingml/2006/main" xmlns:r="http://schemas.openxmlformats.org/officeDocument/2006/relationships" xmlns:p="http://schemas.openxmlformats.org/presentationml/2006/main">
+  <p:tag name="SLIDO_TYPE" val="SlidoPoll"/>
+  <p:tag name="SLIDO_POLL_UUID" val="2b8e26da-f2b5-40b8-85ca-b9b1ef887fd3"/>
+  <p:tag name="SLIDO_TIMELINE" val="W3sicG9sbFF1ZXN0aW9uVXVpZCI6Ijk2MWY4MDU0LWU0YTYtNDJkMy1hOWE2LWM4MDNlZTIyZjg4YyIsInNob3dSZXN1bHRzIjpmYWxzZX0seyJwb2xsUXVlc3Rpb25VdWlkIjoiOTYxZjgwNTQtZTRhNi00MmQzLWE5YTYtYzgwM2VlMjJmODhjIiwic2hvd1Jlc3VsdHMiOnRydWV9XQ=="/>
+</p:tagLst>
+</file>
+
+<file path=ppt/tags/tag3.xml><?xml version="1.0" encoding="utf-8"?>
+<p:tagLst xmlns:a="http://schemas.openxmlformats.org/drawingml/2006/main" xmlns:r="http://schemas.openxmlformats.org/officeDocument/2006/relationships" xmlns:p="http://schemas.openxmlformats.org/presentationml/2006/main">
+  <p:tag name="SLIDO_ELEMENT" val="interaction_image"/>
+  <p:tag name="INTERACTION_TYPE" val="OpenText"/>
+</p:tagLst>
+</file>
+
+<file path=ppt/tags/tag4.xml><?xml version="1.0" encoding="utf-8"?>
+<p:tagLst xmlns:a="http://schemas.openxmlformats.org/drawingml/2006/main" xmlns:r="http://schemas.openxmlformats.org/officeDocument/2006/relationships" xmlns:p="http://schemas.openxmlformats.org/presentationml/2006/main">
+  <p:tag name="SLIDO_ELEMENT" val="title"/>
+</p:tagLst>
+</file>
+
+<file path=ppt/tags/tag5.xml><?xml version="1.0" encoding="utf-8"?>
+<p:tagLst xmlns:a="http://schemas.openxmlformats.org/drawingml/2006/main" xmlns:r="http://schemas.openxmlformats.org/officeDocument/2006/relationships" xmlns:p="http://schemas.openxmlformats.org/presentationml/2006/main">
+  <p:tag name="SLIDO_TYPE" val="SlidoPoll"/>
+  <p:tag name="SLIDO_POLL_UUID" val="5ce965c5-d16c-4783-ab9b-94f10b2d3d0a"/>
+  <p:tag name="SLIDO_TIMELINE" val="W3sic2hvd1Jlc3VsdHMiOmZhbHNlLCJwb2xsUXVlc3Rpb25VdWlkIjoiZDQzOTQzZWYtNzkxZC00N2Q0LWFkMWItYzIzMGJlYWNmZDIwIn0seyJzaG93UmVzdWx0cyI6dHJ1ZSwicG9sbFF1ZXN0aW9uVXVpZCI6ImQ0Mzk0M2VmLTc5MWQtNDdkNC1hZDFiLWMyMzBiZWFjZmQyMCJ9XQ=="/>
+</p:tagLst>
+</file>
+
+<file path=ppt/tags/tag6.xml><?xml version="1.0" encoding="utf-8"?>
+<p:tagLst xmlns:a="http://schemas.openxmlformats.org/drawingml/2006/main" xmlns:r="http://schemas.openxmlformats.org/officeDocument/2006/relationships" xmlns:p="http://schemas.openxmlformats.org/presentationml/2006/main">
+  <p:tag name="SLIDO_ELEMENT" val="interaction_image"/>
+  <p:tag name="INTERACTION_TYPE" val="Rating"/>
+</p:tagLst>
+</file>
+
+<file path=ppt/tags/tag7.xml><?xml version="1.0" encoding="utf-8"?>
+<p:tagLst xmlns:a="http://schemas.openxmlformats.org/drawingml/2006/main" xmlns:r="http://schemas.openxmlformats.org/officeDocument/2006/relationships" xmlns:p="http://schemas.openxmlformats.org/presentationml/2006/main">
+  <p:tag name="SLIDO_ELEMENT" val="title"/>
+</p:tagLst>
 </file>
 
 <file path=ppt/theme/theme1.xml><?xml version="1.0" encoding="utf-8"?>

--- a/Lectures/03-casestudies.pptx
+++ b/Lectures/03-casestudies.pptx
@@ -275,7 +275,7 @@
       <p15:sldGuideLst xmlns:p15="http://schemas.microsoft.com/office/powerpoint/2012/main"/>
     </p:ext>
     <p:ext uri="http://customooxmlschemas.google.com/">
-      <go:slidesCustomData xmlns:go="http://customooxmlschemas.google.com/" xmlns:p15="http://schemas.microsoft.com/office/powerpoint/2012/main" xmlns:p14="http://schemas.microsoft.com/office/powerpoint/2010/main" xmlns:com="http://schemas.openxmlformats.org/drawingml/2006/compatibility" xmlns:pvml="urn:schemas-microsoft-com:office:powerpoint" xmlns:v="urn:schemas-microsoft-com:vml" xmlns:o="urn:schemas-microsoft-com:office:office" xmlns:dgm="http://schemas.openxmlformats.org/drawingml/2006/diagram" xmlns:c="http://schemas.openxmlformats.org/drawingml/2006/chart" xmlns:mv="urn:schemas-microsoft-com:mac:vml" xmlns:mc="http://schemas.openxmlformats.org/markup-compatibility/2006" xmlns="" r:id="rId31" roundtripDataSignature="AMtx7mjFyVUGRZWio+dc9dxzYsimUxNJbg=="/>
+      <go:slidesCustomData xmlns="" xmlns:mc="http://schemas.openxmlformats.org/markup-compatibility/2006" xmlns:mv="urn:schemas-microsoft-com:mac:vml" xmlns:c="http://schemas.openxmlformats.org/drawingml/2006/chart" xmlns:dgm="http://schemas.openxmlformats.org/drawingml/2006/diagram" xmlns:o="urn:schemas-microsoft-com:office:office" xmlns:v="urn:schemas-microsoft-com:vml" xmlns:pvml="urn:schemas-microsoft-com:office:powerpoint" xmlns:com="http://schemas.openxmlformats.org/drawingml/2006/compatibility" xmlns:p14="http://schemas.microsoft.com/office/powerpoint/2010/main" xmlns:p15="http://schemas.microsoft.com/office/powerpoint/2012/main" xmlns:go="http://customooxmlschemas.google.com/" r:id="rId31" roundtripDataSignature="AMtx7mjFyVUGRZWio+dc9dxzYsimUxNJbg=="/>
     </p:ext>
   </p:extLst>
 </p:presentation>
@@ -6639,6 +6639,115 @@
           <a:bodyPr/>
           <a:lstStyle/>
           <a:p>
+            <a:endParaRPr lang="en-US" dirty="0"/>
+          </a:p>
+        </p:txBody>
+      </p:sp>
+      <p:sp>
+        <p:nvSpPr>
+          <p:cNvPr id="4" name="Slide Number Placeholder 3"/>
+          <p:cNvSpPr>
+            <a:spLocks noGrp="1"/>
+          </p:cNvSpPr>
+          <p:nvPr>
+            <p:ph type="sldNum" idx="12"/>
+          </p:nvPr>
+        </p:nvSpPr>
+        <p:spPr/>
+        <p:txBody>
+          <a:bodyPr/>
+          <a:lstStyle/>
+          <a:p>
+            <a:pPr marL="0" marR="0" lvl="0" indent="0" algn="r" rtl="0">
+              <a:spcBef>
+                <a:spcPts val="0"/>
+              </a:spcBef>
+              <a:spcAft>
+                <a:spcPts val="0"/>
+              </a:spcAft>
+              <a:buNone/>
+            </a:pPr>
+            <a:fld id="{00000000-1234-1234-1234-123412341234}" type="slidenum">
+              <a:rPr lang="en-US" sz="1200" b="0" i="0" u="none" strike="noStrike" cap="none" smtClean="0">
+                <a:solidFill>
+                  <a:schemeClr val="dk1"/>
+                </a:solidFill>
+                <a:latin typeface="Calibri"/>
+                <a:ea typeface="Calibri"/>
+                <a:cs typeface="Calibri"/>
+                <a:sym typeface="Calibri"/>
+              </a:rPr>
+              <a:t>2</a:t>
+            </a:fld>
+            <a:endParaRPr lang="en-US" sz="1200" b="0" i="0" u="none" strike="noStrike" cap="none">
+              <a:solidFill>
+                <a:schemeClr val="dk1"/>
+              </a:solidFill>
+              <a:latin typeface="Calibri"/>
+              <a:ea typeface="Calibri"/>
+              <a:cs typeface="Calibri"/>
+              <a:sym typeface="Calibri"/>
+            </a:endParaRPr>
+          </a:p>
+        </p:txBody>
+      </p:sp>
+    </p:spTree>
+    <p:extLst>
+      <p:ext uri="{BB962C8B-B14F-4D97-AF65-F5344CB8AC3E}">
+        <p14:creationId xmlns:p14="http://schemas.microsoft.com/office/powerpoint/2010/main" val="321387240"/>
+      </p:ext>
+    </p:extLst>
+  </p:cSld>
+  <p:clrMapOvr>
+    <a:masterClrMapping/>
+  </p:clrMapOvr>
+</p:notes>
+</file>
+
+<file path=ppt/notesSlides/notesSlide3.xml><?xml version="1.0" encoding="utf-8"?>
+<p:notes xmlns:a="http://schemas.openxmlformats.org/drawingml/2006/main" xmlns:r="http://schemas.openxmlformats.org/officeDocument/2006/relationships" xmlns:p="http://schemas.openxmlformats.org/presentationml/2006/main">
+  <p:cSld>
+    <p:spTree>
+      <p:nvGrpSpPr>
+        <p:cNvPr id="1" name=""/>
+        <p:cNvGrpSpPr/>
+        <p:nvPr/>
+      </p:nvGrpSpPr>
+      <p:grpSpPr>
+        <a:xfrm>
+          <a:off x="0" y="0"/>
+          <a:ext cx="0" cy="0"/>
+          <a:chOff x="0" y="0"/>
+          <a:chExt cx="0" cy="0"/>
+        </a:xfrm>
+      </p:grpSpPr>
+      <p:sp>
+        <p:nvSpPr>
+          <p:cNvPr id="2" name="Slide Image Placeholder 1"/>
+          <p:cNvSpPr>
+            <a:spLocks noGrp="1" noRot="1" noChangeAspect="1"/>
+          </p:cNvSpPr>
+          <p:nvPr>
+            <p:ph type="sldImg"/>
+          </p:nvPr>
+        </p:nvSpPr>
+        <p:spPr/>
+      </p:sp>
+      <p:sp>
+        <p:nvSpPr>
+          <p:cNvPr id="3" name="Notes Placeholder 2"/>
+          <p:cNvSpPr>
+            <a:spLocks noGrp="1"/>
+          </p:cNvSpPr>
+          <p:nvPr>
+            <p:ph type="body" idx="1"/>
+          </p:nvPr>
+        </p:nvSpPr>
+        <p:spPr/>
+        <p:txBody>
+          <a:bodyPr/>
+          <a:lstStyle/>
+          <a:p>
             <a:pPr marL="457200" marR="0" lvl="0" indent="-228600" algn="l" defTabSz="914400" rtl="0" eaLnBrk="1" fontAlgn="auto" latinLnBrk="0" hangingPunct="1">
               <a:lnSpc>
                 <a:spcPct val="100000"/>
@@ -6736,6 +6845,363 @@
     <p:extLst>
       <p:ext uri="{BB962C8B-B14F-4D97-AF65-F5344CB8AC3E}">
         <p14:creationId xmlns:p14="http://schemas.microsoft.com/office/powerpoint/2010/main" val="2396890989"/>
+      </p:ext>
+    </p:extLst>
+  </p:cSld>
+  <p:clrMapOvr>
+    <a:masterClrMapping/>
+  </p:clrMapOvr>
+</p:notes>
+</file>
+
+<file path=ppt/notesSlides/notesSlide4.xml><?xml version="1.0" encoding="utf-8"?>
+<p:notes xmlns:a="http://schemas.openxmlformats.org/drawingml/2006/main" xmlns:r="http://schemas.openxmlformats.org/officeDocument/2006/relationships" xmlns:p="http://schemas.openxmlformats.org/presentationml/2006/main">
+  <p:cSld>
+    <p:spTree>
+      <p:nvGrpSpPr>
+        <p:cNvPr id="1" name=""/>
+        <p:cNvGrpSpPr/>
+        <p:nvPr/>
+      </p:nvGrpSpPr>
+      <p:grpSpPr>
+        <a:xfrm>
+          <a:off x="0" y="0"/>
+          <a:ext cx="0" cy="0"/>
+          <a:chOff x="0" y="0"/>
+          <a:chExt cx="0" cy="0"/>
+        </a:xfrm>
+      </p:grpSpPr>
+      <p:sp>
+        <p:nvSpPr>
+          <p:cNvPr id="2" name="Slide Image Placeholder 1"/>
+          <p:cNvSpPr>
+            <a:spLocks noGrp="1" noRot="1" noChangeAspect="1"/>
+          </p:cNvSpPr>
+          <p:nvPr>
+            <p:ph type="sldImg"/>
+          </p:nvPr>
+        </p:nvSpPr>
+        <p:spPr/>
+      </p:sp>
+      <p:sp>
+        <p:nvSpPr>
+          <p:cNvPr id="3" name="Notes Placeholder 2"/>
+          <p:cNvSpPr>
+            <a:spLocks noGrp="1"/>
+          </p:cNvSpPr>
+          <p:nvPr>
+            <p:ph type="body" idx="1"/>
+          </p:nvPr>
+        </p:nvSpPr>
+        <p:spPr/>
+        <p:txBody>
+          <a:bodyPr/>
+          <a:lstStyle/>
+          <a:p>
+            <a:r>
+              <a:rPr lang="en-US" b="1" dirty="0"/>
+              <a:t>Goals : weak.</a:t>
+            </a:r>
+            <a:r>
+              <a:rPr lang="en-US" dirty="0"/>
+              <a:t> The goal is stated as early detection to enable containment, but never operationalized. There's no success metric: cases averted, deaths averted, response time reduced, coverage of high-burden areas. In practice, correlation with observational data becomes the </a:t>
+            </a:r>
+            <a:r>
+              <a:rPr lang="en-US" dirty="0" err="1"/>
+              <a:t>implici</a:t>
+            </a:r>
+            <a:r>
+              <a:rPr lang="en-US" dirty="0"/>
+              <a:t> goal  - not a policy goal. this is a resource-allocation problem but an outcome goal is never specified</a:t>
+            </a:r>
+          </a:p>
+        </p:txBody>
+      </p:sp>
+      <p:sp>
+        <p:nvSpPr>
+          <p:cNvPr id="4" name="Slide Number Placeholder 3"/>
+          <p:cNvSpPr>
+            <a:spLocks noGrp="1"/>
+          </p:cNvSpPr>
+          <p:nvPr>
+            <p:ph type="sldNum" idx="12"/>
+          </p:nvPr>
+        </p:nvSpPr>
+        <p:spPr/>
+        <p:txBody>
+          <a:bodyPr/>
+          <a:lstStyle/>
+          <a:p>
+            <a:pPr marL="0" marR="0" lvl="0" indent="0" algn="r" rtl="0">
+              <a:spcBef>
+                <a:spcPts val="0"/>
+              </a:spcBef>
+              <a:spcAft>
+                <a:spcPts val="0"/>
+              </a:spcAft>
+              <a:buNone/>
+            </a:pPr>
+            <a:fld id="{00000000-1234-1234-1234-123412341234}" type="slidenum">
+              <a:rPr lang="en-US" sz="1200" b="0" i="0" u="none" strike="noStrike" cap="none" smtClean="0">
+                <a:solidFill>
+                  <a:schemeClr val="dk1"/>
+                </a:solidFill>
+                <a:latin typeface="Calibri"/>
+                <a:ea typeface="Calibri"/>
+                <a:cs typeface="Calibri"/>
+                <a:sym typeface="Calibri"/>
+              </a:rPr>
+              <a:t>11</a:t>
+            </a:fld>
+            <a:endParaRPr lang="en-US" sz="1200" b="0" i="0" u="none" strike="noStrike" cap="none">
+              <a:solidFill>
+                <a:schemeClr val="dk1"/>
+              </a:solidFill>
+              <a:latin typeface="Calibri"/>
+              <a:ea typeface="Calibri"/>
+              <a:cs typeface="Calibri"/>
+              <a:sym typeface="Calibri"/>
+            </a:endParaRPr>
+          </a:p>
+        </p:txBody>
+      </p:sp>
+    </p:spTree>
+    <p:extLst>
+      <p:ext uri="{BB962C8B-B14F-4D97-AF65-F5344CB8AC3E}">
+        <p14:creationId xmlns:p14="http://schemas.microsoft.com/office/powerpoint/2010/main" val="1962157718"/>
+      </p:ext>
+    </p:extLst>
+  </p:cSld>
+  <p:clrMapOvr>
+    <a:masterClrMapping/>
+  </p:clrMapOvr>
+</p:notes>
+</file>
+
+<file path=ppt/notesSlides/notesSlide5.xml><?xml version="1.0" encoding="utf-8"?>
+<p:notes xmlns:a="http://schemas.openxmlformats.org/drawingml/2006/main" xmlns:r="http://schemas.openxmlformats.org/officeDocument/2006/relationships" xmlns:p="http://schemas.openxmlformats.org/presentationml/2006/main">
+  <p:cSld>
+    <p:spTree>
+      <p:nvGrpSpPr>
+        <p:cNvPr id="1" name=""/>
+        <p:cNvGrpSpPr/>
+        <p:nvPr/>
+      </p:nvGrpSpPr>
+      <p:grpSpPr>
+        <a:xfrm>
+          <a:off x="0" y="0"/>
+          <a:ext cx="0" cy="0"/>
+          <a:chOff x="0" y="0"/>
+          <a:chExt cx="0" cy="0"/>
+        </a:xfrm>
+      </p:grpSpPr>
+      <p:sp>
+        <p:nvSpPr>
+          <p:cNvPr id="2" name="Slide Image Placeholder 1"/>
+          <p:cNvSpPr>
+            <a:spLocks noGrp="1" noRot="1" noChangeAspect="1"/>
+          </p:cNvSpPr>
+          <p:nvPr>
+            <p:ph type="sldImg"/>
+          </p:nvPr>
+        </p:nvSpPr>
+        <p:spPr/>
+      </p:sp>
+      <p:sp>
+        <p:nvSpPr>
+          <p:cNvPr id="3" name="Notes Placeholder 2"/>
+          <p:cNvSpPr>
+            <a:spLocks noGrp="1"/>
+          </p:cNvSpPr>
+          <p:nvPr>
+            <p:ph type="body" idx="1"/>
+          </p:nvPr>
+        </p:nvSpPr>
+        <p:spPr/>
+        <p:txBody>
+          <a:bodyPr/>
+          <a:lstStyle/>
+          <a:p>
+            <a:r>
+              <a:rPr lang="en-US" b="1" dirty="0"/>
+              <a:t>Actions - well-chosen but under-specified: </a:t>
+            </a:r>
+            <a:r>
+              <a:rPr lang="en-US" dirty="0"/>
+              <a:t>actions exist (spraying, source reduction, targeted awareness, hospital bed preparation), but the </a:t>
+            </a:r>
+            <a:r>
+              <a:rPr lang="en-US" i="1" dirty="0"/>
+              <a:t>capacity</a:t>
+            </a:r>
+            <a:r>
+              <a:rPr lang="en-US" dirty="0"/>
+              <a:t> of the action is never stated. How many towns can be treated in a week? How many teams? Without that number we can't choose k, can't choose a metric, and can't tell whether a ranking is good enough. Similarly, the 2–3 week horizon appears to be chosen because it's what the data supports. The question is how long mobilization actually takes, and whether a 1-week or 4-week horizon would serve the action better.</a:t>
+            </a:r>
+          </a:p>
+        </p:txBody>
+      </p:sp>
+      <p:sp>
+        <p:nvSpPr>
+          <p:cNvPr id="4" name="Slide Number Placeholder 3"/>
+          <p:cNvSpPr>
+            <a:spLocks noGrp="1"/>
+          </p:cNvSpPr>
+          <p:nvPr>
+            <p:ph type="sldNum" idx="12"/>
+          </p:nvPr>
+        </p:nvSpPr>
+        <p:spPr/>
+        <p:txBody>
+          <a:bodyPr/>
+          <a:lstStyle/>
+          <a:p>
+            <a:pPr marL="0" marR="0" lvl="0" indent="0" algn="r" rtl="0">
+              <a:spcBef>
+                <a:spcPts val="0"/>
+              </a:spcBef>
+              <a:spcAft>
+                <a:spcPts val="0"/>
+              </a:spcAft>
+              <a:buNone/>
+            </a:pPr>
+            <a:fld id="{00000000-1234-1234-1234-123412341234}" type="slidenum">
+              <a:rPr lang="en-US" sz="1200" b="0" i="0" u="none" strike="noStrike" cap="none" smtClean="0">
+                <a:solidFill>
+                  <a:schemeClr val="dk1"/>
+                </a:solidFill>
+                <a:latin typeface="Calibri"/>
+                <a:ea typeface="Calibri"/>
+                <a:cs typeface="Calibri"/>
+                <a:sym typeface="Calibri"/>
+              </a:rPr>
+              <a:t>16</a:t>
+            </a:fld>
+            <a:endParaRPr lang="en-US" sz="1200" b="0" i="0" u="none" strike="noStrike" cap="none">
+              <a:solidFill>
+                <a:schemeClr val="dk1"/>
+              </a:solidFill>
+              <a:latin typeface="Calibri"/>
+              <a:ea typeface="Calibri"/>
+              <a:cs typeface="Calibri"/>
+              <a:sym typeface="Calibri"/>
+            </a:endParaRPr>
+          </a:p>
+        </p:txBody>
+      </p:sp>
+    </p:spTree>
+    <p:extLst>
+      <p:ext uri="{BB962C8B-B14F-4D97-AF65-F5344CB8AC3E}">
+        <p14:creationId xmlns:p14="http://schemas.microsoft.com/office/powerpoint/2010/main" val="1416354011"/>
+      </p:ext>
+    </p:extLst>
+  </p:cSld>
+  <p:clrMapOvr>
+    <a:masterClrMapping/>
+  </p:clrMapOvr>
+</p:notes>
+</file>
+
+<file path=ppt/notesSlides/notesSlide6.xml><?xml version="1.0" encoding="utf-8"?>
+<p:notes xmlns:a="http://schemas.openxmlformats.org/drawingml/2006/main" xmlns:r="http://schemas.openxmlformats.org/officeDocument/2006/relationships" xmlns:p="http://schemas.openxmlformats.org/presentationml/2006/main">
+  <p:cSld>
+    <p:spTree>
+      <p:nvGrpSpPr>
+        <p:cNvPr id="1" name=""/>
+        <p:cNvGrpSpPr/>
+        <p:nvPr/>
+      </p:nvGrpSpPr>
+      <p:grpSpPr>
+        <a:xfrm>
+          <a:off x="0" y="0"/>
+          <a:ext cx="0" cy="0"/>
+          <a:chOff x="0" y="0"/>
+          <a:chExt cx="0" cy="0"/>
+        </a:xfrm>
+      </p:grpSpPr>
+      <p:sp>
+        <p:nvSpPr>
+          <p:cNvPr id="2" name="Slide Image Placeholder 1"/>
+          <p:cNvSpPr>
+            <a:spLocks noGrp="1" noRot="1" noChangeAspect="1"/>
+          </p:cNvSpPr>
+          <p:nvPr>
+            <p:ph type="sldImg"/>
+          </p:nvPr>
+        </p:nvSpPr>
+        <p:spPr/>
+      </p:sp>
+      <p:sp>
+        <p:nvSpPr>
+          <p:cNvPr id="3" name="Notes Placeholder 2"/>
+          <p:cNvSpPr>
+            <a:spLocks noGrp="1"/>
+          </p:cNvSpPr>
+          <p:nvPr>
+            <p:ph type="body" idx="1"/>
+          </p:nvPr>
+        </p:nvSpPr>
+        <p:spPr/>
+        <p:txBody>
+          <a:bodyPr/>
+          <a:lstStyle/>
+          <a:p>
+            <a:endParaRPr lang="en-US" dirty="0"/>
+          </a:p>
+        </p:txBody>
+      </p:sp>
+      <p:sp>
+        <p:nvSpPr>
+          <p:cNvPr id="4" name="Slide Number Placeholder 3"/>
+          <p:cNvSpPr>
+            <a:spLocks noGrp="1"/>
+          </p:cNvSpPr>
+          <p:nvPr>
+            <p:ph type="sldNum" idx="12"/>
+          </p:nvPr>
+        </p:nvSpPr>
+        <p:spPr/>
+        <p:txBody>
+          <a:bodyPr/>
+          <a:lstStyle/>
+          <a:p>
+            <a:pPr marL="0" marR="0" lvl="0" indent="0" algn="r" rtl="0">
+              <a:spcBef>
+                <a:spcPts val="0"/>
+              </a:spcBef>
+              <a:spcAft>
+                <a:spcPts val="0"/>
+              </a:spcAft>
+              <a:buNone/>
+            </a:pPr>
+            <a:fld id="{00000000-1234-1234-1234-123412341234}" type="slidenum">
+              <a:rPr lang="en-US" sz="1200" b="0" i="0" u="none" strike="noStrike" cap="none" smtClean="0">
+                <a:solidFill>
+                  <a:schemeClr val="dk1"/>
+                </a:solidFill>
+                <a:latin typeface="Calibri"/>
+                <a:ea typeface="Calibri"/>
+                <a:cs typeface="Calibri"/>
+                <a:sym typeface="Calibri"/>
+              </a:rPr>
+              <a:t>22</a:t>
+            </a:fld>
+            <a:endParaRPr lang="en-US" sz="1200" b="0" i="0" u="none" strike="noStrike" cap="none">
+              <a:solidFill>
+                <a:schemeClr val="dk1"/>
+              </a:solidFill>
+              <a:latin typeface="Calibri"/>
+              <a:ea typeface="Calibri"/>
+              <a:cs typeface="Calibri"/>
+              <a:sym typeface="Calibri"/>
+            </a:endParaRPr>
+          </a:p>
+        </p:txBody>
+      </p:sp>
+    </p:spTree>
+    <p:extLst>
+      <p:ext uri="{BB962C8B-B14F-4D97-AF65-F5344CB8AC3E}">
+        <p14:creationId xmlns:p14="http://schemas.microsoft.com/office/powerpoint/2010/main" val="119244612"/>
       </p:ext>
     </p:extLst>
   </p:cSld>
